--- a/output/Module02_V11_Updated.pptx
+++ b/output/Module02_V11_Updated.pptx
@@ -9,10 +9,11 @@
     <p:sldId id="257" r:id="rId8"/>
     <p:sldId id="258" r:id="rId9"/>
     <p:sldId id="259" r:id="rId10"/>
+    <p:sldId id="260" r:id="rId11"/>
+    <p:sldId id="264" r:id="rId15"/>
+    <p:sldId id="261" r:id="rId12"/>
+    <p:sldId id="262" r:id="rId13"/>
     <p:sldId id="263" r:id="rId14"/>
-    <p:sldId id="262" r:id="rId13"/>
-    <p:sldId id="260" r:id="rId11"/>
-    <p:sldId id="261" r:id="rId12"/>
   </p:sldIdLst>
   <p:sldSz cx="12191695" cy="6858000" type="screen4x3"/>
   <p:notesSz cx="6858000" cy="9144000"/>
@@ -3111,8 +3112,8 @@
         </p:nvSpPr>
         <p:spPr>
           <a:xfrm>
-            <a:off x="822960" y="1280160"/>
-            <a:ext cx="10515600" cy="731520"/>
+            <a:off x="822960" y="1097280"/>
+            <a:ext cx="10515600" cy="640080"/>
           </a:xfrm>
           <a:prstGeom prst="rect">
             <a:avLst/>
@@ -3125,15 +3126,15 @@
           </a:bodyPr>
           <a:lstStyle/>
           <a:p>
-            <a:pPr algn="r" rtl="1"/>
-            <a:r>
-              <a:rPr sz="3400" b="1">
+            <a:pPr algn="l" rtl="0"/>
+            <a:r>
+              <a:rPr sz="2800" b="1">
                 <a:solidFill>
                   <a:srgbClr val="1F4E79"/>
                 </a:solidFill>
                 <a:latin typeface="Calibri"/>
               </a:rPr>
-              <a:t>V11</a:t>
+              <a:t>Module 02  |  V11</a:t>
             </a:r>
           </a:p>
         </p:txBody>
@@ -3146,7 +3147,7 @@
         </p:nvSpPr>
         <p:spPr>
           <a:xfrm>
-            <a:off x="822960" y="2194560"/>
+            <a:off x="822960" y="1920240"/>
             <a:ext cx="10515600" cy="1097280"/>
           </a:xfrm>
           <a:prstGeom prst="rect">
@@ -3162,11 +3163,11 @@
           <a:p>
             <a:pPr algn="r" rtl="1"/>
             <a:r>
-              <a:rPr sz="4800" b="1">
+              <a:rPr sz="4400" b="1">
                 <a:solidFill>
                   <a:srgbClr val="1F3B5C"/>
                 </a:solidFill>
-                <a:latin typeface="Calibri"/>
+                <a:latin typeface="Arial"/>
               </a:rPr>
               <a:t>حوكمة البيانات وسلسلة العهدة والفهرسة</a:t>
             </a:r>
@@ -3181,7 +3182,7 @@
         </p:nvSpPr>
         <p:spPr>
           <a:xfrm>
-            <a:off x="822960" y="3566160"/>
+            <a:off x="822960" y="3200400"/>
             <a:ext cx="10515600" cy="914400"/>
           </a:xfrm>
           <a:prstGeom prst="rect">
@@ -3195,9 +3196,9 @@
           </a:bodyPr>
           <a:lstStyle/>
           <a:p>
-            <a:pPr algn="r" rtl="0"/>
-            <a:r>
-              <a:rPr sz="3400" b="0">
+            <a:pPr algn="l" rtl="0"/>
+            <a:r>
+              <a:rPr sz="3000" b="0">
                 <a:solidFill>
                   <a:srgbClr val="333333"/>
                 </a:solidFill>
@@ -3216,7 +3217,7 @@
         </p:nvSpPr>
         <p:spPr>
           <a:xfrm>
-            <a:off x="822960" y="5120640"/>
+            <a:off x="822960" y="4937760"/>
             <a:ext cx="10515600" cy="548640"/>
           </a:xfrm>
           <a:prstGeom prst="rect">
@@ -3236,9 +3237,254 @@
                 <a:solidFill>
                   <a:srgbClr val="666666"/>
                 </a:solidFill>
+                <a:latin typeface="Arial"/>
+              </a:rPr>
+              <a:t>Module 02 — Data &amp; AI Engineering Track  |  الوحدة الثانية</a:t>
+            </a:r>
+          </a:p>
+        </p:txBody>
+      </p:sp>
+      <p:sp>
+        <p:nvSpPr>
+          <p:cNvPr id="6" name="TextBox 5"/>
+          <p:cNvSpPr txBox="1"/>
+          <p:nvPr/>
+        </p:nvSpPr>
+        <p:spPr>
+          <a:xfrm>
+            <a:off x="822960" y="5486400"/>
+            <a:ext cx="10515600" cy="457200"/>
+          </a:xfrm>
+          <a:prstGeom prst="rect">
+            <a:avLst/>
+          </a:prstGeom>
+          <a:noFill/>
+        </p:spPr>
+        <p:txBody>
+          <a:bodyPr wrap="square">
+            <a:spAutoFit/>
+          </a:bodyPr>
+          <a:lstStyle/>
+          <a:p>
+            <a:pPr algn="l" rtl="0"/>
+            <a:r>
+              <a:rPr sz="1400" b="0">
+                <a:solidFill>
+                  <a:srgbClr val="666666"/>
+                </a:solidFill>
                 <a:latin typeface="Calibri"/>
               </a:rPr>
+              <a:t>Light theme  |  Bilingual AR/EN  |  Ready to present</a:t>
+            </a:r>
+          </a:p>
+        </p:txBody>
+      </p:sp>
+      <p:sp>
+        <p:nvSpPr>
+          <p:cNvPr id="7" name="TextBox 6"/>
+          <p:cNvSpPr txBox="1"/>
+          <p:nvPr/>
+        </p:nvSpPr>
+        <p:spPr>
+          <a:xfrm>
+            <a:off x="640080" y="6400800"/>
+            <a:ext cx="8686800" cy="320040"/>
+          </a:xfrm>
+          <a:prstGeom prst="rect">
+            <a:avLst/>
+          </a:prstGeom>
+          <a:noFill/>
+        </p:spPr>
+        <p:txBody>
+          <a:bodyPr wrap="square">
+            <a:spAutoFit/>
+          </a:bodyPr>
+          <a:lstStyle/>
+          <a:p>
+            <a:pPr algn="r" rtl="1"/>
+            <a:r>
+              <a:rPr sz="1000" b="0">
+                <a:solidFill>
+                  <a:srgbClr val="666666"/>
+                </a:solidFill>
+                <a:latin typeface="Arial"/>
+              </a:rPr>
               <a:t>Module 02 — Data &amp; AI Engineering Track  |  الوحدة الثانية</a:t>
+            </a:r>
+          </a:p>
+        </p:txBody>
+      </p:sp>
+      <p:sp>
+        <p:nvSpPr>
+          <p:cNvPr id="8" name="TextBox 7"/>
+          <p:cNvSpPr txBox="1"/>
+          <p:nvPr/>
+        </p:nvSpPr>
+        <p:spPr>
+          <a:xfrm>
+            <a:off x="9601200" y="6400800"/>
+            <a:ext cx="1920240" cy="320040"/>
+          </a:xfrm>
+          <a:prstGeom prst="rect">
+            <a:avLst/>
+          </a:prstGeom>
+          <a:noFill/>
+        </p:spPr>
+        <p:txBody>
+          <a:bodyPr wrap="square">
+            <a:spAutoFit/>
+          </a:bodyPr>
+          <a:lstStyle/>
+          <a:p>
+            <a:pPr algn="l" rtl="0"/>
+            <a:r>
+              <a:rPr sz="1000" b="0">
+                <a:solidFill>
+                  <a:srgbClr val="666666"/>
+                </a:solidFill>
+                <a:latin typeface="Calibri"/>
+              </a:rPr>
+              <a:t>V11  •  1/11</a:t>
+            </a:r>
+          </a:p>
+        </p:txBody>
+      </p:sp>
+      <p:sp>
+        <p:nvSpPr>
+          <p:cNvPr id="9" name="TextBox 8"/>
+          <p:cNvSpPr txBox="1"/>
+          <p:nvPr/>
+        </p:nvSpPr>
+        <p:spPr>
+          <a:xfrm>
+            <a:off x="640080" y="6400800"/>
+            <a:ext cx="8686800" cy="320040"/>
+          </a:xfrm>
+          <a:prstGeom prst="rect">
+            <a:avLst/>
+          </a:prstGeom>
+          <a:noFill/>
+        </p:spPr>
+        <p:txBody>
+          <a:bodyPr wrap="square">
+            <a:spAutoFit/>
+          </a:bodyPr>
+          <a:lstStyle/>
+          <a:p>
+            <a:pPr algn="r" rtl="1"/>
+            <a:r>
+              <a:rPr sz="1000" b="0">
+                <a:solidFill>
+                  <a:srgbClr val="666666"/>
+                </a:solidFill>
+                <a:latin typeface="Arial"/>
+              </a:rPr>
+              <a:t>Module 02 — Data &amp; AI Engineering Track  |  الوحدة الثانية</a:t>
+            </a:r>
+          </a:p>
+        </p:txBody>
+      </p:sp>
+      <p:sp>
+        <p:nvSpPr>
+          <p:cNvPr id="10" name="TextBox 9"/>
+          <p:cNvSpPr txBox="1"/>
+          <p:nvPr/>
+        </p:nvSpPr>
+        <p:spPr>
+          <a:xfrm>
+            <a:off x="9601200" y="6400800"/>
+            <a:ext cx="1920240" cy="320040"/>
+          </a:xfrm>
+          <a:prstGeom prst="rect">
+            <a:avLst/>
+          </a:prstGeom>
+          <a:noFill/>
+        </p:spPr>
+        <p:txBody>
+          <a:bodyPr wrap="square">
+            <a:spAutoFit/>
+          </a:bodyPr>
+          <a:lstStyle/>
+          <a:p>
+            <a:pPr algn="l" rtl="0"/>
+            <a:r>
+              <a:rPr sz="1000" b="0">
+                <a:solidFill>
+                  <a:srgbClr val="666666"/>
+                </a:solidFill>
+                <a:latin typeface="Calibri"/>
+              </a:rPr>
+              <a:t>11_  •  1/9</a:t>
+            </a:r>
+          </a:p>
+        </p:txBody>
+      </p:sp>
+      <p:sp>
+        <p:nvSpPr>
+          <p:cNvPr id="11" name="TextBox 10"/>
+          <p:cNvSpPr txBox="1"/>
+          <p:nvPr/>
+        </p:nvSpPr>
+        <p:spPr>
+          <a:xfrm>
+            <a:off x="640080" y="6400800"/>
+            <a:ext cx="8686800" cy="320040"/>
+          </a:xfrm>
+          <a:prstGeom prst="rect">
+            <a:avLst/>
+          </a:prstGeom>
+          <a:noFill/>
+        </p:spPr>
+        <p:txBody>
+          <a:bodyPr wrap="square">
+            <a:spAutoFit/>
+          </a:bodyPr>
+          <a:lstStyle/>
+          <a:p>
+            <a:pPr algn="r" rtl="1"/>
+            <a:r>
+              <a:rPr sz="1000" b="0">
+                <a:solidFill>
+                  <a:srgbClr val="666666"/>
+                </a:solidFill>
+                <a:latin typeface="Arial"/>
+              </a:rPr>
+              <a:t>Module 02 — Data &amp; AI Engineering Track  |  الوحدة الثانية</a:t>
+            </a:r>
+          </a:p>
+        </p:txBody>
+      </p:sp>
+      <p:sp>
+        <p:nvSpPr>
+          <p:cNvPr id="12" name="TextBox 11"/>
+          <p:cNvSpPr txBox="1"/>
+          <p:nvPr/>
+        </p:nvSpPr>
+        <p:spPr>
+          <a:xfrm>
+            <a:off x="9601200" y="6400800"/>
+            <a:ext cx="1920240" cy="320040"/>
+          </a:xfrm>
+          <a:prstGeom prst="rect">
+            <a:avLst/>
+          </a:prstGeom>
+          <a:noFill/>
+        </p:spPr>
+        <p:txBody>
+          <a:bodyPr wrap="square">
+            <a:spAutoFit/>
+          </a:bodyPr>
+          <a:lstStyle/>
+          <a:p>
+            <a:pPr algn="l" rtl="0"/>
+            <a:r>
+              <a:rPr sz="1000" b="0">
+                <a:solidFill>
+                  <a:srgbClr val="666666"/>
+                </a:solidFill>
+                <a:latin typeface="Calibri"/>
+              </a:rPr>
+              <a:t>11_  •  1/9</a:t>
             </a:r>
           </a:p>
         </p:txBody>
@@ -3343,9 +3589,9 @@
                 <a:solidFill>
                   <a:srgbClr val="1F3B5C"/>
                 </a:solidFill>
-                <a:latin typeface="Calibri"/>
-              </a:rPr>
-              <a:t>الحوكمة والفهرسة / Governance &amp; Cataloging</a:t>
+                <a:latin typeface="Arial"/>
+              </a:rPr>
+              <a:t>أجندة العرض / Agenda</a:t>
             </a:r>
           </a:p>
         </p:txBody>
@@ -3373,66 +3619,307 @@
           <a:lstStyle/>
           <a:p>
             <a:pPr algn="r" rtl="1">
+              <a:spcBef>
+                <a:spcPts val="200"/>
+              </a:spcBef>
               <a:spcAft>
                 <a:spcPts val="1000"/>
               </a:spcAft>
             </a:pPr>
             <a:r>
-              <a:rPr sz="1900">
+              <a:rPr sz="1600">
                 <a:solidFill>
                   <a:srgbClr val="333333"/>
                 </a:solidFill>
-                <a:latin typeface="Calibri"/>
-              </a:rPr>
-              <a:t>• سلسلة العهدة (Lineage) تتبع أصل البيانات وتحولاتها؛ الفهرسة تجعلها قابلة للاكتشاف.</a:t>
-            </a:r>
-          </a:p>
-          <a:p>
-            <a:pPr algn="r" rtl="0">
+                <a:latin typeface="Arial"/>
+              </a:rPr>
+              <a:t>• V11 — حوكمة البيانات وسلسلة العهدة والفهرسة</a:t>
+            </a:r>
+          </a:p>
+          <a:p>
+            <a:pPr algn="l" rtl="0">
+              <a:spcBef>
+                <a:spcPts val="200"/>
+              </a:spcBef>
               <a:spcAft>
                 <a:spcPts val="1000"/>
               </a:spcAft>
             </a:pPr>
             <a:r>
-              <a:rPr sz="1900">
+              <a:rPr sz="1300">
                 <a:solidFill>
                   <a:srgbClr val="666666"/>
                 </a:solidFill>
                 <a:latin typeface="Calibri"/>
               </a:rPr>
-              <a:t>   Lineage traces data origin and transformations; cataloging makes it discoverable.</a:t>
+              <a:t>• V11 — Data Governance, Lineage &amp; Cataloging</a:t>
             </a:r>
           </a:p>
           <a:p>
             <a:pPr algn="r" rtl="1">
+              <a:spcBef>
+                <a:spcPts val="200"/>
+              </a:spcBef>
               <a:spcAft>
                 <a:spcPts val="1000"/>
               </a:spcAft>
             </a:pPr>
             <a:r>
-              <a:rPr sz="1900">
+              <a:rPr sz="1600">
                 <a:solidFill>
                   <a:srgbClr val="333333"/>
                 </a:solidFill>
-                <a:latin typeface="Calibri"/>
-              </a:rPr>
-              <a:t>• أدوات: Apache Atlas، Collibra، DataHub.</a:t>
-            </a:r>
-          </a:p>
-          <a:p>
-            <a:pPr algn="r" rtl="0">
+                <a:latin typeface="Arial"/>
+              </a:rPr>
+              <a:t>• الحوكمة والفهرسة / Governance &amp; Cataloging</a:t>
+            </a:r>
+          </a:p>
+          <a:p>
+            <a:pPr algn="r" rtl="1">
+              <a:spcBef>
+                <a:spcPts val="200"/>
+              </a:spcBef>
               <a:spcAft>
                 <a:spcPts val="1000"/>
               </a:spcAft>
             </a:pPr>
             <a:r>
-              <a:rPr sz="1900">
+              <a:rPr sz="1600">
+                <a:solidFill>
+                  <a:srgbClr val="333333"/>
+                </a:solidFill>
+                <a:latin typeface="Arial"/>
+              </a:rPr>
+              <a:t>• المعمارية المرجعية للذكاء التوليدي (1/2) / GenAI Reference Architecture (1/2)</a:t>
+            </a:r>
+          </a:p>
+          <a:p>
+            <a:pPr algn="r" rtl="1">
+              <a:spcBef>
+                <a:spcPts val="200"/>
+              </a:spcBef>
+              <a:spcAft>
+                <a:spcPts val="1000"/>
+              </a:spcAft>
+            </a:pPr>
+            <a:r>
+              <a:rPr sz="1600">
+                <a:solidFill>
+                  <a:srgbClr val="333333"/>
+                </a:solidFill>
+                <a:latin typeface="Arial"/>
+              </a:rPr>
+              <a:t>• المعمارية المرجعية للذكاء التوليدي (2/2) / GenAI Reference Architecture (2/2)</a:t>
+            </a:r>
+          </a:p>
+        </p:txBody>
+      </p:sp>
+      <p:sp>
+        <p:nvSpPr>
+          <p:cNvPr id="5" name="TextBox 4"/>
+          <p:cNvSpPr txBox="1"/>
+          <p:nvPr/>
+        </p:nvSpPr>
+        <p:spPr>
+          <a:xfrm>
+            <a:off x="640080" y="6400800"/>
+            <a:ext cx="8686800" cy="320040"/>
+          </a:xfrm>
+          <a:prstGeom prst="rect">
+            <a:avLst/>
+          </a:prstGeom>
+          <a:noFill/>
+        </p:spPr>
+        <p:txBody>
+          <a:bodyPr wrap="square">
+            <a:spAutoFit/>
+          </a:bodyPr>
+          <a:lstStyle/>
+          <a:p>
+            <a:pPr algn="r" rtl="1"/>
+            <a:r>
+              <a:rPr sz="1000" b="0">
                 <a:solidFill>
                   <a:srgbClr val="666666"/>
                 </a:solidFill>
+                <a:latin typeface="Arial"/>
+              </a:rPr>
+              <a:t>Module 02 — Data &amp; AI Engineering Track  |  الوحدة الثانية</a:t>
+            </a:r>
+          </a:p>
+        </p:txBody>
+      </p:sp>
+      <p:sp>
+        <p:nvSpPr>
+          <p:cNvPr id="6" name="TextBox 5"/>
+          <p:cNvSpPr txBox="1"/>
+          <p:nvPr/>
+        </p:nvSpPr>
+        <p:spPr>
+          <a:xfrm>
+            <a:off x="9601200" y="6400800"/>
+            <a:ext cx="1920240" cy="320040"/>
+          </a:xfrm>
+          <a:prstGeom prst="rect">
+            <a:avLst/>
+          </a:prstGeom>
+          <a:noFill/>
+        </p:spPr>
+        <p:txBody>
+          <a:bodyPr wrap="square">
+            <a:spAutoFit/>
+          </a:bodyPr>
+          <a:lstStyle/>
+          <a:p>
+            <a:pPr algn="l" rtl="0"/>
+            <a:r>
+              <a:rPr sz="1000" b="0">
+                <a:solidFill>
+                  <a:srgbClr val="666666"/>
+                </a:solidFill>
                 <a:latin typeface="Calibri"/>
               </a:rPr>
-              <a:t>   Tools: Apache Atlas, Collibra, DataHub.</a:t>
+              <a:t>V11  •  2/11</a:t>
+            </a:r>
+          </a:p>
+        </p:txBody>
+      </p:sp>
+      <p:sp>
+        <p:nvSpPr>
+          <p:cNvPr id="7" name="TextBox 6"/>
+          <p:cNvSpPr txBox="1"/>
+          <p:nvPr/>
+        </p:nvSpPr>
+        <p:spPr>
+          <a:xfrm>
+            <a:off x="640080" y="6400800"/>
+            <a:ext cx="8686800" cy="320040"/>
+          </a:xfrm>
+          <a:prstGeom prst="rect">
+            <a:avLst/>
+          </a:prstGeom>
+          <a:noFill/>
+        </p:spPr>
+        <p:txBody>
+          <a:bodyPr wrap="square">
+            <a:spAutoFit/>
+          </a:bodyPr>
+          <a:lstStyle/>
+          <a:p>
+            <a:pPr algn="r" rtl="1"/>
+            <a:r>
+              <a:rPr sz="1000" b="0">
+                <a:solidFill>
+                  <a:srgbClr val="666666"/>
+                </a:solidFill>
+                <a:latin typeface="Arial"/>
+              </a:rPr>
+              <a:t>Module 02 — Data &amp; AI Engineering Track  |  الوحدة الثانية</a:t>
+            </a:r>
+          </a:p>
+        </p:txBody>
+      </p:sp>
+      <p:sp>
+        <p:nvSpPr>
+          <p:cNvPr id="8" name="TextBox 7"/>
+          <p:cNvSpPr txBox="1"/>
+          <p:nvPr/>
+        </p:nvSpPr>
+        <p:spPr>
+          <a:xfrm>
+            <a:off x="9601200" y="6400800"/>
+            <a:ext cx="1920240" cy="320040"/>
+          </a:xfrm>
+          <a:prstGeom prst="rect">
+            <a:avLst/>
+          </a:prstGeom>
+          <a:noFill/>
+        </p:spPr>
+        <p:txBody>
+          <a:bodyPr wrap="square">
+            <a:spAutoFit/>
+          </a:bodyPr>
+          <a:lstStyle/>
+          <a:p>
+            <a:pPr algn="l" rtl="0"/>
+            <a:r>
+              <a:rPr sz="1000" b="0">
+                <a:solidFill>
+                  <a:srgbClr val="666666"/>
+                </a:solidFill>
+                <a:latin typeface="Calibri"/>
+              </a:rPr>
+              <a:t>11_  •  2/9</a:t>
+            </a:r>
+          </a:p>
+        </p:txBody>
+      </p:sp>
+      <p:sp>
+        <p:nvSpPr>
+          <p:cNvPr id="9" name="TextBox 8"/>
+          <p:cNvSpPr txBox="1"/>
+          <p:nvPr/>
+        </p:nvSpPr>
+        <p:spPr>
+          <a:xfrm>
+            <a:off x="640080" y="6400800"/>
+            <a:ext cx="8686800" cy="320040"/>
+          </a:xfrm>
+          <a:prstGeom prst="rect">
+            <a:avLst/>
+          </a:prstGeom>
+          <a:noFill/>
+        </p:spPr>
+        <p:txBody>
+          <a:bodyPr wrap="square">
+            <a:spAutoFit/>
+          </a:bodyPr>
+          <a:lstStyle/>
+          <a:p>
+            <a:pPr algn="r" rtl="1"/>
+            <a:r>
+              <a:rPr sz="1000" b="0">
+                <a:solidFill>
+                  <a:srgbClr val="666666"/>
+                </a:solidFill>
+                <a:latin typeface="Arial"/>
+              </a:rPr>
+              <a:t>Module 02 — Data &amp; AI Engineering Track  |  الوحدة الثانية</a:t>
+            </a:r>
+          </a:p>
+        </p:txBody>
+      </p:sp>
+      <p:sp>
+        <p:nvSpPr>
+          <p:cNvPr id="10" name="TextBox 9"/>
+          <p:cNvSpPr txBox="1"/>
+          <p:nvPr/>
+        </p:nvSpPr>
+        <p:spPr>
+          <a:xfrm>
+            <a:off x="9601200" y="6400800"/>
+            <a:ext cx="1920240" cy="320040"/>
+          </a:xfrm>
+          <a:prstGeom prst="rect">
+            <a:avLst/>
+          </a:prstGeom>
+          <a:noFill/>
+        </p:spPr>
+        <p:txBody>
+          <a:bodyPr wrap="square">
+            <a:spAutoFit/>
+          </a:bodyPr>
+          <a:lstStyle/>
+          <a:p>
+            <a:pPr algn="l" rtl="0"/>
+            <a:r>
+              <a:rPr sz="1000" b="0">
+                <a:solidFill>
+                  <a:srgbClr val="666666"/>
+                </a:solidFill>
+                <a:latin typeface="Calibri"/>
+              </a:rPr>
+              <a:t>11_  •  2/9</a:t>
             </a:r>
           </a:p>
         </p:txBody>
@@ -3537,9 +4024,9 @@
                 <a:solidFill>
                   <a:srgbClr val="1F3B5C"/>
                 </a:solidFill>
-                <a:latin typeface="Calibri"/>
-              </a:rPr>
-              <a:t>المعمارية المرجعية للذكاء التوليدي (1/2) / GenAI Reference Architecture (1/2)</a:t>
+                <a:latin typeface="Arial"/>
+              </a:rPr>
+              <a:t>الحوكمة والفهرسة / Governance &amp; Cataloging</a:t>
             </a:r>
           </a:p>
         </p:txBody>
@@ -3567,6 +4054,9 @@
           <a:lstStyle/>
           <a:p>
             <a:pPr algn="r" rtl="1">
+              <a:spcBef>
+                <a:spcPts val="200"/>
+              </a:spcBef>
               <a:spcAft>
                 <a:spcPts val="1000"/>
               </a:spcAft>
@@ -3576,29 +4066,35 @@
                 <a:solidFill>
                   <a:srgbClr val="333333"/>
                 </a:solidFill>
-                <a:latin typeface="Calibri"/>
-              </a:rPr>
-              <a:t>• أ. بوابة منصة GenAI: نافذة موحدة بكتالوج حلول ومحفظة POC → MVP → PROD موثقة.</a:t>
-            </a:r>
-          </a:p>
-          <a:p>
-            <a:pPr algn="r" rtl="0">
+                <a:latin typeface="Arial"/>
+              </a:rPr>
+              <a:t>• سلسلة العهدة (Lineage) تتبع أصل البيانات وتحولاتها؛ الفهرسة تجعلها قابلة للاكتشاف.</a:t>
+            </a:r>
+          </a:p>
+          <a:p>
+            <a:pPr algn="l" rtl="0">
+              <a:spcBef>
+                <a:spcPts val="200"/>
+              </a:spcBef>
               <a:spcAft>
                 <a:spcPts val="1000"/>
               </a:spcAft>
             </a:pPr>
             <a:r>
-              <a:rPr sz="1900">
+              <a:rPr sz="1600">
                 <a:solidFill>
                   <a:srgbClr val="666666"/>
                 </a:solidFill>
                 <a:latin typeface="Calibri"/>
               </a:rPr>
-              <a:t>   A. Portal: unified pane of glass with a solution catalog and documented POC → MVP → PROD portfolio.</a:t>
+              <a:t>• Lineage traces data origin and transformations; cataloging makes it discoverable.</a:t>
             </a:r>
           </a:p>
           <a:p>
             <a:pPr algn="r" rtl="1">
+              <a:spcBef>
+                <a:spcPts val="200"/>
+              </a:spcBef>
               <a:spcAft>
                 <a:spcPts val="1000"/>
               </a:spcAft>
@@ -3608,25 +4104,238 @@
                 <a:solidFill>
                   <a:srgbClr val="333333"/>
                 </a:solidFill>
-                <a:latin typeface="Calibri"/>
-              </a:rPr>
-              <a:t>• ب. الأتمتة والامتثال: خطوط CI/CD ببوابات تحكم آلية وموافقات مرحلية وفق DevSecOps.</a:t>
-            </a:r>
-          </a:p>
-          <a:p>
-            <a:pPr algn="r" rtl="0">
+                <a:latin typeface="Arial"/>
+              </a:rPr>
+              <a:t>• أدوات: Apache Atlas، Collibra، DataHub.</a:t>
+            </a:r>
+          </a:p>
+          <a:p>
+            <a:pPr algn="l" rtl="0">
+              <a:spcBef>
+                <a:spcPts val="200"/>
+              </a:spcBef>
               <a:spcAft>
                 <a:spcPts val="1000"/>
               </a:spcAft>
             </a:pPr>
             <a:r>
-              <a:rPr sz="1900">
+              <a:rPr sz="1600">
                 <a:solidFill>
                   <a:srgbClr val="666666"/>
                 </a:solidFill>
                 <a:latin typeface="Calibri"/>
               </a:rPr>
-              <a:t>   B. Automation &amp; compliance: CI/CD with automated control gates and stage-gate approvals (DevSecOps).</a:t>
+              <a:t>• Tools: Apache Atlas, Collibra, DataHub.</a:t>
+            </a:r>
+          </a:p>
+        </p:txBody>
+      </p:sp>
+      <p:sp>
+        <p:nvSpPr>
+          <p:cNvPr id="5" name="TextBox 4"/>
+          <p:cNvSpPr txBox="1"/>
+          <p:nvPr/>
+        </p:nvSpPr>
+        <p:spPr>
+          <a:xfrm>
+            <a:off x="640080" y="6400800"/>
+            <a:ext cx="8686800" cy="320040"/>
+          </a:xfrm>
+          <a:prstGeom prst="rect">
+            <a:avLst/>
+          </a:prstGeom>
+          <a:noFill/>
+        </p:spPr>
+        <p:txBody>
+          <a:bodyPr wrap="square">
+            <a:spAutoFit/>
+          </a:bodyPr>
+          <a:lstStyle/>
+          <a:p>
+            <a:pPr algn="r" rtl="1"/>
+            <a:r>
+              <a:rPr sz="1000" b="0">
+                <a:solidFill>
+                  <a:srgbClr val="666666"/>
+                </a:solidFill>
+                <a:latin typeface="Arial"/>
+              </a:rPr>
+              <a:t>Module 02 — Data &amp; AI Engineering Track  |  الوحدة الثانية</a:t>
+            </a:r>
+          </a:p>
+        </p:txBody>
+      </p:sp>
+      <p:sp>
+        <p:nvSpPr>
+          <p:cNvPr id="6" name="TextBox 5"/>
+          <p:cNvSpPr txBox="1"/>
+          <p:nvPr/>
+        </p:nvSpPr>
+        <p:spPr>
+          <a:xfrm>
+            <a:off x="9601200" y="6400800"/>
+            <a:ext cx="1920240" cy="320040"/>
+          </a:xfrm>
+          <a:prstGeom prst="rect">
+            <a:avLst/>
+          </a:prstGeom>
+          <a:noFill/>
+        </p:spPr>
+        <p:txBody>
+          <a:bodyPr wrap="square">
+            <a:spAutoFit/>
+          </a:bodyPr>
+          <a:lstStyle/>
+          <a:p>
+            <a:pPr algn="l" rtl="0"/>
+            <a:r>
+              <a:rPr sz="1000" b="0">
+                <a:solidFill>
+                  <a:srgbClr val="666666"/>
+                </a:solidFill>
+                <a:latin typeface="Calibri"/>
+              </a:rPr>
+              <a:t>V11  •  3/11</a:t>
+            </a:r>
+          </a:p>
+        </p:txBody>
+      </p:sp>
+      <p:sp>
+        <p:nvSpPr>
+          <p:cNvPr id="7" name="TextBox 6"/>
+          <p:cNvSpPr txBox="1"/>
+          <p:nvPr/>
+        </p:nvSpPr>
+        <p:spPr>
+          <a:xfrm>
+            <a:off x="640080" y="6400800"/>
+            <a:ext cx="8686800" cy="320040"/>
+          </a:xfrm>
+          <a:prstGeom prst="rect">
+            <a:avLst/>
+          </a:prstGeom>
+          <a:noFill/>
+        </p:spPr>
+        <p:txBody>
+          <a:bodyPr wrap="square">
+            <a:spAutoFit/>
+          </a:bodyPr>
+          <a:lstStyle/>
+          <a:p>
+            <a:pPr algn="r" rtl="1"/>
+            <a:r>
+              <a:rPr sz="1000" b="0">
+                <a:solidFill>
+                  <a:srgbClr val="666666"/>
+                </a:solidFill>
+                <a:latin typeface="Arial"/>
+              </a:rPr>
+              <a:t>Module 02 — Data &amp; AI Engineering Track  |  الوحدة الثانية</a:t>
+            </a:r>
+          </a:p>
+        </p:txBody>
+      </p:sp>
+      <p:sp>
+        <p:nvSpPr>
+          <p:cNvPr id="8" name="TextBox 7"/>
+          <p:cNvSpPr txBox="1"/>
+          <p:nvPr/>
+        </p:nvSpPr>
+        <p:spPr>
+          <a:xfrm>
+            <a:off x="9601200" y="6400800"/>
+            <a:ext cx="1920240" cy="320040"/>
+          </a:xfrm>
+          <a:prstGeom prst="rect">
+            <a:avLst/>
+          </a:prstGeom>
+          <a:noFill/>
+        </p:spPr>
+        <p:txBody>
+          <a:bodyPr wrap="square">
+            <a:spAutoFit/>
+          </a:bodyPr>
+          <a:lstStyle/>
+          <a:p>
+            <a:pPr algn="l" rtl="0"/>
+            <a:r>
+              <a:rPr sz="1000" b="0">
+                <a:solidFill>
+                  <a:srgbClr val="666666"/>
+                </a:solidFill>
+                <a:latin typeface="Calibri"/>
+              </a:rPr>
+              <a:t>11_  •  3/9</a:t>
+            </a:r>
+          </a:p>
+        </p:txBody>
+      </p:sp>
+      <p:sp>
+        <p:nvSpPr>
+          <p:cNvPr id="9" name="TextBox 8"/>
+          <p:cNvSpPr txBox="1"/>
+          <p:nvPr/>
+        </p:nvSpPr>
+        <p:spPr>
+          <a:xfrm>
+            <a:off x="640080" y="6400800"/>
+            <a:ext cx="8686800" cy="320040"/>
+          </a:xfrm>
+          <a:prstGeom prst="rect">
+            <a:avLst/>
+          </a:prstGeom>
+          <a:noFill/>
+        </p:spPr>
+        <p:txBody>
+          <a:bodyPr wrap="square">
+            <a:spAutoFit/>
+          </a:bodyPr>
+          <a:lstStyle/>
+          <a:p>
+            <a:pPr algn="r" rtl="1"/>
+            <a:r>
+              <a:rPr sz="1000" b="0">
+                <a:solidFill>
+                  <a:srgbClr val="666666"/>
+                </a:solidFill>
+                <a:latin typeface="Arial"/>
+              </a:rPr>
+              <a:t>Module 02 — Data &amp; AI Engineering Track  |  الوحدة الثانية</a:t>
+            </a:r>
+          </a:p>
+        </p:txBody>
+      </p:sp>
+      <p:sp>
+        <p:nvSpPr>
+          <p:cNvPr id="10" name="TextBox 9"/>
+          <p:cNvSpPr txBox="1"/>
+          <p:nvPr/>
+        </p:nvSpPr>
+        <p:spPr>
+          <a:xfrm>
+            <a:off x="9601200" y="6400800"/>
+            <a:ext cx="1920240" cy="320040"/>
+          </a:xfrm>
+          <a:prstGeom prst="rect">
+            <a:avLst/>
+          </a:prstGeom>
+          <a:noFill/>
+        </p:spPr>
+        <p:txBody>
+          <a:bodyPr wrap="square">
+            <a:spAutoFit/>
+          </a:bodyPr>
+          <a:lstStyle/>
+          <a:p>
+            <a:pPr algn="l" rtl="0"/>
+            <a:r>
+              <a:rPr sz="1000" b="0">
+                <a:solidFill>
+                  <a:srgbClr val="666666"/>
+                </a:solidFill>
+                <a:latin typeface="Calibri"/>
+              </a:rPr>
+              <a:t>11_  •  3/9</a:t>
             </a:r>
           </a:p>
         </p:txBody>
@@ -3731,9 +4440,9 @@
                 <a:solidFill>
                   <a:srgbClr val="1F3B5C"/>
                 </a:solidFill>
-                <a:latin typeface="Calibri"/>
-              </a:rPr>
-              <a:t>المعمارية المرجعية للذكاء التوليدي (2/2) / GenAI Reference Architecture (2/2)</a:t>
+                <a:latin typeface="Arial"/>
+              </a:rPr>
+              <a:t>المعمارية المرجعية للذكاء التوليدي (1/2) / GenAI Reference Architecture (1/2)</a:t>
             </a:r>
           </a:p>
         </p:txBody>
@@ -3761,66 +4470,288 @@
           <a:lstStyle/>
           <a:p>
             <a:pPr algn="r" rtl="1">
+              <a:spcBef>
+                <a:spcPts val="200"/>
+              </a:spcBef>
               <a:spcAft>
                 <a:spcPts val="1000"/>
               </a:spcAft>
             </a:pPr>
             <a:r>
-              <a:rPr sz="1800">
+              <a:rPr sz="1900">
                 <a:solidFill>
                   <a:srgbClr val="333333"/>
                 </a:solidFill>
-                <a:latin typeface="Calibri"/>
-              </a:rPr>
-              <a:t>• ج. الخدمات المشتركة: بوابة AI موحدة، مكتبة موجِّهات، خدمة التغذية الراجعة، قاعدة تدقيق LLM، حواجز حماية Guardrails.</a:t>
-            </a:r>
-          </a:p>
-          <a:p>
-            <a:pPr algn="r" rtl="0">
+                <a:latin typeface="Arial"/>
+              </a:rPr>
+              <a:t>• أ. بوابة منصة GenAI: نافذة موحدة بكتالوج حلول ومحفظة POC → MVP → PROD موثقة.</a:t>
+            </a:r>
+          </a:p>
+          <a:p>
+            <a:pPr algn="l" rtl="0">
+              <a:spcBef>
+                <a:spcPts val="200"/>
+              </a:spcBef>
               <a:spcAft>
                 <a:spcPts val="1000"/>
               </a:spcAft>
             </a:pPr>
             <a:r>
-              <a:rPr sz="1800">
+              <a:rPr sz="1600">
                 <a:solidFill>
                   <a:srgbClr val="666666"/>
                 </a:solidFill>
                 <a:latin typeface="Calibri"/>
               </a:rPr>
-              <a:t>   C. Shared services: unified AI gateway, prompt library, feedback service, LLM audit database, guardrails.</a:t>
+              <a:t>• A. Portal: unified pane of glass with a solution catalog and documented POC → MVP → PROD portfolio.</a:t>
             </a:r>
           </a:p>
           <a:p>
             <a:pPr algn="r" rtl="1">
+              <a:spcBef>
+                <a:spcPts val="200"/>
+              </a:spcBef>
               <a:spcAft>
                 <a:spcPts val="1000"/>
               </a:spcAft>
             </a:pPr>
             <a:r>
-              <a:rPr sz="1800">
+              <a:rPr sz="1900">
                 <a:solidFill>
                   <a:srgbClr val="333333"/>
                 </a:solidFill>
-                <a:latin typeface="Calibri"/>
-              </a:rPr>
-              <a:t>• د. الحوكمة والمراقبة: أمن البيانات، الذكاء المسؤول (تدقيق التحيّز والهلوسة)، وإدارة التكاليف FinOps.</a:t>
-            </a:r>
-          </a:p>
-          <a:p>
-            <a:pPr algn="r" rtl="0">
+                <a:latin typeface="Arial"/>
+              </a:rPr>
+              <a:t>• ب. الأتمتة والامتثال: خطوط CI/CD ببوابات تحكم آلية وموافقات مرحلية وفق DevSecOps.</a:t>
+            </a:r>
+          </a:p>
+          <a:p>
+            <a:pPr algn="l" rtl="0">
+              <a:spcBef>
+                <a:spcPts val="200"/>
+              </a:spcBef>
               <a:spcAft>
                 <a:spcPts val="1000"/>
               </a:spcAft>
             </a:pPr>
             <a:r>
-              <a:rPr sz="1800">
+              <a:rPr sz="1600">
                 <a:solidFill>
                   <a:srgbClr val="666666"/>
                 </a:solidFill>
                 <a:latin typeface="Calibri"/>
               </a:rPr>
-              <a:t>   D. Governance &amp; monitoring: data security, responsible AI (bias/hallucination audits), FinOps.</a:t>
+              <a:t>• B. Automation &amp; compliance: CI/CD with automated control gates and stage-gate approvals (DevSecOps).</a:t>
+            </a:r>
+          </a:p>
+        </p:txBody>
+      </p:sp>
+      <p:sp>
+        <p:nvSpPr>
+          <p:cNvPr id="5" name="TextBox 4"/>
+          <p:cNvSpPr txBox="1"/>
+          <p:nvPr/>
+        </p:nvSpPr>
+        <p:spPr>
+          <a:xfrm>
+            <a:off x="640080" y="6400800"/>
+            <a:ext cx="8686800" cy="320040"/>
+          </a:xfrm>
+          <a:prstGeom prst="rect">
+            <a:avLst/>
+          </a:prstGeom>
+          <a:noFill/>
+        </p:spPr>
+        <p:txBody>
+          <a:bodyPr wrap="square">
+            <a:spAutoFit/>
+          </a:bodyPr>
+          <a:lstStyle/>
+          <a:p>
+            <a:pPr algn="r" rtl="1"/>
+            <a:r>
+              <a:rPr sz="1000" b="0">
+                <a:solidFill>
+                  <a:srgbClr val="666666"/>
+                </a:solidFill>
+                <a:latin typeface="Arial"/>
+              </a:rPr>
+              <a:t>Module 02 — Data &amp; AI Engineering Track  |  الوحدة الثانية</a:t>
+            </a:r>
+          </a:p>
+        </p:txBody>
+      </p:sp>
+      <p:sp>
+        <p:nvSpPr>
+          <p:cNvPr id="6" name="TextBox 5"/>
+          <p:cNvSpPr txBox="1"/>
+          <p:nvPr/>
+        </p:nvSpPr>
+        <p:spPr>
+          <a:xfrm>
+            <a:off x="9601200" y="6400800"/>
+            <a:ext cx="1920240" cy="320040"/>
+          </a:xfrm>
+          <a:prstGeom prst="rect">
+            <a:avLst/>
+          </a:prstGeom>
+          <a:noFill/>
+        </p:spPr>
+        <p:txBody>
+          <a:bodyPr wrap="square">
+            <a:spAutoFit/>
+          </a:bodyPr>
+          <a:lstStyle/>
+          <a:p>
+            <a:pPr algn="l" rtl="0"/>
+            <a:r>
+              <a:rPr sz="1000" b="0">
+                <a:solidFill>
+                  <a:srgbClr val="666666"/>
+                </a:solidFill>
+                <a:latin typeface="Calibri"/>
+              </a:rPr>
+              <a:t>V11  •  4/11</a:t>
+            </a:r>
+          </a:p>
+        </p:txBody>
+      </p:sp>
+      <p:sp>
+        <p:nvSpPr>
+          <p:cNvPr id="7" name="TextBox 6"/>
+          <p:cNvSpPr txBox="1"/>
+          <p:nvPr/>
+        </p:nvSpPr>
+        <p:spPr>
+          <a:xfrm>
+            <a:off x="640080" y="6400800"/>
+            <a:ext cx="8686800" cy="320040"/>
+          </a:xfrm>
+          <a:prstGeom prst="rect">
+            <a:avLst/>
+          </a:prstGeom>
+          <a:noFill/>
+        </p:spPr>
+        <p:txBody>
+          <a:bodyPr wrap="square">
+            <a:spAutoFit/>
+          </a:bodyPr>
+          <a:lstStyle/>
+          <a:p>
+            <a:pPr algn="r" rtl="1"/>
+            <a:r>
+              <a:rPr sz="1000" b="0">
+                <a:solidFill>
+                  <a:srgbClr val="666666"/>
+                </a:solidFill>
+                <a:latin typeface="Arial"/>
+              </a:rPr>
+              <a:t>Module 02 — Data &amp; AI Engineering Track  |  الوحدة الثانية</a:t>
+            </a:r>
+          </a:p>
+        </p:txBody>
+      </p:sp>
+      <p:sp>
+        <p:nvSpPr>
+          <p:cNvPr id="8" name="TextBox 7"/>
+          <p:cNvSpPr txBox="1"/>
+          <p:nvPr/>
+        </p:nvSpPr>
+        <p:spPr>
+          <a:xfrm>
+            <a:off x="9601200" y="6400800"/>
+            <a:ext cx="1920240" cy="320040"/>
+          </a:xfrm>
+          <a:prstGeom prst="rect">
+            <a:avLst/>
+          </a:prstGeom>
+          <a:noFill/>
+        </p:spPr>
+        <p:txBody>
+          <a:bodyPr wrap="square">
+            <a:spAutoFit/>
+          </a:bodyPr>
+          <a:lstStyle/>
+          <a:p>
+            <a:pPr algn="l" rtl="0"/>
+            <a:r>
+              <a:rPr sz="1000" b="0">
+                <a:solidFill>
+                  <a:srgbClr val="666666"/>
+                </a:solidFill>
+                <a:latin typeface="Calibri"/>
+              </a:rPr>
+              <a:t>11_  •  4/9</a:t>
+            </a:r>
+          </a:p>
+        </p:txBody>
+      </p:sp>
+      <p:sp>
+        <p:nvSpPr>
+          <p:cNvPr id="9" name="TextBox 8"/>
+          <p:cNvSpPr txBox="1"/>
+          <p:nvPr/>
+        </p:nvSpPr>
+        <p:spPr>
+          <a:xfrm>
+            <a:off x="640080" y="6400800"/>
+            <a:ext cx="8686800" cy="320040"/>
+          </a:xfrm>
+          <a:prstGeom prst="rect">
+            <a:avLst/>
+          </a:prstGeom>
+          <a:noFill/>
+        </p:spPr>
+        <p:txBody>
+          <a:bodyPr wrap="square">
+            <a:spAutoFit/>
+          </a:bodyPr>
+          <a:lstStyle/>
+          <a:p>
+            <a:pPr algn="r" rtl="1"/>
+            <a:r>
+              <a:rPr sz="1000" b="0">
+                <a:solidFill>
+                  <a:srgbClr val="666666"/>
+                </a:solidFill>
+                <a:latin typeface="Arial"/>
+              </a:rPr>
+              <a:t>Module 02 — Data &amp; AI Engineering Track  |  الوحدة الثانية</a:t>
+            </a:r>
+          </a:p>
+        </p:txBody>
+      </p:sp>
+      <p:sp>
+        <p:nvSpPr>
+          <p:cNvPr id="10" name="TextBox 9"/>
+          <p:cNvSpPr txBox="1"/>
+          <p:nvPr/>
+        </p:nvSpPr>
+        <p:spPr>
+          <a:xfrm>
+            <a:off x="9601200" y="6400800"/>
+            <a:ext cx="1920240" cy="320040"/>
+          </a:xfrm>
+          <a:prstGeom prst="rect">
+            <a:avLst/>
+          </a:prstGeom>
+          <a:noFill/>
+        </p:spPr>
+        <p:txBody>
+          <a:bodyPr wrap="square">
+            <a:spAutoFit/>
+          </a:bodyPr>
+          <a:lstStyle/>
+          <a:p>
+            <a:pPr algn="l" rtl="0"/>
+            <a:r>
+              <a:rPr sz="1000" b="0">
+                <a:solidFill>
+                  <a:srgbClr val="666666"/>
+                </a:solidFill>
+                <a:latin typeface="Calibri"/>
+              </a:rPr>
+              <a:t>11_  •  4/9</a:t>
             </a:r>
           </a:p>
         </p:txBody>
@@ -3853,57 +4784,22 @@
       <p:grpSpPr/>
       <p:sp>
         <p:nvSpPr>
-          <p:cNvPr id="2" name="TextBox 1"/>
-          <p:cNvSpPr txBox="1"/>
-          <p:nvPr/>
-        </p:nvSpPr>
-        <p:spPr>
-          <a:xfrm>
-            <a:off x="640080" y="137160"/>
-            <a:ext cx="10972800" cy="640080"/>
-          </a:xfrm>
-          <a:prstGeom prst="rect">
-            <a:avLst/>
-          </a:prstGeom>
-          <a:noFill/>
-        </p:spPr>
-        <p:txBody>
-          <a:bodyPr wrap="none">
-            <a:spAutoFit/>
-          </a:bodyPr>
-          <a:lstStyle/>
-          <a:p>
-            <a:pPr algn="r" rtl="1"/>
-            <a:r>
-              <a:rPr sz="3000" b="1">
-                <a:solidFill>
-                  <a:srgbClr val="1F3B5C"/>
-                </a:solidFill>
-                <a:latin typeface="Calibri"/>
-              </a:rPr>
-              <a:t>المعمارية المرجعية للذكاء التوليدي / GenAI Reference Architecture</a:t>
-            </a:r>
-          </a:p>
-        </p:txBody>
-      </p:sp>
-      <p:sp>
-        <p:nvSpPr>
-          <p:cNvPr id="3" name="Rounded Rectangle 2"/>
+          <p:cNvPr id="2" name="Rectangle 1"/>
           <p:cNvSpPr/>
           <p:nvPr/>
         </p:nvSpPr>
         <p:spPr>
           <a:xfrm>
-            <a:off x="1097280" y="1280160"/>
-            <a:ext cx="9966960" cy="1051560"/>
-          </a:xfrm>
-          <a:prstGeom prst="roundRect">
+            <a:off x="0" y="0"/>
+            <a:ext cx="12191695" cy="1005840"/>
+          </a:xfrm>
+          <a:prstGeom prst="rect">
             <a:avLst/>
           </a:prstGeom>
           <a:solidFill>
-            <a:srgbClr val="DCE6F1"/>
+            <a:srgbClr val="FFFFFF"/>
           </a:solidFill>
-          <a:ln w="12700">
+          <a:ln w="25400">
             <a:solidFill>
               <a:srgbClr val="1F4E79"/>
             </a:solidFill>
@@ -3925,231 +4821,213 @@
           </a:fontRef>
         </p:style>
         <p:txBody>
-          <a:bodyPr rtlCol="0" anchor="ctr" wrap="square"/>
-          <a:lstStyle/>
-          <a:p>
-            <a:pPr algn="ctr" rtl="1"/>
-            <a:r>
-              <a:rPr sz="1800" b="1">
+          <a:bodyPr rtlCol="0" anchor="ctr"/>
+          <a:lstStyle/>
+          <a:p>
+            <a:pPr algn="ctr"/>
+          </a:p>
+        </p:txBody>
+      </p:sp>
+      <p:sp>
+        <p:nvSpPr>
+          <p:cNvPr id="3" name="TextBox 2"/>
+          <p:cNvSpPr txBox="1"/>
+          <p:nvPr/>
+        </p:nvSpPr>
+        <p:spPr>
+          <a:xfrm>
+            <a:off x="640080" y="182880"/>
+            <a:ext cx="10972800" cy="640080"/>
+          </a:xfrm>
+          <a:prstGeom prst="rect">
+            <a:avLst/>
+          </a:prstGeom>
+          <a:noFill/>
+        </p:spPr>
+        <p:txBody>
+          <a:bodyPr wrap="square">
+            <a:spAutoFit/>
+          </a:bodyPr>
+          <a:lstStyle/>
+          <a:p>
+            <a:pPr algn="r" rtl="1"/>
+            <a:r>
+              <a:rPr sz="3200" b="1">
+                <a:solidFill>
+                  <a:srgbClr val="1F3B5C"/>
+                </a:solidFill>
+                <a:latin typeface="Arial"/>
+              </a:rPr>
+              <a:t>المعمارية المرجعية للذكاء التوليدي (2/2) / GenAI Reference Architecture (2/2)</a:t>
+            </a:r>
+          </a:p>
+        </p:txBody>
+      </p:sp>
+      <p:sp>
+        <p:nvSpPr>
+          <p:cNvPr id="4" name="TextBox 3"/>
+          <p:cNvSpPr txBox="1"/>
+          <p:nvPr/>
+        </p:nvSpPr>
+        <p:spPr>
+          <a:xfrm>
+            <a:off x="640080" y="1280160"/>
+            <a:ext cx="10972800" cy="5212080"/>
+          </a:xfrm>
+          <a:prstGeom prst="rect">
+            <a:avLst/>
+          </a:prstGeom>
+          <a:noFill/>
+        </p:spPr>
+        <p:txBody>
+          <a:bodyPr wrap="square">
+            <a:spAutoFit/>
+          </a:bodyPr>
+          <a:lstStyle/>
+          <a:p>
+            <a:pPr algn="r" rtl="1">
+              <a:spcBef>
+                <a:spcPts val="200"/>
+              </a:spcBef>
+              <a:spcAft>
+                <a:spcPts val="1000"/>
+              </a:spcAft>
+            </a:pPr>
+            <a:r>
+              <a:rPr sz="1800">
                 <a:solidFill>
                   <a:srgbClr val="333333"/>
                 </a:solidFill>
+                <a:latin typeface="Arial"/>
+              </a:rPr>
+              <a:t>• ج. الخدمات المشتركة: بوابة AI موحدة، مكتبة موجِّهات، خدمة التغذية الراجعة، قاعدة تدقيق LLM، حواجز حماية Guardrails.</a:t>
+            </a:r>
+          </a:p>
+          <a:p>
+            <a:pPr algn="l" rtl="0">
+              <a:spcBef>
+                <a:spcPts val="200"/>
+              </a:spcBef>
+              <a:spcAft>
+                <a:spcPts val="1000"/>
+              </a:spcAft>
+            </a:pPr>
+            <a:r>
+              <a:rPr sz="1500">
+                <a:solidFill>
+                  <a:srgbClr val="666666"/>
+                </a:solidFill>
                 <a:latin typeface="Calibri"/>
               </a:rPr>
-              <a:t>أ. بوابة منصة GenAI</a:t>
-            </a:r>
-          </a:p>
-          <a:p>
-            <a:pPr algn="ctr" rtl="0"/>
-            <a:r>
-              <a:rPr sz="1300">
+              <a:t>• C. Shared services: unified AI gateway, prompt library, feedback service, LLM audit database, guardrails.</a:t>
+            </a:r>
+          </a:p>
+          <a:p>
+            <a:pPr algn="r" rtl="1">
+              <a:spcBef>
+                <a:spcPts val="200"/>
+              </a:spcBef>
+              <a:spcAft>
+                <a:spcPts val="1000"/>
+              </a:spcAft>
+            </a:pPr>
+            <a:r>
+              <a:rPr sz="1800">
+                <a:solidFill>
+                  <a:srgbClr val="333333"/>
+                </a:solidFill>
+                <a:latin typeface="Arial"/>
+              </a:rPr>
+              <a:t>• د. الحوكمة والمراقبة: أمن البيانات، الذكاء المسؤول (تدقيق التحيّز والهلوسة)، وإدارة التكاليف FinOps.</a:t>
+            </a:r>
+          </a:p>
+          <a:p>
+            <a:pPr algn="l" rtl="0">
+              <a:spcBef>
+                <a:spcPts val="200"/>
+              </a:spcBef>
+              <a:spcAft>
+                <a:spcPts val="1000"/>
+              </a:spcAft>
+            </a:pPr>
+            <a:r>
+              <a:rPr sz="1500">
                 <a:solidFill>
                   <a:srgbClr val="666666"/>
                 </a:solidFill>
                 <a:latin typeface="Calibri"/>
               </a:rPr>
-              <a:t>A. Platform Portal — POC → MVP → PROD</a:t>
-            </a:r>
-          </a:p>
-        </p:txBody>
-      </p:sp>
-      <p:sp>
-        <p:nvSpPr>
-          <p:cNvPr id="4" name="Rounded Rectangle 3"/>
-          <p:cNvSpPr/>
-          <p:nvPr/>
-        </p:nvSpPr>
-        <p:spPr>
-          <a:xfrm>
-            <a:off x="1097280" y="2487168"/>
-            <a:ext cx="9966960" cy="1051560"/>
-          </a:xfrm>
-          <a:prstGeom prst="roundRect">
-            <a:avLst/>
-          </a:prstGeom>
-          <a:solidFill>
-            <a:srgbClr val="E2EFDA"/>
-          </a:solidFill>
-          <a:ln w="12700">
-            <a:solidFill>
-              <a:srgbClr val="1F4E79"/>
-            </a:solidFill>
-          </a:ln>
-          <a:effectLst/>
-        </p:spPr>
-        <p:style>
-          <a:lnRef idx="1">
-            <a:schemeClr val="accent1"/>
-          </a:lnRef>
-          <a:fillRef idx="3">
-            <a:schemeClr val="accent1"/>
-          </a:fillRef>
-          <a:effectRef idx="2">
-            <a:schemeClr val="accent1"/>
-          </a:effectRef>
-          <a:fontRef idx="minor">
-            <a:schemeClr val="lt1"/>
-          </a:fontRef>
-        </p:style>
-        <p:txBody>
-          <a:bodyPr rtlCol="0" anchor="ctr" wrap="square"/>
-          <a:lstStyle/>
-          <a:p>
-            <a:pPr algn="ctr" rtl="1"/>
-            <a:r>
-              <a:rPr sz="1800" b="1">
-                <a:solidFill>
-                  <a:srgbClr val="333333"/>
+              <a:t>• D. Governance &amp; monitoring: data security, responsible AI (bias/hallucination audits), FinOps.</a:t>
+            </a:r>
+          </a:p>
+        </p:txBody>
+      </p:sp>
+      <p:sp>
+        <p:nvSpPr>
+          <p:cNvPr id="5" name="TextBox 4"/>
+          <p:cNvSpPr txBox="1"/>
+          <p:nvPr/>
+        </p:nvSpPr>
+        <p:spPr>
+          <a:xfrm>
+            <a:off x="640080" y="6400800"/>
+            <a:ext cx="8686800" cy="320040"/>
+          </a:xfrm>
+          <a:prstGeom prst="rect">
+            <a:avLst/>
+          </a:prstGeom>
+          <a:noFill/>
+        </p:spPr>
+        <p:txBody>
+          <a:bodyPr wrap="square">
+            <a:spAutoFit/>
+          </a:bodyPr>
+          <a:lstStyle/>
+          <a:p>
+            <a:pPr algn="r" rtl="1"/>
+            <a:r>
+              <a:rPr sz="1000" b="0">
+                <a:solidFill>
+                  <a:srgbClr val="666666"/>
+                </a:solidFill>
+                <a:latin typeface="Arial"/>
+              </a:rPr>
+              <a:t>Module 02 — Data &amp; AI Engineering Track  |  الوحدة الثانية</a:t>
+            </a:r>
+          </a:p>
+        </p:txBody>
+      </p:sp>
+      <p:sp>
+        <p:nvSpPr>
+          <p:cNvPr id="6" name="TextBox 5"/>
+          <p:cNvSpPr txBox="1"/>
+          <p:nvPr/>
+        </p:nvSpPr>
+        <p:spPr>
+          <a:xfrm>
+            <a:off x="9601200" y="6400800"/>
+            <a:ext cx="1920240" cy="320040"/>
+          </a:xfrm>
+          <a:prstGeom prst="rect">
+            <a:avLst/>
+          </a:prstGeom>
+          <a:noFill/>
+        </p:spPr>
+        <p:txBody>
+          <a:bodyPr wrap="square">
+            <a:spAutoFit/>
+          </a:bodyPr>
+          <a:lstStyle/>
+          <a:p>
+            <a:pPr algn="l" rtl="0"/>
+            <a:r>
+              <a:rPr sz="1000" b="0">
+                <a:solidFill>
+                  <a:srgbClr val="666666"/>
                 </a:solidFill>
                 <a:latin typeface="Calibri"/>
               </a:rPr>
-              <a:t>ب. الأتمتة والامتثال</a:t>
-            </a:r>
-          </a:p>
-          <a:p>
-            <a:pPr algn="ctr" rtl="0"/>
-            <a:r>
-              <a:rPr sz="1300">
-                <a:solidFill>
-                  <a:srgbClr val="666666"/>
-                </a:solidFill>
-                <a:latin typeface="Calibri"/>
-              </a:rPr>
-              <a:t>B. Automation &amp; Compliance — CI/CD gates</a:t>
-            </a:r>
-          </a:p>
-        </p:txBody>
-      </p:sp>
-      <p:sp>
-        <p:nvSpPr>
-          <p:cNvPr id="5" name="Rounded Rectangle 4"/>
-          <p:cNvSpPr/>
-          <p:nvPr/>
-        </p:nvSpPr>
-        <p:spPr>
-          <a:xfrm>
-            <a:off x="1097280" y="3694176"/>
-            <a:ext cx="9966960" cy="1051560"/>
-          </a:xfrm>
-          <a:prstGeom prst="roundRect">
-            <a:avLst/>
-          </a:prstGeom>
-          <a:solidFill>
-            <a:srgbClr val="FDE9D9"/>
-          </a:solidFill>
-          <a:ln w="12700">
-            <a:solidFill>
-              <a:srgbClr val="1F4E79"/>
-            </a:solidFill>
-          </a:ln>
-          <a:effectLst/>
-        </p:spPr>
-        <p:style>
-          <a:lnRef idx="1">
-            <a:schemeClr val="accent1"/>
-          </a:lnRef>
-          <a:fillRef idx="3">
-            <a:schemeClr val="accent1"/>
-          </a:fillRef>
-          <a:effectRef idx="2">
-            <a:schemeClr val="accent1"/>
-          </a:effectRef>
-          <a:fontRef idx="minor">
-            <a:schemeClr val="lt1"/>
-          </a:fontRef>
-        </p:style>
-        <p:txBody>
-          <a:bodyPr rtlCol="0" anchor="ctr" wrap="square"/>
-          <a:lstStyle/>
-          <a:p>
-            <a:pPr algn="ctr" rtl="1"/>
-            <a:r>
-              <a:rPr sz="1800" b="1">
-                <a:solidFill>
-                  <a:srgbClr val="333333"/>
-                </a:solidFill>
-                <a:latin typeface="Calibri"/>
-              </a:rPr>
-              <a:t>ج. الخدمات المشتركة</a:t>
-            </a:r>
-          </a:p>
-          <a:p>
-            <a:pPr algn="ctr" rtl="0"/>
-            <a:r>
-              <a:rPr sz="1300">
-                <a:solidFill>
-                  <a:srgbClr val="666666"/>
-                </a:solidFill>
-                <a:latin typeface="Calibri"/>
-              </a:rPr>
-              <a:t>C. Shared Services — Gateway, Prompts, Audit, Guardrails</a:t>
-            </a:r>
-          </a:p>
-        </p:txBody>
-      </p:sp>
-      <p:sp>
-        <p:nvSpPr>
-          <p:cNvPr id="6" name="Rounded Rectangle 5"/>
-          <p:cNvSpPr/>
-          <p:nvPr/>
-        </p:nvSpPr>
-        <p:spPr>
-          <a:xfrm>
-            <a:off x="1097280" y="4901184"/>
-            <a:ext cx="9966960" cy="1051560"/>
-          </a:xfrm>
-          <a:prstGeom prst="roundRect">
-            <a:avLst/>
-          </a:prstGeom>
-          <a:solidFill>
-            <a:srgbClr val="EDEDED"/>
-          </a:solidFill>
-          <a:ln w="12700">
-            <a:solidFill>
-              <a:srgbClr val="1F4E79"/>
-            </a:solidFill>
-          </a:ln>
-          <a:effectLst/>
-        </p:spPr>
-        <p:style>
-          <a:lnRef idx="1">
-            <a:schemeClr val="accent1"/>
-          </a:lnRef>
-          <a:fillRef idx="3">
-            <a:schemeClr val="accent1"/>
-          </a:fillRef>
-          <a:effectRef idx="2">
-            <a:schemeClr val="accent1"/>
-          </a:effectRef>
-          <a:fontRef idx="minor">
-            <a:schemeClr val="lt1"/>
-          </a:fontRef>
-        </p:style>
-        <p:txBody>
-          <a:bodyPr rtlCol="0" anchor="ctr" wrap="square"/>
-          <a:lstStyle/>
-          <a:p>
-            <a:pPr algn="ctr" rtl="1"/>
-            <a:r>
-              <a:rPr sz="1800" b="1">
-                <a:solidFill>
-                  <a:srgbClr val="333333"/>
-                </a:solidFill>
-                <a:latin typeface="Calibri"/>
-              </a:rPr>
-              <a:t>د. الحوكمة والمراقبة</a:t>
-            </a:r>
-          </a:p>
-          <a:p>
-            <a:pPr algn="ctr" rtl="0"/>
-            <a:r>
-              <a:rPr sz="1300">
-                <a:solidFill>
-                  <a:srgbClr val="666666"/>
-                </a:solidFill>
-                <a:latin typeface="Calibri"/>
-              </a:rPr>
-              <a:t>D. Governance &amp; Monitoring — Responsible AI, FinOps</a:t>
+              <a:t>V11  •  5/11</a:t>
             </a:r>
           </a:p>
         </p:txBody>
@@ -4162,8 +5040,8 @@
         </p:nvSpPr>
         <p:spPr>
           <a:xfrm>
-            <a:off x="640080" y="6126480"/>
-            <a:ext cx="10972800" cy="548640"/>
+            <a:off x="640080" y="6400800"/>
+            <a:ext cx="8686800" cy="320040"/>
           </a:xfrm>
           <a:prstGeom prst="rect">
             <a:avLst/>
@@ -4178,19 +5056,118 @@
           <a:p>
             <a:pPr algn="r" rtl="1"/>
             <a:r>
-              <a:rPr sz="1400">
+              <a:rPr sz="1000" b="0">
                 <a:solidFill>
                   <a:srgbClr val="666666"/>
                 </a:solidFill>
+                <a:latin typeface="Arial"/>
+              </a:rPr>
+              <a:t>Module 02 — Data &amp; AI Engineering Track  |  الوحدة الثانية</a:t>
+            </a:r>
+          </a:p>
+        </p:txBody>
+      </p:sp>
+      <p:sp>
+        <p:nvSpPr>
+          <p:cNvPr id="8" name="TextBox 7"/>
+          <p:cNvSpPr txBox="1"/>
+          <p:nvPr/>
+        </p:nvSpPr>
+        <p:spPr>
+          <a:xfrm>
+            <a:off x="9601200" y="6400800"/>
+            <a:ext cx="1920240" cy="320040"/>
+          </a:xfrm>
+          <a:prstGeom prst="rect">
+            <a:avLst/>
+          </a:prstGeom>
+          <a:noFill/>
+        </p:spPr>
+        <p:txBody>
+          <a:bodyPr wrap="square">
+            <a:spAutoFit/>
+          </a:bodyPr>
+          <a:lstStyle/>
+          <a:p>
+            <a:pPr algn="l" rtl="0"/>
+            <a:r>
+              <a:rPr sz="1000" b="0">
+                <a:solidFill>
+                  <a:srgbClr val="666666"/>
+                </a:solidFill>
                 <a:latin typeface="Calibri"/>
               </a:rPr>
-              <a:t>النمط المرجعي المؤسسي (McKinsey) — نافذة موحدة فوق خدمات مشتركة محكومة.</a:t>
-            </a:r>
-          </a:p>
-          <a:p>
-            <a:pPr algn="r" rtl="0"/>
-            <a:r>
-              <a:t>Enterprise reference pattern (McKinsey) — a unified pane over governed shared services.</a:t>
+              <a:t>11_  •  5/9</a:t>
+            </a:r>
+          </a:p>
+        </p:txBody>
+      </p:sp>
+      <p:sp>
+        <p:nvSpPr>
+          <p:cNvPr id="9" name="TextBox 8"/>
+          <p:cNvSpPr txBox="1"/>
+          <p:nvPr/>
+        </p:nvSpPr>
+        <p:spPr>
+          <a:xfrm>
+            <a:off x="640080" y="6400800"/>
+            <a:ext cx="8686800" cy="320040"/>
+          </a:xfrm>
+          <a:prstGeom prst="rect">
+            <a:avLst/>
+          </a:prstGeom>
+          <a:noFill/>
+        </p:spPr>
+        <p:txBody>
+          <a:bodyPr wrap="square">
+            <a:spAutoFit/>
+          </a:bodyPr>
+          <a:lstStyle/>
+          <a:p>
+            <a:pPr algn="r" rtl="1"/>
+            <a:r>
+              <a:rPr sz="1000" b="0">
+                <a:solidFill>
+                  <a:srgbClr val="666666"/>
+                </a:solidFill>
+                <a:latin typeface="Arial"/>
+              </a:rPr>
+              <a:t>Module 02 — Data &amp; AI Engineering Track  |  الوحدة الثانية</a:t>
+            </a:r>
+          </a:p>
+        </p:txBody>
+      </p:sp>
+      <p:sp>
+        <p:nvSpPr>
+          <p:cNvPr id="10" name="TextBox 9"/>
+          <p:cNvSpPr txBox="1"/>
+          <p:nvPr/>
+        </p:nvSpPr>
+        <p:spPr>
+          <a:xfrm>
+            <a:off x="9601200" y="6400800"/>
+            <a:ext cx="1920240" cy="320040"/>
+          </a:xfrm>
+          <a:prstGeom prst="rect">
+            <a:avLst/>
+          </a:prstGeom>
+          <a:noFill/>
+        </p:spPr>
+        <p:txBody>
+          <a:bodyPr wrap="square">
+            <a:spAutoFit/>
+          </a:bodyPr>
+          <a:lstStyle/>
+          <a:p>
+            <a:pPr algn="l" rtl="0"/>
+            <a:r>
+              <a:rPr sz="1000" b="0">
+                <a:solidFill>
+                  <a:srgbClr val="666666"/>
+                </a:solidFill>
+                <a:latin typeface="Calibri"/>
+              </a:rPr>
+              <a:t>11_  •  5/9</a:t>
             </a:r>
           </a:p>
         </p:txBody>
@@ -4223,22 +5200,57 @@
       <p:grpSpPr/>
       <p:sp>
         <p:nvSpPr>
-          <p:cNvPr id="2" name="Rectangle 1"/>
+          <p:cNvPr id="2" name="TextBox 1"/>
+          <p:cNvSpPr txBox="1"/>
+          <p:nvPr/>
+        </p:nvSpPr>
+        <p:spPr>
+          <a:xfrm>
+            <a:off x="640080" y="137160"/>
+            <a:ext cx="10972800" cy="640080"/>
+          </a:xfrm>
+          <a:prstGeom prst="rect">
+            <a:avLst/>
+          </a:prstGeom>
+          <a:noFill/>
+        </p:spPr>
+        <p:txBody>
+          <a:bodyPr wrap="none">
+            <a:spAutoFit/>
+          </a:bodyPr>
+          <a:lstStyle/>
+          <a:p>
+            <a:pPr algn="r" rtl="1"/>
+            <a:r>
+              <a:rPr sz="3000" b="1">
+                <a:solidFill>
+                  <a:srgbClr val="1F3B5C"/>
+                </a:solidFill>
+                <a:latin typeface="Arial"/>
+              </a:rPr>
+              <a:t>المعمارية المرجعية للذكاء التوليدي / GenAI Reference Architecture</a:t>
+            </a:r>
+          </a:p>
+        </p:txBody>
+      </p:sp>
+      <p:sp>
+        <p:nvSpPr>
+          <p:cNvPr id="3" name="Rounded Rectangle 2"/>
           <p:cNvSpPr/>
           <p:nvPr/>
         </p:nvSpPr>
         <p:spPr>
           <a:xfrm>
-            <a:off x="0" y="0"/>
-            <a:ext cx="12191695" cy="1005840"/>
-          </a:xfrm>
-          <a:prstGeom prst="rect">
+            <a:off x="1097280" y="1280160"/>
+            <a:ext cx="9966960" cy="1051560"/>
+          </a:xfrm>
+          <a:prstGeom prst="roundRect">
             <a:avLst/>
           </a:prstGeom>
           <a:solidFill>
-            <a:srgbClr val="FFFFFF"/>
+            <a:srgbClr val="DCE6F1"/>
           </a:solidFill>
-          <a:ln w="25400">
+          <a:ln w="12700">
             <a:solidFill>
               <a:srgbClr val="1F4E79"/>
             </a:solidFill>
@@ -4260,23 +5272,245 @@
           </a:fontRef>
         </p:style>
         <p:txBody>
-          <a:bodyPr rtlCol="0" anchor="ctr"/>
-          <a:lstStyle/>
-          <a:p>
-            <a:pPr algn="ctr"/>
-          </a:p>
-        </p:txBody>
-      </p:sp>
-      <p:sp>
-        <p:nvSpPr>
-          <p:cNvPr id="3" name="TextBox 2"/>
+          <a:bodyPr rtlCol="0" anchor="ctr" wrap="square"/>
+          <a:lstStyle/>
+          <a:p>
+            <a:pPr algn="ctr" rtl="1"/>
+            <a:r>
+              <a:rPr sz="1800" b="1">
+                <a:solidFill>
+                  <a:srgbClr val="333333"/>
+                </a:solidFill>
+                <a:latin typeface="Arial"/>
+              </a:rPr>
+              <a:t>أ. بوابة منصة GenAI</a:t>
+            </a:r>
+          </a:p>
+          <a:p>
+            <a:pPr algn="ctr" rtl="0"/>
+            <a:r>
+              <a:rPr sz="1300">
+                <a:solidFill>
+                  <a:srgbClr val="666666"/>
+                </a:solidFill>
+                <a:latin typeface="Calibri"/>
+              </a:rPr>
+              <a:t>A. Platform Portal — POC → MVP → PROD</a:t>
+            </a:r>
+          </a:p>
+        </p:txBody>
+      </p:sp>
+      <p:sp>
+        <p:nvSpPr>
+          <p:cNvPr id="4" name="Rounded Rectangle 3"/>
+          <p:cNvSpPr/>
+          <p:nvPr/>
+        </p:nvSpPr>
+        <p:spPr>
+          <a:xfrm>
+            <a:off x="1097280" y="2487168"/>
+            <a:ext cx="9966960" cy="1051560"/>
+          </a:xfrm>
+          <a:prstGeom prst="roundRect">
+            <a:avLst/>
+          </a:prstGeom>
+          <a:solidFill>
+            <a:srgbClr val="E2EFDA"/>
+          </a:solidFill>
+          <a:ln w="12700">
+            <a:solidFill>
+              <a:srgbClr val="1F4E79"/>
+            </a:solidFill>
+          </a:ln>
+          <a:effectLst/>
+        </p:spPr>
+        <p:style>
+          <a:lnRef idx="1">
+            <a:schemeClr val="accent1"/>
+          </a:lnRef>
+          <a:fillRef idx="3">
+            <a:schemeClr val="accent1"/>
+          </a:fillRef>
+          <a:effectRef idx="2">
+            <a:schemeClr val="accent1"/>
+          </a:effectRef>
+          <a:fontRef idx="minor">
+            <a:schemeClr val="lt1"/>
+          </a:fontRef>
+        </p:style>
+        <p:txBody>
+          <a:bodyPr rtlCol="0" anchor="ctr" wrap="square"/>
+          <a:lstStyle/>
+          <a:p>
+            <a:pPr algn="ctr" rtl="1"/>
+            <a:r>
+              <a:rPr sz="1800" b="1">
+                <a:solidFill>
+                  <a:srgbClr val="333333"/>
+                </a:solidFill>
+                <a:latin typeface="Arial"/>
+              </a:rPr>
+              <a:t>ب. الأتمتة والامتثال</a:t>
+            </a:r>
+          </a:p>
+          <a:p>
+            <a:pPr algn="ctr" rtl="0"/>
+            <a:r>
+              <a:rPr sz="1300">
+                <a:solidFill>
+                  <a:srgbClr val="666666"/>
+                </a:solidFill>
+                <a:latin typeface="Calibri"/>
+              </a:rPr>
+              <a:t>B. Automation &amp; Compliance — CI/CD gates</a:t>
+            </a:r>
+          </a:p>
+        </p:txBody>
+      </p:sp>
+      <p:sp>
+        <p:nvSpPr>
+          <p:cNvPr id="5" name="Rounded Rectangle 4"/>
+          <p:cNvSpPr/>
+          <p:nvPr/>
+        </p:nvSpPr>
+        <p:spPr>
+          <a:xfrm>
+            <a:off x="1097280" y="3694176"/>
+            <a:ext cx="9966960" cy="1051560"/>
+          </a:xfrm>
+          <a:prstGeom prst="roundRect">
+            <a:avLst/>
+          </a:prstGeom>
+          <a:solidFill>
+            <a:srgbClr val="FDE9D9"/>
+          </a:solidFill>
+          <a:ln w="12700">
+            <a:solidFill>
+              <a:srgbClr val="1F4E79"/>
+            </a:solidFill>
+          </a:ln>
+          <a:effectLst/>
+        </p:spPr>
+        <p:style>
+          <a:lnRef idx="1">
+            <a:schemeClr val="accent1"/>
+          </a:lnRef>
+          <a:fillRef idx="3">
+            <a:schemeClr val="accent1"/>
+          </a:fillRef>
+          <a:effectRef idx="2">
+            <a:schemeClr val="accent1"/>
+          </a:effectRef>
+          <a:fontRef idx="minor">
+            <a:schemeClr val="lt1"/>
+          </a:fontRef>
+        </p:style>
+        <p:txBody>
+          <a:bodyPr rtlCol="0" anchor="ctr" wrap="square"/>
+          <a:lstStyle/>
+          <a:p>
+            <a:pPr algn="ctr" rtl="1"/>
+            <a:r>
+              <a:rPr sz="1800" b="1">
+                <a:solidFill>
+                  <a:srgbClr val="333333"/>
+                </a:solidFill>
+                <a:latin typeface="Arial"/>
+              </a:rPr>
+              <a:t>ج. الخدمات المشتركة</a:t>
+            </a:r>
+          </a:p>
+          <a:p>
+            <a:pPr algn="ctr" rtl="0"/>
+            <a:r>
+              <a:rPr sz="1300">
+                <a:solidFill>
+                  <a:srgbClr val="666666"/>
+                </a:solidFill>
+                <a:latin typeface="Calibri"/>
+              </a:rPr>
+              <a:t>C. Shared Services — Gateway, Prompts, Audit, Guardrails</a:t>
+            </a:r>
+          </a:p>
+        </p:txBody>
+      </p:sp>
+      <p:sp>
+        <p:nvSpPr>
+          <p:cNvPr id="6" name="Rounded Rectangle 5"/>
+          <p:cNvSpPr/>
+          <p:nvPr/>
+        </p:nvSpPr>
+        <p:spPr>
+          <a:xfrm>
+            <a:off x="1097280" y="4901184"/>
+            <a:ext cx="9966960" cy="1051560"/>
+          </a:xfrm>
+          <a:prstGeom prst="roundRect">
+            <a:avLst/>
+          </a:prstGeom>
+          <a:solidFill>
+            <a:srgbClr val="EDEDED"/>
+          </a:solidFill>
+          <a:ln w="12700">
+            <a:solidFill>
+              <a:srgbClr val="1F4E79"/>
+            </a:solidFill>
+          </a:ln>
+          <a:effectLst/>
+        </p:spPr>
+        <p:style>
+          <a:lnRef idx="1">
+            <a:schemeClr val="accent1"/>
+          </a:lnRef>
+          <a:fillRef idx="3">
+            <a:schemeClr val="accent1"/>
+          </a:fillRef>
+          <a:effectRef idx="2">
+            <a:schemeClr val="accent1"/>
+          </a:effectRef>
+          <a:fontRef idx="minor">
+            <a:schemeClr val="lt1"/>
+          </a:fontRef>
+        </p:style>
+        <p:txBody>
+          <a:bodyPr rtlCol="0" anchor="ctr" wrap="square"/>
+          <a:lstStyle/>
+          <a:p>
+            <a:pPr algn="ctr" rtl="1"/>
+            <a:r>
+              <a:rPr sz="1800" b="1">
+                <a:solidFill>
+                  <a:srgbClr val="333333"/>
+                </a:solidFill>
+                <a:latin typeface="Arial"/>
+              </a:rPr>
+              <a:t>د. الحوكمة والمراقبة</a:t>
+            </a:r>
+          </a:p>
+          <a:p>
+            <a:pPr algn="ctr" rtl="0"/>
+            <a:r>
+              <a:rPr sz="1300">
+                <a:solidFill>
+                  <a:srgbClr val="666666"/>
+                </a:solidFill>
+                <a:latin typeface="Calibri"/>
+              </a:rPr>
+              <a:t>D. Governance &amp; Monitoring — Responsible AI, FinOps</a:t>
+            </a:r>
+          </a:p>
+        </p:txBody>
+      </p:sp>
+      <p:sp>
+        <p:nvSpPr>
+          <p:cNvPr id="7" name="TextBox 6"/>
           <p:cNvSpPr txBox="1"/>
           <p:nvPr/>
         </p:nvSpPr>
         <p:spPr>
           <a:xfrm>
-            <a:off x="640080" y="182880"/>
-            <a:ext cx="10972800" cy="640080"/>
+            <a:off x="640080" y="6126480"/>
+            <a:ext cx="10972800" cy="548640"/>
           </a:xfrm>
           <a:prstGeom prst="rect">
             <a:avLst/>
@@ -4291,27 +5525,33 @@
           <a:p>
             <a:pPr algn="r" rtl="1"/>
             <a:r>
-              <a:rPr sz="3200" b="1">
-                <a:solidFill>
-                  <a:srgbClr val="1F3B5C"/>
-                </a:solidFill>
-                <a:latin typeface="Calibri"/>
-              </a:rPr>
-              <a:t>اختبار قصير / Quick Quiz</a:t>
-            </a:r>
-          </a:p>
-        </p:txBody>
-      </p:sp>
-      <p:sp>
-        <p:nvSpPr>
-          <p:cNvPr id="4" name="TextBox 3"/>
+              <a:rPr sz="1400">
+                <a:solidFill>
+                  <a:srgbClr val="666666"/>
+                </a:solidFill>
+                <a:latin typeface="Arial"/>
+              </a:rPr>
+              <a:t>النمط المرجعي المؤسسي (McKinsey) — نافذة موحدة فوق خدمات مشتركة محكومة.</a:t>
+            </a:r>
+          </a:p>
+          <a:p>
+            <a:pPr algn="r" rtl="0"/>
+            <a:r>
+              <a:t>Enterprise reference pattern (McKinsey) — a unified pane over governed shared services.</a:t>
+            </a:r>
+          </a:p>
+        </p:txBody>
+      </p:sp>
+      <p:sp>
+        <p:nvSpPr>
+          <p:cNvPr id="8" name="TextBox 7"/>
           <p:cNvSpPr txBox="1"/>
           <p:nvPr/>
         </p:nvSpPr>
         <p:spPr>
           <a:xfrm>
-            <a:off x="640080" y="1280160"/>
-            <a:ext cx="10972800" cy="5212080"/>
+            <a:off x="640080" y="6400800"/>
+            <a:ext cx="8686800" cy="320040"/>
           </a:xfrm>
           <a:prstGeom prst="rect">
             <a:avLst/>
@@ -4324,99 +5564,120 @@
           </a:bodyPr>
           <a:lstStyle/>
           <a:p>
-            <a:pPr algn="r" rtl="1">
-              <a:spcAft>
-                <a:spcPts val="1000"/>
-              </a:spcAft>
-            </a:pPr>
-            <a:r>
-              <a:rPr sz="2000">
-                <a:solidFill>
-                  <a:srgbClr val="333333"/>
+            <a:pPr algn="r" rtl="1"/>
+            <a:r>
+              <a:rPr sz="1000" b="0">
+                <a:solidFill>
+                  <a:srgbClr val="666666"/>
+                </a:solidFill>
+                <a:latin typeface="Arial"/>
+              </a:rPr>
+              <a:t>Module 02 — Data &amp; AI Engineering Track  |  الوحدة الثانية</a:t>
+            </a:r>
+          </a:p>
+        </p:txBody>
+      </p:sp>
+      <p:sp>
+        <p:nvSpPr>
+          <p:cNvPr id="9" name="TextBox 8"/>
+          <p:cNvSpPr txBox="1"/>
+          <p:nvPr/>
+        </p:nvSpPr>
+        <p:spPr>
+          <a:xfrm>
+            <a:off x="9601200" y="6400800"/>
+            <a:ext cx="1920240" cy="320040"/>
+          </a:xfrm>
+          <a:prstGeom prst="rect">
+            <a:avLst/>
+          </a:prstGeom>
+          <a:noFill/>
+        </p:spPr>
+        <p:txBody>
+          <a:bodyPr wrap="square">
+            <a:spAutoFit/>
+          </a:bodyPr>
+          <a:lstStyle/>
+          <a:p>
+            <a:pPr algn="l" rtl="0"/>
+            <a:r>
+              <a:rPr sz="1000" b="0">
+                <a:solidFill>
+                  <a:srgbClr val="666666"/>
                 </a:solidFill>
                 <a:latin typeface="Calibri"/>
               </a:rPr>
-              <a:t>• 1. ما وظيفة بوابة AI الموحدة (AI Gateway)؟</a:t>
-            </a:r>
-          </a:p>
-          <a:p>
-            <a:pPr algn="r" rtl="0">
-              <a:spcAft>
-                <a:spcPts val="1000"/>
-              </a:spcAft>
-            </a:pPr>
-            <a:r>
-              <a:rPr sz="2000">
+              <a:t>11_  •  6/9</a:t>
+            </a:r>
+          </a:p>
+        </p:txBody>
+      </p:sp>
+      <p:sp>
+        <p:nvSpPr>
+          <p:cNvPr id="10" name="TextBox 9"/>
+          <p:cNvSpPr txBox="1"/>
+          <p:nvPr/>
+        </p:nvSpPr>
+        <p:spPr>
+          <a:xfrm>
+            <a:off x="640080" y="6400800"/>
+            <a:ext cx="8686800" cy="320040"/>
+          </a:xfrm>
+          <a:prstGeom prst="rect">
+            <a:avLst/>
+          </a:prstGeom>
+          <a:noFill/>
+        </p:spPr>
+        <p:txBody>
+          <a:bodyPr wrap="square">
+            <a:spAutoFit/>
+          </a:bodyPr>
+          <a:lstStyle/>
+          <a:p>
+            <a:pPr algn="r" rtl="1"/>
+            <a:r>
+              <a:rPr sz="1000" b="0">
                 <a:solidFill>
                   <a:srgbClr val="666666"/>
                 </a:solidFill>
+                <a:latin typeface="Arial"/>
+              </a:rPr>
+              <a:t>Module 02 — Data &amp; AI Engineering Track  |  الوحدة الثانية</a:t>
+            </a:r>
+          </a:p>
+        </p:txBody>
+      </p:sp>
+      <p:sp>
+        <p:nvSpPr>
+          <p:cNvPr id="11" name="TextBox 10"/>
+          <p:cNvSpPr txBox="1"/>
+          <p:nvPr/>
+        </p:nvSpPr>
+        <p:spPr>
+          <a:xfrm>
+            <a:off x="9601200" y="6400800"/>
+            <a:ext cx="1920240" cy="320040"/>
+          </a:xfrm>
+          <a:prstGeom prst="rect">
+            <a:avLst/>
+          </a:prstGeom>
+          <a:noFill/>
+        </p:spPr>
+        <p:txBody>
+          <a:bodyPr wrap="square">
+            <a:spAutoFit/>
+          </a:bodyPr>
+          <a:lstStyle/>
+          <a:p>
+            <a:pPr algn="l" rtl="0"/>
+            <a:r>
+              <a:rPr sz="1000" b="0">
+                <a:solidFill>
+                  <a:srgbClr val="666666"/>
+                </a:solidFill>
                 <a:latin typeface="Calibri"/>
               </a:rPr>
-              <a:t>   What does a unified AI gateway do?</a:t>
-            </a:r>
-          </a:p>
-          <a:p>
-            <a:pPr algn="r" rtl="1">
-              <a:spcAft>
-                <a:spcPts val="1000"/>
-              </a:spcAft>
-            </a:pPr>
-            <a:r>
-              <a:rPr sz="2000">
-                <a:solidFill>
-                  <a:srgbClr val="333333"/>
-                </a:solidFill>
-                <a:latin typeface="Calibri"/>
-              </a:rPr>
-              <a:t>• 2. لماذا نحتاج قاعدة تدقيق لنماذج LLM؟</a:t>
-            </a:r>
-          </a:p>
-          <a:p>
-            <a:pPr algn="r" rtl="0">
-              <a:spcAft>
-                <a:spcPts val="1000"/>
-              </a:spcAft>
-            </a:pPr>
-            <a:r>
-              <a:rPr sz="2000">
-                <a:solidFill>
-                  <a:srgbClr val="666666"/>
-                </a:solidFill>
-                <a:latin typeface="Calibri"/>
-              </a:rPr>
-              <a:t>   Why keep an LLM audit database?</a:t>
-            </a:r>
-          </a:p>
-          <a:p>
-            <a:pPr algn="r" rtl="1">
-              <a:spcAft>
-                <a:spcPts val="1000"/>
-              </a:spcAft>
-            </a:pPr>
-            <a:r>
-              <a:rPr sz="2000">
-                <a:solidFill>
-                  <a:srgbClr val="333333"/>
-                </a:solidFill>
-                <a:latin typeface="Calibri"/>
-              </a:rPr>
-              <a:t>• 3. ما دور CI/CD في حوكمة GenAI؟</a:t>
-            </a:r>
-          </a:p>
-          <a:p>
-            <a:pPr algn="r" rtl="0">
-              <a:spcAft>
-                <a:spcPts val="1000"/>
-              </a:spcAft>
-            </a:pPr>
-            <a:r>
-              <a:rPr sz="2000">
-                <a:solidFill>
-                  <a:srgbClr val="666666"/>
-                </a:solidFill>
-                <a:latin typeface="Calibri"/>
-              </a:rPr>
-              <a:t>   What is CI/CD's role in GenAI governance?</a:t>
+              <a:t>11_  •  6/9</a:t>
             </a:r>
           </a:p>
         </p:txBody>
@@ -4521,9 +5782,9 @@
                 <a:solidFill>
                   <a:srgbClr val="1F3B5C"/>
                 </a:solidFill>
-                <a:latin typeface="Calibri"/>
-              </a:rPr>
-              <a:t>للاستزادة / Further Reading</a:t>
+                <a:latin typeface="Arial"/>
+              </a:rPr>
+              <a:t>اختبار قصير / Quick Quiz</a:t>
             </a:r>
           </a:p>
         </p:txBody>
@@ -4551,6 +5812,9 @@
           <a:lstStyle/>
           <a:p>
             <a:pPr algn="r" rtl="1">
+              <a:spcBef>
+                <a:spcPts val="200"/>
+              </a:spcBef>
               <a:spcAft>
                 <a:spcPts val="1000"/>
               </a:spcAft>
@@ -4560,29 +5824,35 @@
                 <a:solidFill>
                   <a:srgbClr val="333333"/>
                 </a:solidFill>
-                <a:latin typeface="Calibri"/>
-              </a:rPr>
-              <a:t>• توثيق DataHub وApache Atlas.</a:t>
-            </a:r>
-          </a:p>
-          <a:p>
-            <a:pPr algn="r" rtl="0">
+                <a:latin typeface="Arial"/>
+              </a:rPr>
+              <a:t>• 1. ما وظيفة بوابة AI الموحدة (AI Gateway)؟</a:t>
+            </a:r>
+          </a:p>
+          <a:p>
+            <a:pPr algn="l" rtl="0">
+              <a:spcBef>
+                <a:spcPts val="200"/>
+              </a:spcBef>
               <a:spcAft>
                 <a:spcPts val="1000"/>
               </a:spcAft>
             </a:pPr>
             <a:r>
-              <a:rPr sz="2000">
+              <a:rPr sz="1700">
                 <a:solidFill>
                   <a:srgbClr val="666666"/>
                 </a:solidFill>
                 <a:latin typeface="Calibri"/>
               </a:rPr>
-              <a:t>   DataHub and Apache Atlas docs.</a:t>
+              <a:t>• What does a unified AI gateway do?</a:t>
             </a:r>
           </a:p>
           <a:p>
             <a:pPr algn="r" rtl="1">
+              <a:spcBef>
+                <a:spcPts val="200"/>
+              </a:spcBef>
               <a:spcAft>
                 <a:spcPts val="1000"/>
               </a:spcAft>
@@ -4592,25 +5862,276 @@
                 <a:solidFill>
                   <a:srgbClr val="333333"/>
                 </a:solidFill>
-                <a:latin typeface="Calibri"/>
-              </a:rPr>
-              <a:t>• المعمارية المرجعية للذكاء التوليدي — McKinsey.</a:t>
-            </a:r>
-          </a:p>
-          <a:p>
-            <a:pPr algn="r" rtl="0">
+                <a:latin typeface="Arial"/>
+              </a:rPr>
+              <a:t>• 2. لماذا نحتاج قاعدة تدقيق لنماذج LLM؟</a:t>
+            </a:r>
+          </a:p>
+          <a:p>
+            <a:pPr algn="l" rtl="0">
+              <a:spcBef>
+                <a:spcPts val="200"/>
+              </a:spcBef>
               <a:spcAft>
                 <a:spcPts val="1000"/>
               </a:spcAft>
             </a:pPr>
             <a:r>
+              <a:rPr sz="1700">
+                <a:solidFill>
+                  <a:srgbClr val="666666"/>
+                </a:solidFill>
+                <a:latin typeface="Calibri"/>
+              </a:rPr>
+              <a:t>• Why keep an LLM audit database?</a:t>
+            </a:r>
+          </a:p>
+          <a:p>
+            <a:pPr algn="r" rtl="1">
+              <a:spcBef>
+                <a:spcPts val="200"/>
+              </a:spcBef>
+              <a:spcAft>
+                <a:spcPts val="1000"/>
+              </a:spcAft>
+            </a:pPr>
+            <a:r>
               <a:rPr sz="2000">
                 <a:solidFill>
+                  <a:srgbClr val="333333"/>
+                </a:solidFill>
+                <a:latin typeface="Arial"/>
+              </a:rPr>
+              <a:t>• 3. ما دور CI/CD في حوكمة GenAI؟</a:t>
+            </a:r>
+          </a:p>
+          <a:p>
+            <a:pPr algn="l" rtl="0">
+              <a:spcBef>
+                <a:spcPts val="200"/>
+              </a:spcBef>
+              <a:spcAft>
+                <a:spcPts val="1000"/>
+              </a:spcAft>
+            </a:pPr>
+            <a:r>
+              <a:rPr sz="1700">
+                <a:solidFill>
                   <a:srgbClr val="666666"/>
                 </a:solidFill>
                 <a:latin typeface="Calibri"/>
               </a:rPr>
-              <a:t>   GenAI reference architecture — McKinsey.</a:t>
+              <a:t>• What is CI/CD's role in GenAI governance?</a:t>
+            </a:r>
+          </a:p>
+        </p:txBody>
+      </p:sp>
+      <p:sp>
+        <p:nvSpPr>
+          <p:cNvPr id="5" name="TextBox 4"/>
+          <p:cNvSpPr txBox="1"/>
+          <p:nvPr/>
+        </p:nvSpPr>
+        <p:spPr>
+          <a:xfrm>
+            <a:off x="640080" y="6400800"/>
+            <a:ext cx="8686800" cy="320040"/>
+          </a:xfrm>
+          <a:prstGeom prst="rect">
+            <a:avLst/>
+          </a:prstGeom>
+          <a:noFill/>
+        </p:spPr>
+        <p:txBody>
+          <a:bodyPr wrap="square">
+            <a:spAutoFit/>
+          </a:bodyPr>
+          <a:lstStyle/>
+          <a:p>
+            <a:pPr algn="r" rtl="1"/>
+            <a:r>
+              <a:rPr sz="1000" b="0">
+                <a:solidFill>
+                  <a:srgbClr val="666666"/>
+                </a:solidFill>
+                <a:latin typeface="Arial"/>
+              </a:rPr>
+              <a:t>Module 02 — Data &amp; AI Engineering Track  |  الوحدة الثانية</a:t>
+            </a:r>
+          </a:p>
+        </p:txBody>
+      </p:sp>
+      <p:sp>
+        <p:nvSpPr>
+          <p:cNvPr id="6" name="TextBox 5"/>
+          <p:cNvSpPr txBox="1"/>
+          <p:nvPr/>
+        </p:nvSpPr>
+        <p:spPr>
+          <a:xfrm>
+            <a:off x="9601200" y="6400800"/>
+            <a:ext cx="1920240" cy="320040"/>
+          </a:xfrm>
+          <a:prstGeom prst="rect">
+            <a:avLst/>
+          </a:prstGeom>
+          <a:noFill/>
+        </p:spPr>
+        <p:txBody>
+          <a:bodyPr wrap="square">
+            <a:spAutoFit/>
+          </a:bodyPr>
+          <a:lstStyle/>
+          <a:p>
+            <a:pPr algn="l" rtl="0"/>
+            <a:r>
+              <a:rPr sz="1000" b="0">
+                <a:solidFill>
+                  <a:srgbClr val="666666"/>
+                </a:solidFill>
+                <a:latin typeface="Calibri"/>
+              </a:rPr>
+              <a:t>V11  •  6/11</a:t>
+            </a:r>
+          </a:p>
+        </p:txBody>
+      </p:sp>
+      <p:sp>
+        <p:nvSpPr>
+          <p:cNvPr id="7" name="TextBox 6"/>
+          <p:cNvSpPr txBox="1"/>
+          <p:nvPr/>
+        </p:nvSpPr>
+        <p:spPr>
+          <a:xfrm>
+            <a:off x="640080" y="6400800"/>
+            <a:ext cx="8686800" cy="320040"/>
+          </a:xfrm>
+          <a:prstGeom prst="rect">
+            <a:avLst/>
+          </a:prstGeom>
+          <a:noFill/>
+        </p:spPr>
+        <p:txBody>
+          <a:bodyPr wrap="square">
+            <a:spAutoFit/>
+          </a:bodyPr>
+          <a:lstStyle/>
+          <a:p>
+            <a:pPr algn="r" rtl="1"/>
+            <a:r>
+              <a:rPr sz="1000" b="0">
+                <a:solidFill>
+                  <a:srgbClr val="666666"/>
+                </a:solidFill>
+                <a:latin typeface="Arial"/>
+              </a:rPr>
+              <a:t>Module 02 — Data &amp; AI Engineering Track  |  الوحدة الثانية</a:t>
+            </a:r>
+          </a:p>
+        </p:txBody>
+      </p:sp>
+      <p:sp>
+        <p:nvSpPr>
+          <p:cNvPr id="8" name="TextBox 7"/>
+          <p:cNvSpPr txBox="1"/>
+          <p:nvPr/>
+        </p:nvSpPr>
+        <p:spPr>
+          <a:xfrm>
+            <a:off x="9601200" y="6400800"/>
+            <a:ext cx="1920240" cy="320040"/>
+          </a:xfrm>
+          <a:prstGeom prst="rect">
+            <a:avLst/>
+          </a:prstGeom>
+          <a:noFill/>
+        </p:spPr>
+        <p:txBody>
+          <a:bodyPr wrap="square">
+            <a:spAutoFit/>
+          </a:bodyPr>
+          <a:lstStyle/>
+          <a:p>
+            <a:pPr algn="l" rtl="0"/>
+            <a:r>
+              <a:rPr sz="1000" b="0">
+                <a:solidFill>
+                  <a:srgbClr val="666666"/>
+                </a:solidFill>
+                <a:latin typeface="Calibri"/>
+              </a:rPr>
+              <a:t>11_  •  7/9</a:t>
+            </a:r>
+          </a:p>
+        </p:txBody>
+      </p:sp>
+      <p:sp>
+        <p:nvSpPr>
+          <p:cNvPr id="9" name="TextBox 8"/>
+          <p:cNvSpPr txBox="1"/>
+          <p:nvPr/>
+        </p:nvSpPr>
+        <p:spPr>
+          <a:xfrm>
+            <a:off x="640080" y="6400800"/>
+            <a:ext cx="8686800" cy="320040"/>
+          </a:xfrm>
+          <a:prstGeom prst="rect">
+            <a:avLst/>
+          </a:prstGeom>
+          <a:noFill/>
+        </p:spPr>
+        <p:txBody>
+          <a:bodyPr wrap="square">
+            <a:spAutoFit/>
+          </a:bodyPr>
+          <a:lstStyle/>
+          <a:p>
+            <a:pPr algn="r" rtl="1"/>
+            <a:r>
+              <a:rPr sz="1000" b="0">
+                <a:solidFill>
+                  <a:srgbClr val="666666"/>
+                </a:solidFill>
+                <a:latin typeface="Arial"/>
+              </a:rPr>
+              <a:t>Module 02 — Data &amp; AI Engineering Track  |  الوحدة الثانية</a:t>
+            </a:r>
+          </a:p>
+        </p:txBody>
+      </p:sp>
+      <p:sp>
+        <p:nvSpPr>
+          <p:cNvPr id="10" name="TextBox 9"/>
+          <p:cNvSpPr txBox="1"/>
+          <p:nvPr/>
+        </p:nvSpPr>
+        <p:spPr>
+          <a:xfrm>
+            <a:off x="9601200" y="6400800"/>
+            <a:ext cx="1920240" cy="320040"/>
+          </a:xfrm>
+          <a:prstGeom prst="rect">
+            <a:avLst/>
+          </a:prstGeom>
+          <a:noFill/>
+        </p:spPr>
+        <p:txBody>
+          <a:bodyPr wrap="square">
+            <a:spAutoFit/>
+          </a:bodyPr>
+          <a:lstStyle/>
+          <a:p>
+            <a:pPr algn="l" rtl="0"/>
+            <a:r>
+              <a:rPr sz="1000" b="0">
+                <a:solidFill>
+                  <a:srgbClr val="666666"/>
+                </a:solidFill>
+                <a:latin typeface="Calibri"/>
+              </a:rPr>
+              <a:t>11_  •  7/9</a:t>
             </a:r>
           </a:p>
         </p:txBody>
@@ -4643,57 +6164,22 @@
       <p:grpSpPr/>
       <p:sp>
         <p:nvSpPr>
-          <p:cNvPr id="2" name="TextBox 1"/>
-          <p:cNvSpPr txBox="1"/>
-          <p:nvPr/>
-        </p:nvSpPr>
-        <p:spPr>
-          <a:xfrm>
-            <a:off x="640080" y="137160"/>
-            <a:ext cx="10972800" cy="640080"/>
-          </a:xfrm>
-          <a:prstGeom prst="rect">
-            <a:avLst/>
-          </a:prstGeom>
-          <a:noFill/>
-        </p:spPr>
-        <p:txBody>
-          <a:bodyPr wrap="none">
-            <a:spAutoFit/>
-          </a:bodyPr>
-          <a:lstStyle/>
-          <a:p>
-            <a:pPr algn="r" rtl="1"/>
-            <a:r>
-              <a:rPr sz="3000" b="1">
-                <a:solidFill>
-                  <a:srgbClr val="1F3B5C"/>
-                </a:solidFill>
-                <a:latin typeface="Calibri"/>
-              </a:rPr>
-              <a:t>المعمارية المرجعية للذكاء التوليدي / GenAI Reference Architecture</a:t>
-            </a:r>
-          </a:p>
-        </p:txBody>
-      </p:sp>
-      <p:sp>
-        <p:nvSpPr>
-          <p:cNvPr id="3" name="Rounded Rectangle 2"/>
+          <p:cNvPr id="2" name="Rectangle 1"/>
           <p:cNvSpPr/>
           <p:nvPr/>
         </p:nvSpPr>
         <p:spPr>
           <a:xfrm>
-            <a:off x="1097280" y="1280160"/>
-            <a:ext cx="9966960" cy="1051560"/>
-          </a:xfrm>
-          <a:prstGeom prst="roundRect">
+            <a:off x="0" y="0"/>
+            <a:ext cx="12191695" cy="1005840"/>
+          </a:xfrm>
+          <a:prstGeom prst="rect">
             <a:avLst/>
           </a:prstGeom>
           <a:solidFill>
-            <a:srgbClr val="DCE6F1"/>
+            <a:srgbClr val="FFFFFF"/>
           </a:solidFill>
-          <a:ln w="12700">
+          <a:ln w="25400">
             <a:solidFill>
               <a:srgbClr val="1F4E79"/>
             </a:solidFill>
@@ -4715,52 +6201,439 @@
           </a:fontRef>
         </p:style>
         <p:txBody>
-          <a:bodyPr rtlCol="0" anchor="ctr" wrap="square"/>
-          <a:lstStyle/>
-          <a:p>
-            <a:pPr algn="ctr" rtl="1"/>
-            <a:r>
-              <a:rPr sz="1800" b="1">
+          <a:bodyPr rtlCol="0" anchor="ctr"/>
+          <a:lstStyle/>
+          <a:p>
+            <a:pPr algn="ctr"/>
+          </a:p>
+        </p:txBody>
+      </p:sp>
+      <p:sp>
+        <p:nvSpPr>
+          <p:cNvPr id="3" name="TextBox 2"/>
+          <p:cNvSpPr txBox="1"/>
+          <p:nvPr/>
+        </p:nvSpPr>
+        <p:spPr>
+          <a:xfrm>
+            <a:off x="640080" y="182880"/>
+            <a:ext cx="10972800" cy="640080"/>
+          </a:xfrm>
+          <a:prstGeom prst="rect">
+            <a:avLst/>
+          </a:prstGeom>
+          <a:noFill/>
+        </p:spPr>
+        <p:txBody>
+          <a:bodyPr wrap="square">
+            <a:spAutoFit/>
+          </a:bodyPr>
+          <a:lstStyle/>
+          <a:p>
+            <a:pPr algn="r" rtl="1"/>
+            <a:r>
+              <a:rPr sz="3200" b="1">
+                <a:solidFill>
+                  <a:srgbClr val="1F3B5C"/>
+                </a:solidFill>
+                <a:latin typeface="Arial"/>
+              </a:rPr>
+              <a:t>إجابات الاختبار / Quiz Answers</a:t>
+            </a:r>
+          </a:p>
+        </p:txBody>
+      </p:sp>
+      <p:sp>
+        <p:nvSpPr>
+          <p:cNvPr id="4" name="TextBox 3"/>
+          <p:cNvSpPr txBox="1"/>
+          <p:nvPr/>
+        </p:nvSpPr>
+        <p:spPr>
+          <a:xfrm>
+            <a:off x="640080" y="1280160"/>
+            <a:ext cx="10972800" cy="5212080"/>
+          </a:xfrm>
+          <a:prstGeom prst="rect">
+            <a:avLst/>
+          </a:prstGeom>
+          <a:noFill/>
+        </p:spPr>
+        <p:txBody>
+          <a:bodyPr wrap="square">
+            <a:spAutoFit/>
+          </a:bodyPr>
+          <a:lstStyle/>
+          <a:p>
+            <a:pPr algn="r" rtl="1">
+              <a:spcBef>
+                <a:spcPts val="200"/>
+              </a:spcBef>
+              <a:spcAft>
+                <a:spcPts val="1000"/>
+              </a:spcAft>
+            </a:pPr>
+            <a:r>
+              <a:rPr sz="1800">
                 <a:solidFill>
                   <a:srgbClr val="333333"/>
                 </a:solidFill>
+                <a:latin typeface="Arial"/>
+              </a:rPr>
+              <a:t>• 1. نقطة دخول موحدة تفرض المصادقة والحدود والتسجيل على كل الاستدعاءات.</a:t>
+            </a:r>
+          </a:p>
+          <a:p>
+            <a:pPr algn="l" rtl="0">
+              <a:spcBef>
+                <a:spcPts val="200"/>
+              </a:spcBef>
+              <a:spcAft>
+                <a:spcPts val="1000"/>
+              </a:spcAft>
+            </a:pPr>
+            <a:r>
+              <a:rPr sz="1500">
+                <a:solidFill>
+                  <a:srgbClr val="666666"/>
+                </a:solidFill>
                 <a:latin typeface="Calibri"/>
               </a:rPr>
-              <a:t>أ. بوابة منصة GenAI</a:t>
-            </a:r>
-          </a:p>
-          <a:p>
-            <a:pPr algn="ctr" rtl="0"/>
-            <a:r>
-              <a:rPr sz="1300">
+              <a:t>• A single entry point enforcing auth, limits, and logging for all calls.</a:t>
+            </a:r>
+          </a:p>
+          <a:p>
+            <a:pPr algn="r" rtl="1">
+              <a:spcBef>
+                <a:spcPts val="200"/>
+              </a:spcBef>
+              <a:spcAft>
+                <a:spcPts val="1000"/>
+              </a:spcAft>
+            </a:pPr>
+            <a:r>
+              <a:rPr sz="1800">
+                <a:solidFill>
+                  <a:srgbClr val="333333"/>
+                </a:solidFill>
+                <a:latin typeface="Arial"/>
+              </a:rPr>
+              <a:t>• 2. لتتبع الموجِّهات والإجابات والامتثال والتحقيق في الحوادث.</a:t>
+            </a:r>
+          </a:p>
+          <a:p>
+            <a:pPr algn="l" rtl="0">
+              <a:spcBef>
+                <a:spcPts val="200"/>
+              </a:spcBef>
+              <a:spcAft>
+                <a:spcPts val="1000"/>
+              </a:spcAft>
+            </a:pPr>
+            <a:r>
+              <a:rPr sz="1500">
                 <a:solidFill>
                   <a:srgbClr val="666666"/>
                 </a:solidFill>
                 <a:latin typeface="Calibri"/>
               </a:rPr>
-              <a:t>A. Platform Portal — POC → MVP → PROD</a:t>
-            </a:r>
-          </a:p>
-        </p:txBody>
-      </p:sp>
-      <p:sp>
-        <p:nvSpPr>
-          <p:cNvPr id="4" name="Rounded Rectangle 3"/>
+              <a:t>• To trace prompts/answers for compliance and investigation.</a:t>
+            </a:r>
+          </a:p>
+          <a:p>
+            <a:pPr algn="r" rtl="1">
+              <a:spcBef>
+                <a:spcPts val="200"/>
+              </a:spcBef>
+              <a:spcAft>
+                <a:spcPts val="1000"/>
+              </a:spcAft>
+            </a:pPr>
+            <a:r>
+              <a:rPr sz="1800">
+                <a:solidFill>
+                  <a:srgbClr val="333333"/>
+                </a:solidFill>
+                <a:latin typeface="Arial"/>
+              </a:rPr>
+              <a:t>• 3. بوابات تحكم وموافقات مرحلية آلية قبل الإنتاج.</a:t>
+            </a:r>
+          </a:p>
+          <a:p>
+            <a:pPr algn="l" rtl="0">
+              <a:spcBef>
+                <a:spcPts val="200"/>
+              </a:spcBef>
+              <a:spcAft>
+                <a:spcPts val="1000"/>
+              </a:spcAft>
+            </a:pPr>
+            <a:r>
+              <a:rPr sz="1500">
+                <a:solidFill>
+                  <a:srgbClr val="666666"/>
+                </a:solidFill>
+                <a:latin typeface="Calibri"/>
+              </a:rPr>
+              <a:t>• Automated control gates and approvals before production.</a:t>
+            </a:r>
+          </a:p>
+        </p:txBody>
+      </p:sp>
+      <p:sp>
+        <p:nvSpPr>
+          <p:cNvPr id="5" name="TextBox 4"/>
+          <p:cNvSpPr txBox="1"/>
+          <p:nvPr/>
+        </p:nvSpPr>
+        <p:spPr>
+          <a:xfrm>
+            <a:off x="640080" y="6400800"/>
+            <a:ext cx="8686800" cy="320040"/>
+          </a:xfrm>
+          <a:prstGeom prst="rect">
+            <a:avLst/>
+          </a:prstGeom>
+          <a:noFill/>
+        </p:spPr>
+        <p:txBody>
+          <a:bodyPr wrap="square">
+            <a:spAutoFit/>
+          </a:bodyPr>
+          <a:lstStyle/>
+          <a:p>
+            <a:pPr algn="r" rtl="1"/>
+            <a:r>
+              <a:rPr sz="1000" b="0">
+                <a:solidFill>
+                  <a:srgbClr val="666666"/>
+                </a:solidFill>
+                <a:latin typeface="Arial"/>
+              </a:rPr>
+              <a:t>Module 02 — Data &amp; AI Engineering Track  |  الوحدة الثانية</a:t>
+            </a:r>
+          </a:p>
+        </p:txBody>
+      </p:sp>
+      <p:sp>
+        <p:nvSpPr>
+          <p:cNvPr id="6" name="TextBox 5"/>
+          <p:cNvSpPr txBox="1"/>
+          <p:nvPr/>
+        </p:nvSpPr>
+        <p:spPr>
+          <a:xfrm>
+            <a:off x="9601200" y="6400800"/>
+            <a:ext cx="1920240" cy="320040"/>
+          </a:xfrm>
+          <a:prstGeom prst="rect">
+            <a:avLst/>
+          </a:prstGeom>
+          <a:noFill/>
+        </p:spPr>
+        <p:txBody>
+          <a:bodyPr wrap="square">
+            <a:spAutoFit/>
+          </a:bodyPr>
+          <a:lstStyle/>
+          <a:p>
+            <a:pPr algn="l" rtl="0"/>
+            <a:r>
+              <a:rPr sz="1000" b="0">
+                <a:solidFill>
+                  <a:srgbClr val="666666"/>
+                </a:solidFill>
+                <a:latin typeface="Calibri"/>
+              </a:rPr>
+              <a:t>V11  •  7/11</a:t>
+            </a:r>
+          </a:p>
+        </p:txBody>
+      </p:sp>
+      <p:sp>
+        <p:nvSpPr>
+          <p:cNvPr id="7" name="TextBox 6"/>
+          <p:cNvSpPr txBox="1"/>
+          <p:nvPr/>
+        </p:nvSpPr>
+        <p:spPr>
+          <a:xfrm>
+            <a:off x="640080" y="6400800"/>
+            <a:ext cx="8686800" cy="320040"/>
+          </a:xfrm>
+          <a:prstGeom prst="rect">
+            <a:avLst/>
+          </a:prstGeom>
+          <a:noFill/>
+        </p:spPr>
+        <p:txBody>
+          <a:bodyPr wrap="square">
+            <a:spAutoFit/>
+          </a:bodyPr>
+          <a:lstStyle/>
+          <a:p>
+            <a:pPr algn="r" rtl="1"/>
+            <a:r>
+              <a:rPr sz="1000" b="0">
+                <a:solidFill>
+                  <a:srgbClr val="666666"/>
+                </a:solidFill>
+                <a:latin typeface="Arial"/>
+              </a:rPr>
+              <a:t>Module 02 — Data &amp; AI Engineering Track  |  الوحدة الثانية</a:t>
+            </a:r>
+          </a:p>
+        </p:txBody>
+      </p:sp>
+      <p:sp>
+        <p:nvSpPr>
+          <p:cNvPr id="8" name="TextBox 7"/>
+          <p:cNvSpPr txBox="1"/>
+          <p:nvPr/>
+        </p:nvSpPr>
+        <p:spPr>
+          <a:xfrm>
+            <a:off x="9601200" y="6400800"/>
+            <a:ext cx="1920240" cy="320040"/>
+          </a:xfrm>
+          <a:prstGeom prst="rect">
+            <a:avLst/>
+          </a:prstGeom>
+          <a:noFill/>
+        </p:spPr>
+        <p:txBody>
+          <a:bodyPr wrap="square">
+            <a:spAutoFit/>
+          </a:bodyPr>
+          <a:lstStyle/>
+          <a:p>
+            <a:pPr algn="l" rtl="0"/>
+            <a:r>
+              <a:rPr sz="1000" b="0">
+                <a:solidFill>
+                  <a:srgbClr val="666666"/>
+                </a:solidFill>
+                <a:latin typeface="Calibri"/>
+              </a:rPr>
+              <a:t>11_  •  8/9</a:t>
+            </a:r>
+          </a:p>
+        </p:txBody>
+      </p:sp>
+      <p:sp>
+        <p:nvSpPr>
+          <p:cNvPr id="9" name="TextBox 8"/>
+          <p:cNvSpPr txBox="1"/>
+          <p:nvPr/>
+        </p:nvSpPr>
+        <p:spPr>
+          <a:xfrm>
+            <a:off x="640080" y="6400800"/>
+            <a:ext cx="8686800" cy="320040"/>
+          </a:xfrm>
+          <a:prstGeom prst="rect">
+            <a:avLst/>
+          </a:prstGeom>
+          <a:noFill/>
+        </p:spPr>
+        <p:txBody>
+          <a:bodyPr wrap="square">
+            <a:spAutoFit/>
+          </a:bodyPr>
+          <a:lstStyle/>
+          <a:p>
+            <a:pPr algn="r" rtl="1"/>
+            <a:r>
+              <a:rPr sz="1000" b="0">
+                <a:solidFill>
+                  <a:srgbClr val="666666"/>
+                </a:solidFill>
+                <a:latin typeface="Arial"/>
+              </a:rPr>
+              <a:t>Module 02 — Data &amp; AI Engineering Track  |  الوحدة الثانية</a:t>
+            </a:r>
+          </a:p>
+        </p:txBody>
+      </p:sp>
+      <p:sp>
+        <p:nvSpPr>
+          <p:cNvPr id="10" name="TextBox 9"/>
+          <p:cNvSpPr txBox="1"/>
+          <p:nvPr/>
+        </p:nvSpPr>
+        <p:spPr>
+          <a:xfrm>
+            <a:off x="9601200" y="6400800"/>
+            <a:ext cx="1920240" cy="320040"/>
+          </a:xfrm>
+          <a:prstGeom prst="rect">
+            <a:avLst/>
+          </a:prstGeom>
+          <a:noFill/>
+        </p:spPr>
+        <p:txBody>
+          <a:bodyPr wrap="square">
+            <a:spAutoFit/>
+          </a:bodyPr>
+          <a:lstStyle/>
+          <a:p>
+            <a:pPr algn="l" rtl="0"/>
+            <a:r>
+              <a:rPr sz="1000" b="0">
+                <a:solidFill>
+                  <a:srgbClr val="666666"/>
+                </a:solidFill>
+                <a:latin typeface="Calibri"/>
+              </a:rPr>
+              <a:t>11_  •  8/9</a:t>
+            </a:r>
+          </a:p>
+        </p:txBody>
+      </p:sp>
+    </p:spTree>
+  </p:cSld>
+  <p:clrMapOvr>
+    <a:masterClrMapping/>
+  </p:clrMapOvr>
+</p:sld>
+</file>
+
+<file path=ppt/slides/slide9.xml><?xml version="1.0" encoding="utf-8"?>
+<p:sld xmlns:a="http://schemas.openxmlformats.org/drawingml/2006/main" xmlns:p="http://schemas.openxmlformats.org/presentationml/2006/main" xmlns:r="http://schemas.openxmlformats.org/officeDocument/2006/relationships">
+  <p:cSld>
+    <p:bg>
+      <p:bgPr>
+        <a:solidFill>
+          <a:srgbClr val="FFFFFF"/>
+        </a:solidFill>
+        <a:effectLst/>
+      </p:bgPr>
+    </p:bg>
+    <p:spTree>
+      <p:nvGrpSpPr>
+        <p:cNvPr id="1" name=""/>
+        <p:cNvGrpSpPr/>
+        <p:nvPr/>
+      </p:nvGrpSpPr>
+      <p:grpSpPr/>
+      <p:sp>
+        <p:nvSpPr>
+          <p:cNvPr id="2" name="Rectangle 1"/>
           <p:cNvSpPr/>
           <p:nvPr/>
         </p:nvSpPr>
         <p:spPr>
           <a:xfrm>
-            <a:off x="1097280" y="2487168"/>
-            <a:ext cx="9966960" cy="1051560"/>
-          </a:xfrm>
-          <a:prstGeom prst="roundRect">
+            <a:off x="0" y="0"/>
+            <a:ext cx="12191695" cy="1005840"/>
+          </a:xfrm>
+          <a:prstGeom prst="rect">
             <a:avLst/>
           </a:prstGeom>
           <a:solidFill>
-            <a:srgbClr val="E2EFDA"/>
+            <a:srgbClr val="FFFFFF"/>
           </a:solidFill>
-          <a:ln w="12700">
+          <a:ln w="25400">
             <a:solidFill>
               <a:srgbClr val="1F4E79"/>
             </a:solidFill>
@@ -4782,164 +6655,213 @@
           </a:fontRef>
         </p:style>
         <p:txBody>
-          <a:bodyPr rtlCol="0" anchor="ctr" wrap="square"/>
-          <a:lstStyle/>
-          <a:p>
-            <a:pPr algn="ctr" rtl="1"/>
-            <a:r>
-              <a:rPr sz="1800" b="1">
+          <a:bodyPr rtlCol="0" anchor="ctr"/>
+          <a:lstStyle/>
+          <a:p>
+            <a:pPr algn="ctr"/>
+          </a:p>
+        </p:txBody>
+      </p:sp>
+      <p:sp>
+        <p:nvSpPr>
+          <p:cNvPr id="3" name="TextBox 2"/>
+          <p:cNvSpPr txBox="1"/>
+          <p:nvPr/>
+        </p:nvSpPr>
+        <p:spPr>
+          <a:xfrm>
+            <a:off x="640080" y="182880"/>
+            <a:ext cx="10972800" cy="640080"/>
+          </a:xfrm>
+          <a:prstGeom prst="rect">
+            <a:avLst/>
+          </a:prstGeom>
+          <a:noFill/>
+        </p:spPr>
+        <p:txBody>
+          <a:bodyPr wrap="square">
+            <a:spAutoFit/>
+          </a:bodyPr>
+          <a:lstStyle/>
+          <a:p>
+            <a:pPr algn="r" rtl="1"/>
+            <a:r>
+              <a:rPr sz="3200" b="1">
+                <a:solidFill>
+                  <a:srgbClr val="1F3B5C"/>
+                </a:solidFill>
+                <a:latin typeface="Arial"/>
+              </a:rPr>
+              <a:t>للاستزادة / Further Reading</a:t>
+            </a:r>
+          </a:p>
+        </p:txBody>
+      </p:sp>
+      <p:sp>
+        <p:nvSpPr>
+          <p:cNvPr id="4" name="TextBox 3"/>
+          <p:cNvSpPr txBox="1"/>
+          <p:nvPr/>
+        </p:nvSpPr>
+        <p:spPr>
+          <a:xfrm>
+            <a:off x="640080" y="1280160"/>
+            <a:ext cx="10972800" cy="5212080"/>
+          </a:xfrm>
+          <a:prstGeom prst="rect">
+            <a:avLst/>
+          </a:prstGeom>
+          <a:noFill/>
+        </p:spPr>
+        <p:txBody>
+          <a:bodyPr wrap="square">
+            <a:spAutoFit/>
+          </a:bodyPr>
+          <a:lstStyle/>
+          <a:p>
+            <a:pPr algn="r" rtl="1">
+              <a:spcBef>
+                <a:spcPts val="200"/>
+              </a:spcBef>
+              <a:spcAft>
+                <a:spcPts val="1000"/>
+              </a:spcAft>
+            </a:pPr>
+            <a:r>
+              <a:rPr sz="2000">
                 <a:solidFill>
                   <a:srgbClr val="333333"/>
                 </a:solidFill>
+                <a:latin typeface="Arial"/>
+              </a:rPr>
+              <a:t>• توثيق DataHub وApache Atlas.</a:t>
+            </a:r>
+          </a:p>
+          <a:p>
+            <a:pPr algn="l" rtl="0">
+              <a:spcBef>
+                <a:spcPts val="200"/>
+              </a:spcBef>
+              <a:spcAft>
+                <a:spcPts val="1000"/>
+              </a:spcAft>
+            </a:pPr>
+            <a:r>
+              <a:rPr sz="1700">
+                <a:solidFill>
+                  <a:srgbClr val="666666"/>
+                </a:solidFill>
                 <a:latin typeface="Calibri"/>
               </a:rPr>
-              <a:t>ب. الأتمتة والامتثال</a:t>
-            </a:r>
-          </a:p>
-          <a:p>
-            <a:pPr algn="ctr" rtl="0"/>
-            <a:r>
-              <a:rPr sz="1300">
+              <a:t>• DataHub and Apache Atlas docs.</a:t>
+            </a:r>
+          </a:p>
+          <a:p>
+            <a:pPr algn="r" rtl="1">
+              <a:spcBef>
+                <a:spcPts val="200"/>
+              </a:spcBef>
+              <a:spcAft>
+                <a:spcPts val="1000"/>
+              </a:spcAft>
+            </a:pPr>
+            <a:r>
+              <a:rPr sz="2000">
+                <a:solidFill>
+                  <a:srgbClr val="333333"/>
+                </a:solidFill>
+                <a:latin typeface="Arial"/>
+              </a:rPr>
+              <a:t>• المعمارية المرجعية للذكاء التوليدي — McKinsey.</a:t>
+            </a:r>
+          </a:p>
+          <a:p>
+            <a:pPr algn="l" rtl="0">
+              <a:spcBef>
+                <a:spcPts val="200"/>
+              </a:spcBef>
+              <a:spcAft>
+                <a:spcPts val="1000"/>
+              </a:spcAft>
+            </a:pPr>
+            <a:r>
+              <a:rPr sz="1700">
                 <a:solidFill>
                   <a:srgbClr val="666666"/>
                 </a:solidFill>
                 <a:latin typeface="Calibri"/>
               </a:rPr>
-              <a:t>B. Automation &amp; Compliance — CI/CD gates</a:t>
-            </a:r>
-          </a:p>
-        </p:txBody>
-      </p:sp>
-      <p:sp>
-        <p:nvSpPr>
-          <p:cNvPr id="5" name="Rounded Rectangle 4"/>
-          <p:cNvSpPr/>
-          <p:nvPr/>
-        </p:nvSpPr>
-        <p:spPr>
-          <a:xfrm>
-            <a:off x="1097280" y="3694176"/>
-            <a:ext cx="9966960" cy="1051560"/>
-          </a:xfrm>
-          <a:prstGeom prst="roundRect">
-            <a:avLst/>
-          </a:prstGeom>
-          <a:solidFill>
-            <a:srgbClr val="FDE9D9"/>
-          </a:solidFill>
-          <a:ln w="12700">
-            <a:solidFill>
-              <a:srgbClr val="1F4E79"/>
-            </a:solidFill>
-          </a:ln>
-          <a:effectLst/>
-        </p:spPr>
-        <p:style>
-          <a:lnRef idx="1">
-            <a:schemeClr val="accent1"/>
-          </a:lnRef>
-          <a:fillRef idx="3">
-            <a:schemeClr val="accent1"/>
-          </a:fillRef>
-          <a:effectRef idx="2">
-            <a:schemeClr val="accent1"/>
-          </a:effectRef>
-          <a:fontRef idx="minor">
-            <a:schemeClr val="lt1"/>
-          </a:fontRef>
-        </p:style>
-        <p:txBody>
-          <a:bodyPr rtlCol="0" anchor="ctr" wrap="square"/>
-          <a:lstStyle/>
-          <a:p>
-            <a:pPr algn="ctr" rtl="1"/>
-            <a:r>
-              <a:rPr sz="1800" b="1">
-                <a:solidFill>
-                  <a:srgbClr val="333333"/>
+              <a:t>• GenAI reference architecture — McKinsey.</a:t>
+            </a:r>
+          </a:p>
+        </p:txBody>
+      </p:sp>
+      <p:sp>
+        <p:nvSpPr>
+          <p:cNvPr id="5" name="TextBox 4"/>
+          <p:cNvSpPr txBox="1"/>
+          <p:nvPr/>
+        </p:nvSpPr>
+        <p:spPr>
+          <a:xfrm>
+            <a:off x="640080" y="6400800"/>
+            <a:ext cx="8686800" cy="320040"/>
+          </a:xfrm>
+          <a:prstGeom prst="rect">
+            <a:avLst/>
+          </a:prstGeom>
+          <a:noFill/>
+        </p:spPr>
+        <p:txBody>
+          <a:bodyPr wrap="square">
+            <a:spAutoFit/>
+          </a:bodyPr>
+          <a:lstStyle/>
+          <a:p>
+            <a:pPr algn="r" rtl="1"/>
+            <a:r>
+              <a:rPr sz="1000" b="0">
+                <a:solidFill>
+                  <a:srgbClr val="666666"/>
+                </a:solidFill>
+                <a:latin typeface="Arial"/>
+              </a:rPr>
+              <a:t>Module 02 — Data &amp; AI Engineering Track  |  الوحدة الثانية</a:t>
+            </a:r>
+          </a:p>
+        </p:txBody>
+      </p:sp>
+      <p:sp>
+        <p:nvSpPr>
+          <p:cNvPr id="6" name="TextBox 5"/>
+          <p:cNvSpPr txBox="1"/>
+          <p:nvPr/>
+        </p:nvSpPr>
+        <p:spPr>
+          <a:xfrm>
+            <a:off x="9601200" y="6400800"/>
+            <a:ext cx="1920240" cy="320040"/>
+          </a:xfrm>
+          <a:prstGeom prst="rect">
+            <a:avLst/>
+          </a:prstGeom>
+          <a:noFill/>
+        </p:spPr>
+        <p:txBody>
+          <a:bodyPr wrap="square">
+            <a:spAutoFit/>
+          </a:bodyPr>
+          <a:lstStyle/>
+          <a:p>
+            <a:pPr algn="l" rtl="0"/>
+            <a:r>
+              <a:rPr sz="1000" b="0">
+                <a:solidFill>
+                  <a:srgbClr val="666666"/>
                 </a:solidFill>
                 <a:latin typeface="Calibri"/>
               </a:rPr>
-              <a:t>ج. الخدمات المشتركة</a:t>
-            </a:r>
-          </a:p>
-          <a:p>
-            <a:pPr algn="ctr" rtl="0"/>
-            <a:r>
-              <a:rPr sz="1300">
-                <a:solidFill>
-                  <a:srgbClr val="666666"/>
-                </a:solidFill>
-                <a:latin typeface="Calibri"/>
-              </a:rPr>
-              <a:t>C. Shared Services — Gateway, Prompts, Audit, Guardrails</a:t>
-            </a:r>
-          </a:p>
-        </p:txBody>
-      </p:sp>
-      <p:sp>
-        <p:nvSpPr>
-          <p:cNvPr id="6" name="Rounded Rectangle 5"/>
-          <p:cNvSpPr/>
-          <p:nvPr/>
-        </p:nvSpPr>
-        <p:spPr>
-          <a:xfrm>
-            <a:off x="1097280" y="4901184"/>
-            <a:ext cx="9966960" cy="1051560"/>
-          </a:xfrm>
-          <a:prstGeom prst="roundRect">
-            <a:avLst/>
-          </a:prstGeom>
-          <a:solidFill>
-            <a:srgbClr val="EDEDED"/>
-          </a:solidFill>
-          <a:ln w="12700">
-            <a:solidFill>
-              <a:srgbClr val="1F4E79"/>
-            </a:solidFill>
-          </a:ln>
-          <a:effectLst/>
-        </p:spPr>
-        <p:style>
-          <a:lnRef idx="1">
-            <a:schemeClr val="accent1"/>
-          </a:lnRef>
-          <a:fillRef idx="3">
-            <a:schemeClr val="accent1"/>
-          </a:fillRef>
-          <a:effectRef idx="2">
-            <a:schemeClr val="accent1"/>
-          </a:effectRef>
-          <a:fontRef idx="minor">
-            <a:schemeClr val="lt1"/>
-          </a:fontRef>
-        </p:style>
-        <p:txBody>
-          <a:bodyPr rtlCol="0" anchor="ctr" wrap="square"/>
-          <a:lstStyle/>
-          <a:p>
-            <a:pPr algn="ctr" rtl="1"/>
-            <a:r>
-              <a:rPr sz="1800" b="1">
-                <a:solidFill>
-                  <a:srgbClr val="333333"/>
-                </a:solidFill>
-                <a:latin typeface="Calibri"/>
-              </a:rPr>
-              <a:t>د. الحوكمة والمراقبة</a:t>
-            </a:r>
-          </a:p>
-          <a:p>
-            <a:pPr algn="ctr" rtl="0"/>
-            <a:r>
-              <a:rPr sz="1300">
-                <a:solidFill>
-                  <a:srgbClr val="666666"/>
-                </a:solidFill>
-                <a:latin typeface="Calibri"/>
-              </a:rPr>
-              <a:t>D. Governance &amp; Monitoring — Responsible AI, FinOps</a:t>
+              <a:t>V11  •  8/11</a:t>
             </a:r>
           </a:p>
         </p:txBody>
@@ -4952,8 +6874,8 @@
         </p:nvSpPr>
         <p:spPr>
           <a:xfrm>
-            <a:off x="640080" y="6126480"/>
-            <a:ext cx="10972800" cy="548640"/>
+            <a:off x="640080" y="6400800"/>
+            <a:ext cx="8686800" cy="320040"/>
           </a:xfrm>
           <a:prstGeom prst="rect">
             <a:avLst/>
@@ -4968,19 +6890,118 @@
           <a:p>
             <a:pPr algn="r" rtl="1"/>
             <a:r>
-              <a:rPr sz="1400">
+              <a:rPr sz="1000" b="0">
                 <a:solidFill>
                   <a:srgbClr val="666666"/>
                 </a:solidFill>
+                <a:latin typeface="Arial"/>
+              </a:rPr>
+              <a:t>Module 02 — Data &amp; AI Engineering Track  |  الوحدة الثانية</a:t>
+            </a:r>
+          </a:p>
+        </p:txBody>
+      </p:sp>
+      <p:sp>
+        <p:nvSpPr>
+          <p:cNvPr id="8" name="TextBox 7"/>
+          <p:cNvSpPr txBox="1"/>
+          <p:nvPr/>
+        </p:nvSpPr>
+        <p:spPr>
+          <a:xfrm>
+            <a:off x="9601200" y="6400800"/>
+            <a:ext cx="1920240" cy="320040"/>
+          </a:xfrm>
+          <a:prstGeom prst="rect">
+            <a:avLst/>
+          </a:prstGeom>
+          <a:noFill/>
+        </p:spPr>
+        <p:txBody>
+          <a:bodyPr wrap="square">
+            <a:spAutoFit/>
+          </a:bodyPr>
+          <a:lstStyle/>
+          <a:p>
+            <a:pPr algn="l" rtl="0"/>
+            <a:r>
+              <a:rPr sz="1000" b="0">
+                <a:solidFill>
+                  <a:srgbClr val="666666"/>
+                </a:solidFill>
                 <a:latin typeface="Calibri"/>
               </a:rPr>
-              <a:t>النمط المرجعي المؤسسي (McKinsey) — نافذة موحدة فوق خدمات مشتركة محكومة.</a:t>
-            </a:r>
-          </a:p>
-          <a:p>
-            <a:pPr algn="r" rtl="0"/>
-            <a:r>
-              <a:t>Enterprise reference pattern (McKinsey) — a unified pane over governed shared services.</a:t>
+              <a:t>11_  •  9/9</a:t>
+            </a:r>
+          </a:p>
+        </p:txBody>
+      </p:sp>
+      <p:sp>
+        <p:nvSpPr>
+          <p:cNvPr id="9" name="TextBox 8"/>
+          <p:cNvSpPr txBox="1"/>
+          <p:nvPr/>
+        </p:nvSpPr>
+        <p:spPr>
+          <a:xfrm>
+            <a:off x="640080" y="6400800"/>
+            <a:ext cx="8686800" cy="320040"/>
+          </a:xfrm>
+          <a:prstGeom prst="rect">
+            <a:avLst/>
+          </a:prstGeom>
+          <a:noFill/>
+        </p:spPr>
+        <p:txBody>
+          <a:bodyPr wrap="square">
+            <a:spAutoFit/>
+          </a:bodyPr>
+          <a:lstStyle/>
+          <a:p>
+            <a:pPr algn="r" rtl="1"/>
+            <a:r>
+              <a:rPr sz="1000" b="0">
+                <a:solidFill>
+                  <a:srgbClr val="666666"/>
+                </a:solidFill>
+                <a:latin typeface="Arial"/>
+              </a:rPr>
+              <a:t>Module 02 — Data &amp; AI Engineering Track  |  الوحدة الثانية</a:t>
+            </a:r>
+          </a:p>
+        </p:txBody>
+      </p:sp>
+      <p:sp>
+        <p:nvSpPr>
+          <p:cNvPr id="10" name="TextBox 9"/>
+          <p:cNvSpPr txBox="1"/>
+          <p:nvPr/>
+        </p:nvSpPr>
+        <p:spPr>
+          <a:xfrm>
+            <a:off x="9601200" y="6400800"/>
+            <a:ext cx="1920240" cy="320040"/>
+          </a:xfrm>
+          <a:prstGeom prst="rect">
+            <a:avLst/>
+          </a:prstGeom>
+          <a:noFill/>
+        </p:spPr>
+        <p:txBody>
+          <a:bodyPr wrap="square">
+            <a:spAutoFit/>
+          </a:bodyPr>
+          <a:lstStyle/>
+          <a:p>
+            <a:pPr algn="l" rtl="0"/>
+            <a:r>
+              <a:rPr sz="1000" b="0">
+                <a:solidFill>
+                  <a:srgbClr val="666666"/>
+                </a:solidFill>
+                <a:latin typeface="Calibri"/>
+              </a:rPr>
+              <a:t>11_  •  9/9</a:t>
             </a:r>
           </a:p>
         </p:txBody>

--- a/output/Module02_V11_Updated.pptx
+++ b/output/Module02_V11_Updated.pptx
@@ -3126,13 +3126,15 @@
           </a:bodyPr>
           <a:lstStyle/>
           <a:p>
-            <a:pPr algn="l" rtl="0"/>
+            <a:pPr algn="r" rtl="0"/>
             <a:r>
               <a:rPr sz="2800" b="1">
                 <a:solidFill>
                   <a:srgbClr val="1F4E79"/>
                 </a:solidFill>
                 <a:latin typeface="Calibri"/>
+                <a:cs typeface="Arial"/>
+                <a:ea typeface="Calibri"/>
               </a:rPr>
               <a:t>Module 02  |  V11</a:t>
             </a:r>
@@ -3168,6 +3170,8 @@
                   <a:srgbClr val="1F3B5C"/>
                 </a:solidFill>
                 <a:latin typeface="Arial"/>
+                <a:cs typeface="Arial"/>
+                <a:ea typeface="Calibri"/>
               </a:rPr>
               <a:t>حوكمة البيانات وسلسلة العهدة والفهرسة</a:t>
             </a:r>
@@ -3196,13 +3200,15 @@
           </a:bodyPr>
           <a:lstStyle/>
           <a:p>
-            <a:pPr algn="l" rtl="0"/>
+            <a:pPr algn="r" rtl="0"/>
             <a:r>
               <a:rPr sz="3000" b="0">
                 <a:solidFill>
                   <a:srgbClr val="333333"/>
                 </a:solidFill>
                 <a:latin typeface="Calibri"/>
+                <a:cs typeface="Arial"/>
+                <a:ea typeface="Calibri"/>
               </a:rPr>
               <a:t>Data Governance, Lineage &amp; Cataloging</a:t>
             </a:r>
@@ -3238,6 +3244,8 @@
                   <a:srgbClr val="666666"/>
                 </a:solidFill>
                 <a:latin typeface="Arial"/>
+                <a:cs typeface="Arial"/>
+                <a:ea typeface="Calibri"/>
               </a:rPr>
               <a:t>Module 02 — Data &amp; AI Engineering Track  |  الوحدة الثانية</a:t>
             </a:r>
@@ -3266,13 +3274,15 @@
           </a:bodyPr>
           <a:lstStyle/>
           <a:p>
-            <a:pPr algn="l" rtl="0"/>
+            <a:pPr algn="r" rtl="0"/>
             <a:r>
               <a:rPr sz="1400" b="0">
                 <a:solidFill>
                   <a:srgbClr val="666666"/>
                 </a:solidFill>
                 <a:latin typeface="Calibri"/>
+                <a:cs typeface="Arial"/>
+                <a:ea typeface="Calibri"/>
               </a:rPr>
               <a:t>Light theme  |  Bilingual AR/EN  |  Ready to present</a:t>
             </a:r>
@@ -3308,6 +3318,8 @@
                   <a:srgbClr val="666666"/>
                 </a:solidFill>
                 <a:latin typeface="Arial"/>
+                <a:cs typeface="Arial"/>
+                <a:ea typeface="Calibri"/>
               </a:rPr>
               <a:t>Module 02 — Data &amp; AI Engineering Track  |  الوحدة الثانية</a:t>
             </a:r>
@@ -3343,6 +3355,8 @@
                   <a:srgbClr val="666666"/>
                 </a:solidFill>
                 <a:latin typeface="Calibri"/>
+                <a:cs typeface="Arial"/>
+                <a:ea typeface="Calibri"/>
               </a:rPr>
               <a:t>V11  •  1/11</a:t>
             </a:r>
@@ -3378,6 +3392,8 @@
                   <a:srgbClr val="666666"/>
                 </a:solidFill>
                 <a:latin typeface="Arial"/>
+                <a:cs typeface="Arial"/>
+                <a:ea typeface="Calibri"/>
               </a:rPr>
               <a:t>Module 02 — Data &amp; AI Engineering Track  |  الوحدة الثانية</a:t>
             </a:r>
@@ -3413,6 +3429,8 @@
                   <a:srgbClr val="666666"/>
                 </a:solidFill>
                 <a:latin typeface="Calibri"/>
+                <a:cs typeface="Arial"/>
+                <a:ea typeface="Calibri"/>
               </a:rPr>
               <a:t>11_  •  1/9</a:t>
             </a:r>
@@ -3448,6 +3466,8 @@
                   <a:srgbClr val="666666"/>
                 </a:solidFill>
                 <a:latin typeface="Arial"/>
+                <a:cs typeface="Arial"/>
+                <a:ea typeface="Calibri"/>
               </a:rPr>
               <a:t>Module 02 — Data &amp; AI Engineering Track  |  الوحدة الثانية</a:t>
             </a:r>
@@ -3483,6 +3503,8 @@
                   <a:srgbClr val="666666"/>
                 </a:solidFill>
                 <a:latin typeface="Calibri"/>
+                <a:cs typeface="Arial"/>
+                <a:ea typeface="Calibri"/>
               </a:rPr>
               <a:t>11_  •  1/9</a:t>
             </a:r>
@@ -3590,6 +3612,8 @@
                   <a:srgbClr val="1F3B5C"/>
                 </a:solidFill>
                 <a:latin typeface="Arial"/>
+                <a:cs typeface="Arial"/>
+                <a:ea typeface="Calibri"/>
               </a:rPr>
               <a:t>أجندة العرض / Agenda</a:t>
             </a:r>
@@ -3632,12 +3656,14 @@
                   <a:srgbClr val="333333"/>
                 </a:solidFill>
                 <a:latin typeface="Arial"/>
+                <a:cs typeface="Arial"/>
+                <a:ea typeface="Calibri"/>
               </a:rPr>
               <a:t>• V11 — حوكمة البيانات وسلسلة العهدة والفهرسة</a:t>
             </a:r>
           </a:p>
           <a:p>
-            <a:pPr algn="l" rtl="0">
+            <a:pPr algn="r" rtl="0">
               <a:spcBef>
                 <a:spcPts val="200"/>
               </a:spcBef>
@@ -3651,6 +3677,8 @@
                   <a:srgbClr val="666666"/>
                 </a:solidFill>
                 <a:latin typeface="Calibri"/>
+                <a:cs typeface="Arial"/>
+                <a:ea typeface="Calibri"/>
               </a:rPr>
               <a:t>• V11 — Data Governance, Lineage &amp; Cataloging</a:t>
             </a:r>
@@ -3670,6 +3698,8 @@
                   <a:srgbClr val="333333"/>
                 </a:solidFill>
                 <a:latin typeface="Arial"/>
+                <a:cs typeface="Arial"/>
+                <a:ea typeface="Calibri"/>
               </a:rPr>
               <a:t>• الحوكمة والفهرسة / Governance &amp; Cataloging</a:t>
             </a:r>
@@ -3689,6 +3719,8 @@
                   <a:srgbClr val="333333"/>
                 </a:solidFill>
                 <a:latin typeface="Arial"/>
+                <a:cs typeface="Arial"/>
+                <a:ea typeface="Calibri"/>
               </a:rPr>
               <a:t>• المعمارية المرجعية للذكاء التوليدي (1/2) / GenAI Reference Architecture (1/2)</a:t>
             </a:r>
@@ -3708,6 +3740,8 @@
                   <a:srgbClr val="333333"/>
                 </a:solidFill>
                 <a:latin typeface="Arial"/>
+                <a:cs typeface="Arial"/>
+                <a:ea typeface="Calibri"/>
               </a:rPr>
               <a:t>• المعمارية المرجعية للذكاء التوليدي (2/2) / GenAI Reference Architecture (2/2)</a:t>
             </a:r>
@@ -3743,6 +3777,8 @@
                   <a:srgbClr val="666666"/>
                 </a:solidFill>
                 <a:latin typeface="Arial"/>
+                <a:cs typeface="Arial"/>
+                <a:ea typeface="Calibri"/>
               </a:rPr>
               <a:t>Module 02 — Data &amp; AI Engineering Track  |  الوحدة الثانية</a:t>
             </a:r>
@@ -3778,6 +3814,8 @@
                   <a:srgbClr val="666666"/>
                 </a:solidFill>
                 <a:latin typeface="Calibri"/>
+                <a:cs typeface="Arial"/>
+                <a:ea typeface="Calibri"/>
               </a:rPr>
               <a:t>V11  •  2/11</a:t>
             </a:r>
@@ -3813,6 +3851,8 @@
                   <a:srgbClr val="666666"/>
                 </a:solidFill>
                 <a:latin typeface="Arial"/>
+                <a:cs typeface="Arial"/>
+                <a:ea typeface="Calibri"/>
               </a:rPr>
               <a:t>Module 02 — Data &amp; AI Engineering Track  |  الوحدة الثانية</a:t>
             </a:r>
@@ -3848,6 +3888,8 @@
                   <a:srgbClr val="666666"/>
                 </a:solidFill>
                 <a:latin typeface="Calibri"/>
+                <a:cs typeface="Arial"/>
+                <a:ea typeface="Calibri"/>
               </a:rPr>
               <a:t>11_  •  2/9</a:t>
             </a:r>
@@ -3883,6 +3925,8 @@
                   <a:srgbClr val="666666"/>
                 </a:solidFill>
                 <a:latin typeface="Arial"/>
+                <a:cs typeface="Arial"/>
+                <a:ea typeface="Calibri"/>
               </a:rPr>
               <a:t>Module 02 — Data &amp; AI Engineering Track  |  الوحدة الثانية</a:t>
             </a:r>
@@ -3918,6 +3962,8 @@
                   <a:srgbClr val="666666"/>
                 </a:solidFill>
                 <a:latin typeface="Calibri"/>
+                <a:cs typeface="Arial"/>
+                <a:ea typeface="Calibri"/>
               </a:rPr>
               <a:t>11_  •  2/9</a:t>
             </a:r>
@@ -4025,6 +4071,8 @@
                   <a:srgbClr val="1F3B5C"/>
                 </a:solidFill>
                 <a:latin typeface="Arial"/>
+                <a:cs typeface="Arial"/>
+                <a:ea typeface="Calibri"/>
               </a:rPr>
               <a:t>الحوكمة والفهرسة / Governance &amp; Cataloging</a:t>
             </a:r>
@@ -4067,12 +4115,14 @@
                   <a:srgbClr val="333333"/>
                 </a:solidFill>
                 <a:latin typeface="Arial"/>
+                <a:cs typeface="Arial"/>
+                <a:ea typeface="Calibri"/>
               </a:rPr>
               <a:t>• سلسلة العهدة (Lineage) تتبع أصل البيانات وتحولاتها؛ الفهرسة تجعلها قابلة للاكتشاف.</a:t>
             </a:r>
           </a:p>
           <a:p>
-            <a:pPr algn="l" rtl="0">
+            <a:pPr algn="r" rtl="0">
               <a:spcBef>
                 <a:spcPts val="200"/>
               </a:spcBef>
@@ -4086,6 +4136,8 @@
                   <a:srgbClr val="666666"/>
                 </a:solidFill>
                 <a:latin typeface="Calibri"/>
+                <a:cs typeface="Arial"/>
+                <a:ea typeface="Calibri"/>
               </a:rPr>
               <a:t>• Lineage traces data origin and transformations; cataloging makes it discoverable.</a:t>
             </a:r>
@@ -4105,12 +4157,14 @@
                   <a:srgbClr val="333333"/>
                 </a:solidFill>
                 <a:latin typeface="Arial"/>
+                <a:cs typeface="Arial"/>
+                <a:ea typeface="Calibri"/>
               </a:rPr>
               <a:t>• أدوات: Apache Atlas، Collibra، DataHub.</a:t>
             </a:r>
           </a:p>
           <a:p>
-            <a:pPr algn="l" rtl="0">
+            <a:pPr algn="r" rtl="0">
               <a:spcBef>
                 <a:spcPts val="200"/>
               </a:spcBef>
@@ -4124,6 +4178,8 @@
                   <a:srgbClr val="666666"/>
                 </a:solidFill>
                 <a:latin typeface="Calibri"/>
+                <a:cs typeface="Arial"/>
+                <a:ea typeface="Calibri"/>
               </a:rPr>
               <a:t>• Tools: Apache Atlas, Collibra, DataHub.</a:t>
             </a:r>
@@ -4159,6 +4215,8 @@
                   <a:srgbClr val="666666"/>
                 </a:solidFill>
                 <a:latin typeface="Arial"/>
+                <a:cs typeface="Arial"/>
+                <a:ea typeface="Calibri"/>
               </a:rPr>
               <a:t>Module 02 — Data &amp; AI Engineering Track  |  الوحدة الثانية</a:t>
             </a:r>
@@ -4194,6 +4252,8 @@
                   <a:srgbClr val="666666"/>
                 </a:solidFill>
                 <a:latin typeface="Calibri"/>
+                <a:cs typeface="Arial"/>
+                <a:ea typeface="Calibri"/>
               </a:rPr>
               <a:t>V11  •  3/11</a:t>
             </a:r>
@@ -4229,6 +4289,8 @@
                   <a:srgbClr val="666666"/>
                 </a:solidFill>
                 <a:latin typeface="Arial"/>
+                <a:cs typeface="Arial"/>
+                <a:ea typeface="Calibri"/>
               </a:rPr>
               <a:t>Module 02 — Data &amp; AI Engineering Track  |  الوحدة الثانية</a:t>
             </a:r>
@@ -4264,6 +4326,8 @@
                   <a:srgbClr val="666666"/>
                 </a:solidFill>
                 <a:latin typeface="Calibri"/>
+                <a:cs typeface="Arial"/>
+                <a:ea typeface="Calibri"/>
               </a:rPr>
               <a:t>11_  •  3/9</a:t>
             </a:r>
@@ -4299,6 +4363,8 @@
                   <a:srgbClr val="666666"/>
                 </a:solidFill>
                 <a:latin typeface="Arial"/>
+                <a:cs typeface="Arial"/>
+                <a:ea typeface="Calibri"/>
               </a:rPr>
               <a:t>Module 02 — Data &amp; AI Engineering Track  |  الوحدة الثانية</a:t>
             </a:r>
@@ -4334,6 +4400,8 @@
                   <a:srgbClr val="666666"/>
                 </a:solidFill>
                 <a:latin typeface="Calibri"/>
+                <a:cs typeface="Arial"/>
+                <a:ea typeface="Calibri"/>
               </a:rPr>
               <a:t>11_  •  3/9</a:t>
             </a:r>
@@ -4441,6 +4509,8 @@
                   <a:srgbClr val="1F3B5C"/>
                 </a:solidFill>
                 <a:latin typeface="Arial"/>
+                <a:cs typeface="Arial"/>
+                <a:ea typeface="Calibri"/>
               </a:rPr>
               <a:t>المعمارية المرجعية للذكاء التوليدي (1/2) / GenAI Reference Architecture (1/2)</a:t>
             </a:r>
@@ -4483,8 +4553,52 @@
                   <a:srgbClr val="333333"/>
                 </a:solidFill>
                 <a:latin typeface="Arial"/>
+                <a:cs typeface="Arial"/>
+                <a:ea typeface="Calibri"/>
               </a:rPr>
               <a:t>• أ. بوابة منصة GenAI: نافذة موحدة بكتالوج حلول ومحفظة POC → MVP → PROD موثقة.</a:t>
+            </a:r>
+          </a:p>
+          <a:p>
+            <a:pPr algn="r" rtl="0">
+              <a:spcBef>
+                <a:spcPts val="200"/>
+              </a:spcBef>
+              <a:spcAft>
+                <a:spcPts val="1000"/>
+              </a:spcAft>
+            </a:pPr>
+            <a:r>
+              <a:rPr sz="1600">
+                <a:solidFill>
+                  <a:srgbClr val="666666"/>
+                </a:solidFill>
+                <a:latin typeface="Calibri"/>
+                <a:cs typeface="Arial"/>
+                <a:ea typeface="Calibri"/>
+              </a:rPr>
+              <a:t>• A. Portal: unified pane of glass with a solution catalog and documented POC → MVP → PROD portfolio.</a:t>
+            </a:r>
+          </a:p>
+          <a:p>
+            <a:pPr algn="r" rtl="1">
+              <a:spcBef>
+                <a:spcPts val="200"/>
+              </a:spcBef>
+              <a:spcAft>
+                <a:spcPts val="1000"/>
+              </a:spcAft>
+            </a:pPr>
+            <a:r>
+              <a:rPr sz="1900">
+                <a:solidFill>
+                  <a:srgbClr val="333333"/>
+                </a:solidFill>
+                <a:latin typeface="Arial"/>
+                <a:cs typeface="Arial"/>
+                <a:ea typeface="Calibri"/>
+              </a:rPr>
+              <a:t>• ب. الأتمتة والامتثال: خطوط CI/CD ببوابات تحكم آلية وموافقات مرحلية وفق DevSecOps.</a:t>
             </a:r>
           </a:p>
           <a:p>
@@ -4502,44 +4616,8 @@
                   <a:srgbClr val="666666"/>
                 </a:solidFill>
                 <a:latin typeface="Calibri"/>
-              </a:rPr>
-              <a:t>• A. Portal: unified pane of glass with a solution catalog and documented POC → MVP → PROD portfolio.</a:t>
-            </a:r>
-          </a:p>
-          <a:p>
-            <a:pPr algn="r" rtl="1">
-              <a:spcBef>
-                <a:spcPts val="200"/>
-              </a:spcBef>
-              <a:spcAft>
-                <a:spcPts val="1000"/>
-              </a:spcAft>
-            </a:pPr>
-            <a:r>
-              <a:rPr sz="1900">
-                <a:solidFill>
-                  <a:srgbClr val="333333"/>
-                </a:solidFill>
-                <a:latin typeface="Arial"/>
-              </a:rPr>
-              <a:t>• ب. الأتمتة والامتثال: خطوط CI/CD ببوابات تحكم آلية وموافقات مرحلية وفق DevSecOps.</a:t>
-            </a:r>
-          </a:p>
-          <a:p>
-            <a:pPr algn="l" rtl="0">
-              <a:spcBef>
-                <a:spcPts val="200"/>
-              </a:spcBef>
-              <a:spcAft>
-                <a:spcPts val="1000"/>
-              </a:spcAft>
-            </a:pPr>
-            <a:r>
-              <a:rPr sz="1600">
-                <a:solidFill>
-                  <a:srgbClr val="666666"/>
-                </a:solidFill>
-                <a:latin typeface="Calibri"/>
+                <a:cs typeface="Arial"/>
+                <a:ea typeface="Calibri"/>
               </a:rPr>
               <a:t>• B. Automation &amp; compliance: CI/CD with automated control gates and stage-gate approvals (DevSecOps).</a:t>
             </a:r>
@@ -4575,6 +4653,8 @@
                   <a:srgbClr val="666666"/>
                 </a:solidFill>
                 <a:latin typeface="Arial"/>
+                <a:cs typeface="Arial"/>
+                <a:ea typeface="Calibri"/>
               </a:rPr>
               <a:t>Module 02 — Data &amp; AI Engineering Track  |  الوحدة الثانية</a:t>
             </a:r>
@@ -4610,6 +4690,8 @@
                   <a:srgbClr val="666666"/>
                 </a:solidFill>
                 <a:latin typeface="Calibri"/>
+                <a:cs typeface="Arial"/>
+                <a:ea typeface="Calibri"/>
               </a:rPr>
               <a:t>V11  •  4/11</a:t>
             </a:r>
@@ -4645,6 +4727,8 @@
                   <a:srgbClr val="666666"/>
                 </a:solidFill>
                 <a:latin typeface="Arial"/>
+                <a:cs typeface="Arial"/>
+                <a:ea typeface="Calibri"/>
               </a:rPr>
               <a:t>Module 02 — Data &amp; AI Engineering Track  |  الوحدة الثانية</a:t>
             </a:r>
@@ -4680,6 +4764,8 @@
                   <a:srgbClr val="666666"/>
                 </a:solidFill>
                 <a:latin typeface="Calibri"/>
+                <a:cs typeface="Arial"/>
+                <a:ea typeface="Calibri"/>
               </a:rPr>
               <a:t>11_  •  4/9</a:t>
             </a:r>
@@ -4715,6 +4801,8 @@
                   <a:srgbClr val="666666"/>
                 </a:solidFill>
                 <a:latin typeface="Arial"/>
+                <a:cs typeface="Arial"/>
+                <a:ea typeface="Calibri"/>
               </a:rPr>
               <a:t>Module 02 — Data &amp; AI Engineering Track  |  الوحدة الثانية</a:t>
             </a:r>
@@ -4750,6 +4838,8 @@
                   <a:srgbClr val="666666"/>
                 </a:solidFill>
                 <a:latin typeface="Calibri"/>
+                <a:cs typeface="Arial"/>
+                <a:ea typeface="Calibri"/>
               </a:rPr>
               <a:t>11_  •  4/9</a:t>
             </a:r>
@@ -4857,6 +4947,8 @@
                   <a:srgbClr val="1F3B5C"/>
                 </a:solidFill>
                 <a:latin typeface="Arial"/>
+                <a:cs typeface="Arial"/>
+                <a:ea typeface="Calibri"/>
               </a:rPr>
               <a:t>المعمارية المرجعية للذكاء التوليدي (2/2) / GenAI Reference Architecture (2/2)</a:t>
             </a:r>
@@ -4899,12 +4991,14 @@
                   <a:srgbClr val="333333"/>
                 </a:solidFill>
                 <a:latin typeface="Arial"/>
+                <a:cs typeface="Arial"/>
+                <a:ea typeface="Calibri"/>
               </a:rPr>
               <a:t>• ج. الخدمات المشتركة: بوابة AI موحدة، مكتبة موجِّهات، خدمة التغذية الراجعة، قاعدة تدقيق LLM، حواجز حماية Guardrails.</a:t>
             </a:r>
           </a:p>
           <a:p>
-            <a:pPr algn="l" rtl="0">
+            <a:pPr algn="r" rtl="0">
               <a:spcBef>
                 <a:spcPts val="200"/>
               </a:spcBef>
@@ -4918,6 +5012,8 @@
                   <a:srgbClr val="666666"/>
                 </a:solidFill>
                 <a:latin typeface="Calibri"/>
+                <a:cs typeface="Arial"/>
+                <a:ea typeface="Calibri"/>
               </a:rPr>
               <a:t>• C. Shared services: unified AI gateway, prompt library, feedback service, LLM audit database, guardrails.</a:t>
             </a:r>
@@ -4937,12 +5033,14 @@
                   <a:srgbClr val="333333"/>
                 </a:solidFill>
                 <a:latin typeface="Arial"/>
+                <a:cs typeface="Arial"/>
+                <a:ea typeface="Calibri"/>
               </a:rPr>
               <a:t>• د. الحوكمة والمراقبة: أمن البيانات، الذكاء المسؤول (تدقيق التحيّز والهلوسة)، وإدارة التكاليف FinOps.</a:t>
             </a:r>
           </a:p>
           <a:p>
-            <a:pPr algn="l" rtl="0">
+            <a:pPr algn="r" rtl="0">
               <a:spcBef>
                 <a:spcPts val="200"/>
               </a:spcBef>
@@ -4956,6 +5054,8 @@
                   <a:srgbClr val="666666"/>
                 </a:solidFill>
                 <a:latin typeface="Calibri"/>
+                <a:cs typeface="Arial"/>
+                <a:ea typeface="Calibri"/>
               </a:rPr>
               <a:t>• D. Governance &amp; monitoring: data security, responsible AI (bias/hallucination audits), FinOps.</a:t>
             </a:r>
@@ -4991,6 +5091,8 @@
                   <a:srgbClr val="666666"/>
                 </a:solidFill>
                 <a:latin typeface="Arial"/>
+                <a:cs typeface="Arial"/>
+                <a:ea typeface="Calibri"/>
               </a:rPr>
               <a:t>Module 02 — Data &amp; AI Engineering Track  |  الوحدة الثانية</a:t>
             </a:r>
@@ -5026,6 +5128,8 @@
                   <a:srgbClr val="666666"/>
                 </a:solidFill>
                 <a:latin typeface="Calibri"/>
+                <a:cs typeface="Arial"/>
+                <a:ea typeface="Calibri"/>
               </a:rPr>
               <a:t>V11  •  5/11</a:t>
             </a:r>
@@ -5061,6 +5165,8 @@
                   <a:srgbClr val="666666"/>
                 </a:solidFill>
                 <a:latin typeface="Arial"/>
+                <a:cs typeface="Arial"/>
+                <a:ea typeface="Calibri"/>
               </a:rPr>
               <a:t>Module 02 — Data &amp; AI Engineering Track  |  الوحدة الثانية</a:t>
             </a:r>
@@ -5096,6 +5202,8 @@
                   <a:srgbClr val="666666"/>
                 </a:solidFill>
                 <a:latin typeface="Calibri"/>
+                <a:cs typeface="Arial"/>
+                <a:ea typeface="Calibri"/>
               </a:rPr>
               <a:t>11_  •  5/9</a:t>
             </a:r>
@@ -5131,6 +5239,8 @@
                   <a:srgbClr val="666666"/>
                 </a:solidFill>
                 <a:latin typeface="Arial"/>
+                <a:cs typeface="Arial"/>
+                <a:ea typeface="Calibri"/>
               </a:rPr>
               <a:t>Module 02 — Data &amp; AI Engineering Track  |  الوحدة الثانية</a:t>
             </a:r>
@@ -5166,6 +5276,8 @@
                   <a:srgbClr val="666666"/>
                 </a:solidFill>
                 <a:latin typeface="Calibri"/>
+                <a:cs typeface="Arial"/>
+                <a:ea typeface="Calibri"/>
               </a:rPr>
               <a:t>11_  •  5/9</a:t>
             </a:r>
@@ -5227,6 +5339,8 @@
                   <a:srgbClr val="1F3B5C"/>
                 </a:solidFill>
                 <a:latin typeface="Arial"/>
+                <a:cs typeface="Arial"/>
+                <a:ea typeface="Calibri"/>
               </a:rPr>
               <a:t>المعمارية المرجعية للذكاء التوليدي / GenAI Reference Architecture</a:t>
             </a:r>
@@ -5282,6 +5396,8 @@
                   <a:srgbClr val="333333"/>
                 </a:solidFill>
                 <a:latin typeface="Arial"/>
+                <a:cs typeface="Arial"/>
+                <a:ea typeface="Calibri"/>
               </a:rPr>
               <a:t>أ. بوابة منصة GenAI</a:t>
             </a:r>
@@ -5294,6 +5410,8 @@
                   <a:srgbClr val="666666"/>
                 </a:solidFill>
                 <a:latin typeface="Calibri"/>
+                <a:cs typeface="Arial"/>
+                <a:ea typeface="Calibri"/>
               </a:rPr>
               <a:t>A. Platform Portal — POC → MVP → PROD</a:t>
             </a:r>
@@ -5349,6 +5467,8 @@
                   <a:srgbClr val="333333"/>
                 </a:solidFill>
                 <a:latin typeface="Arial"/>
+                <a:cs typeface="Arial"/>
+                <a:ea typeface="Calibri"/>
               </a:rPr>
               <a:t>ب. الأتمتة والامتثال</a:t>
             </a:r>
@@ -5361,6 +5481,8 @@
                   <a:srgbClr val="666666"/>
                 </a:solidFill>
                 <a:latin typeface="Calibri"/>
+                <a:cs typeface="Arial"/>
+                <a:ea typeface="Calibri"/>
               </a:rPr>
               <a:t>B. Automation &amp; Compliance — CI/CD gates</a:t>
             </a:r>
@@ -5416,6 +5538,8 @@
                   <a:srgbClr val="333333"/>
                 </a:solidFill>
                 <a:latin typeface="Arial"/>
+                <a:cs typeface="Arial"/>
+                <a:ea typeface="Calibri"/>
               </a:rPr>
               <a:t>ج. الخدمات المشتركة</a:t>
             </a:r>
@@ -5428,6 +5552,8 @@
                   <a:srgbClr val="666666"/>
                 </a:solidFill>
                 <a:latin typeface="Calibri"/>
+                <a:cs typeface="Arial"/>
+                <a:ea typeface="Calibri"/>
               </a:rPr>
               <a:t>C. Shared Services — Gateway, Prompts, Audit, Guardrails</a:t>
             </a:r>
@@ -5483,6 +5609,8 @@
                   <a:srgbClr val="333333"/>
                 </a:solidFill>
                 <a:latin typeface="Arial"/>
+                <a:cs typeface="Arial"/>
+                <a:ea typeface="Calibri"/>
               </a:rPr>
               <a:t>د. الحوكمة والمراقبة</a:t>
             </a:r>
@@ -5495,6 +5623,8 @@
                   <a:srgbClr val="666666"/>
                 </a:solidFill>
                 <a:latin typeface="Calibri"/>
+                <a:cs typeface="Arial"/>
+                <a:ea typeface="Calibri"/>
               </a:rPr>
               <a:t>D. Governance &amp; Monitoring — Responsible AI, FinOps</a:t>
             </a:r>
@@ -5530,6 +5660,8 @@
                   <a:srgbClr val="666666"/>
                 </a:solidFill>
                 <a:latin typeface="Arial"/>
+                <a:cs typeface="Arial"/>
+                <a:ea typeface="Calibri"/>
               </a:rPr>
               <a:t>النمط المرجعي المؤسسي (McKinsey) — نافذة موحدة فوق خدمات مشتركة محكومة.</a:t>
             </a:r>
@@ -5537,6 +5669,11 @@
           <a:p>
             <a:pPr algn="r" rtl="0"/>
             <a:r>
+              <a:rPr>
+                <a:latin typeface="Calibri"/>
+                <a:cs typeface="Arial"/>
+                <a:ea typeface="Calibri"/>
+              </a:rPr>
               <a:t>Enterprise reference pattern (McKinsey) — a unified pane over governed shared services.</a:t>
             </a:r>
           </a:p>
@@ -5571,6 +5708,8 @@
                   <a:srgbClr val="666666"/>
                 </a:solidFill>
                 <a:latin typeface="Arial"/>
+                <a:cs typeface="Arial"/>
+                <a:ea typeface="Calibri"/>
               </a:rPr>
               <a:t>Module 02 — Data &amp; AI Engineering Track  |  الوحدة الثانية</a:t>
             </a:r>
@@ -5606,6 +5745,8 @@
                   <a:srgbClr val="666666"/>
                 </a:solidFill>
                 <a:latin typeface="Calibri"/>
+                <a:cs typeface="Arial"/>
+                <a:ea typeface="Calibri"/>
               </a:rPr>
               <a:t>11_  •  6/9</a:t>
             </a:r>
@@ -5641,6 +5782,8 @@
                   <a:srgbClr val="666666"/>
                 </a:solidFill>
                 <a:latin typeface="Arial"/>
+                <a:cs typeface="Arial"/>
+                <a:ea typeface="Calibri"/>
               </a:rPr>
               <a:t>Module 02 — Data &amp; AI Engineering Track  |  الوحدة الثانية</a:t>
             </a:r>
@@ -5676,6 +5819,8 @@
                   <a:srgbClr val="666666"/>
                 </a:solidFill>
                 <a:latin typeface="Calibri"/>
+                <a:cs typeface="Arial"/>
+                <a:ea typeface="Calibri"/>
               </a:rPr>
               <a:t>11_  •  6/9</a:t>
             </a:r>
@@ -5783,6 +5928,8 @@
                   <a:srgbClr val="1F3B5C"/>
                 </a:solidFill>
                 <a:latin typeface="Arial"/>
+                <a:cs typeface="Arial"/>
+                <a:ea typeface="Calibri"/>
               </a:rPr>
               <a:t>اختبار قصير / Quick Quiz</a:t>
             </a:r>
@@ -5825,12 +5972,14 @@
                   <a:srgbClr val="333333"/>
                 </a:solidFill>
                 <a:latin typeface="Arial"/>
+                <a:cs typeface="Arial"/>
+                <a:ea typeface="Calibri"/>
               </a:rPr>
               <a:t>• 1. ما وظيفة بوابة AI الموحدة (AI Gateway)؟</a:t>
             </a:r>
           </a:p>
           <a:p>
-            <a:pPr algn="l" rtl="0">
+            <a:pPr algn="r" rtl="0">
               <a:spcBef>
                 <a:spcPts val="200"/>
               </a:spcBef>
@@ -5844,6 +5993,8 @@
                   <a:srgbClr val="666666"/>
                 </a:solidFill>
                 <a:latin typeface="Calibri"/>
+                <a:cs typeface="Arial"/>
+                <a:ea typeface="Calibri"/>
               </a:rPr>
               <a:t>• What does a unified AI gateway do?</a:t>
             </a:r>
@@ -5863,12 +6014,14 @@
                   <a:srgbClr val="333333"/>
                 </a:solidFill>
                 <a:latin typeface="Arial"/>
+                <a:cs typeface="Arial"/>
+                <a:ea typeface="Calibri"/>
               </a:rPr>
               <a:t>• 2. لماذا نحتاج قاعدة تدقيق لنماذج LLM؟</a:t>
             </a:r>
           </a:p>
           <a:p>
-            <a:pPr algn="l" rtl="0">
+            <a:pPr algn="r" rtl="0">
               <a:spcBef>
                 <a:spcPts val="200"/>
               </a:spcBef>
@@ -5882,6 +6035,8 @@
                   <a:srgbClr val="666666"/>
                 </a:solidFill>
                 <a:latin typeface="Calibri"/>
+                <a:cs typeface="Arial"/>
+                <a:ea typeface="Calibri"/>
               </a:rPr>
               <a:t>• Why keep an LLM audit database?</a:t>
             </a:r>
@@ -5901,12 +6056,14 @@
                   <a:srgbClr val="333333"/>
                 </a:solidFill>
                 <a:latin typeface="Arial"/>
+                <a:cs typeface="Arial"/>
+                <a:ea typeface="Calibri"/>
               </a:rPr>
               <a:t>• 3. ما دور CI/CD في حوكمة GenAI؟</a:t>
             </a:r>
           </a:p>
           <a:p>
-            <a:pPr algn="l" rtl="0">
+            <a:pPr algn="r" rtl="0">
               <a:spcBef>
                 <a:spcPts val="200"/>
               </a:spcBef>
@@ -5920,6 +6077,8 @@
                   <a:srgbClr val="666666"/>
                 </a:solidFill>
                 <a:latin typeface="Calibri"/>
+                <a:cs typeface="Arial"/>
+                <a:ea typeface="Calibri"/>
               </a:rPr>
               <a:t>• What is CI/CD's role in GenAI governance?</a:t>
             </a:r>
@@ -5955,6 +6114,8 @@
                   <a:srgbClr val="666666"/>
                 </a:solidFill>
                 <a:latin typeface="Arial"/>
+                <a:cs typeface="Arial"/>
+                <a:ea typeface="Calibri"/>
               </a:rPr>
               <a:t>Module 02 — Data &amp; AI Engineering Track  |  الوحدة الثانية</a:t>
             </a:r>
@@ -5990,6 +6151,8 @@
                   <a:srgbClr val="666666"/>
                 </a:solidFill>
                 <a:latin typeface="Calibri"/>
+                <a:cs typeface="Arial"/>
+                <a:ea typeface="Calibri"/>
               </a:rPr>
               <a:t>V11  •  6/11</a:t>
             </a:r>
@@ -6025,6 +6188,8 @@
                   <a:srgbClr val="666666"/>
                 </a:solidFill>
                 <a:latin typeface="Arial"/>
+                <a:cs typeface="Arial"/>
+                <a:ea typeface="Calibri"/>
               </a:rPr>
               <a:t>Module 02 — Data &amp; AI Engineering Track  |  الوحدة الثانية</a:t>
             </a:r>
@@ -6060,6 +6225,8 @@
                   <a:srgbClr val="666666"/>
                 </a:solidFill>
                 <a:latin typeface="Calibri"/>
+                <a:cs typeface="Arial"/>
+                <a:ea typeface="Calibri"/>
               </a:rPr>
               <a:t>11_  •  7/9</a:t>
             </a:r>
@@ -6095,6 +6262,8 @@
                   <a:srgbClr val="666666"/>
                 </a:solidFill>
                 <a:latin typeface="Arial"/>
+                <a:cs typeface="Arial"/>
+                <a:ea typeface="Calibri"/>
               </a:rPr>
               <a:t>Module 02 — Data &amp; AI Engineering Track  |  الوحدة الثانية</a:t>
             </a:r>
@@ -6130,6 +6299,8 @@
                   <a:srgbClr val="666666"/>
                 </a:solidFill>
                 <a:latin typeface="Calibri"/>
+                <a:cs typeface="Arial"/>
+                <a:ea typeface="Calibri"/>
               </a:rPr>
               <a:t>11_  •  7/9</a:t>
             </a:r>
@@ -6237,6 +6408,8 @@
                   <a:srgbClr val="1F3B5C"/>
                 </a:solidFill>
                 <a:latin typeface="Arial"/>
+                <a:cs typeface="Arial"/>
+                <a:ea typeface="Calibri"/>
               </a:rPr>
               <a:t>إجابات الاختبار / Quiz Answers</a:t>
             </a:r>
@@ -6279,12 +6452,14 @@
                   <a:srgbClr val="333333"/>
                 </a:solidFill>
                 <a:latin typeface="Arial"/>
+                <a:cs typeface="Arial"/>
+                <a:ea typeface="Calibri"/>
               </a:rPr>
               <a:t>• 1. نقطة دخول موحدة تفرض المصادقة والحدود والتسجيل على كل الاستدعاءات.</a:t>
             </a:r>
           </a:p>
           <a:p>
-            <a:pPr algn="l" rtl="0">
+            <a:pPr algn="r" rtl="0">
               <a:spcBef>
                 <a:spcPts val="200"/>
               </a:spcBef>
@@ -6298,6 +6473,8 @@
                   <a:srgbClr val="666666"/>
                 </a:solidFill>
                 <a:latin typeface="Calibri"/>
+                <a:cs typeface="Arial"/>
+                <a:ea typeface="Calibri"/>
               </a:rPr>
               <a:t>• A single entry point enforcing auth, limits, and logging for all calls.</a:t>
             </a:r>
@@ -6317,12 +6494,14 @@
                   <a:srgbClr val="333333"/>
                 </a:solidFill>
                 <a:latin typeface="Arial"/>
+                <a:cs typeface="Arial"/>
+                <a:ea typeface="Calibri"/>
               </a:rPr>
               <a:t>• 2. لتتبع الموجِّهات والإجابات والامتثال والتحقيق في الحوادث.</a:t>
             </a:r>
           </a:p>
           <a:p>
-            <a:pPr algn="l" rtl="0">
+            <a:pPr algn="r" rtl="0">
               <a:spcBef>
                 <a:spcPts val="200"/>
               </a:spcBef>
@@ -6336,6 +6515,8 @@
                   <a:srgbClr val="666666"/>
                 </a:solidFill>
                 <a:latin typeface="Calibri"/>
+                <a:cs typeface="Arial"/>
+                <a:ea typeface="Calibri"/>
               </a:rPr>
               <a:t>• To trace prompts/answers for compliance and investigation.</a:t>
             </a:r>
@@ -6355,12 +6536,14 @@
                   <a:srgbClr val="333333"/>
                 </a:solidFill>
                 <a:latin typeface="Arial"/>
+                <a:cs typeface="Arial"/>
+                <a:ea typeface="Calibri"/>
               </a:rPr>
               <a:t>• 3. بوابات تحكم وموافقات مرحلية آلية قبل الإنتاج.</a:t>
             </a:r>
           </a:p>
           <a:p>
-            <a:pPr algn="l" rtl="0">
+            <a:pPr algn="r" rtl="0">
               <a:spcBef>
                 <a:spcPts val="200"/>
               </a:spcBef>
@@ -6374,6 +6557,8 @@
                   <a:srgbClr val="666666"/>
                 </a:solidFill>
                 <a:latin typeface="Calibri"/>
+                <a:cs typeface="Arial"/>
+                <a:ea typeface="Calibri"/>
               </a:rPr>
               <a:t>• Automated control gates and approvals before production.</a:t>
             </a:r>
@@ -6409,6 +6594,8 @@
                   <a:srgbClr val="666666"/>
                 </a:solidFill>
                 <a:latin typeface="Arial"/>
+                <a:cs typeface="Arial"/>
+                <a:ea typeface="Calibri"/>
               </a:rPr>
               <a:t>Module 02 — Data &amp; AI Engineering Track  |  الوحدة الثانية</a:t>
             </a:r>
@@ -6444,6 +6631,8 @@
                   <a:srgbClr val="666666"/>
                 </a:solidFill>
                 <a:latin typeface="Calibri"/>
+                <a:cs typeface="Arial"/>
+                <a:ea typeface="Calibri"/>
               </a:rPr>
               <a:t>V11  •  7/11</a:t>
             </a:r>
@@ -6479,6 +6668,8 @@
                   <a:srgbClr val="666666"/>
                 </a:solidFill>
                 <a:latin typeface="Arial"/>
+                <a:cs typeface="Arial"/>
+                <a:ea typeface="Calibri"/>
               </a:rPr>
               <a:t>Module 02 — Data &amp; AI Engineering Track  |  الوحدة الثانية</a:t>
             </a:r>
@@ -6514,6 +6705,8 @@
                   <a:srgbClr val="666666"/>
                 </a:solidFill>
                 <a:latin typeface="Calibri"/>
+                <a:cs typeface="Arial"/>
+                <a:ea typeface="Calibri"/>
               </a:rPr>
               <a:t>11_  •  8/9</a:t>
             </a:r>
@@ -6549,6 +6742,8 @@
                   <a:srgbClr val="666666"/>
                 </a:solidFill>
                 <a:latin typeface="Arial"/>
+                <a:cs typeface="Arial"/>
+                <a:ea typeface="Calibri"/>
               </a:rPr>
               <a:t>Module 02 — Data &amp; AI Engineering Track  |  الوحدة الثانية</a:t>
             </a:r>
@@ -6584,6 +6779,8 @@
                   <a:srgbClr val="666666"/>
                 </a:solidFill>
                 <a:latin typeface="Calibri"/>
+                <a:cs typeface="Arial"/>
+                <a:ea typeface="Calibri"/>
               </a:rPr>
               <a:t>11_  •  8/9</a:t>
             </a:r>
@@ -6691,6 +6888,8 @@
                   <a:srgbClr val="1F3B5C"/>
                 </a:solidFill>
                 <a:latin typeface="Arial"/>
+                <a:cs typeface="Arial"/>
+                <a:ea typeface="Calibri"/>
               </a:rPr>
               <a:t>للاستزادة / Further Reading</a:t>
             </a:r>
@@ -6733,12 +6932,14 @@
                   <a:srgbClr val="333333"/>
                 </a:solidFill>
                 <a:latin typeface="Arial"/>
+                <a:cs typeface="Arial"/>
+                <a:ea typeface="Calibri"/>
               </a:rPr>
               <a:t>• توثيق DataHub وApache Atlas.</a:t>
             </a:r>
           </a:p>
           <a:p>
-            <a:pPr algn="l" rtl="0">
+            <a:pPr algn="r" rtl="0">
               <a:spcBef>
                 <a:spcPts val="200"/>
               </a:spcBef>
@@ -6752,6 +6953,8 @@
                   <a:srgbClr val="666666"/>
                 </a:solidFill>
                 <a:latin typeface="Calibri"/>
+                <a:cs typeface="Arial"/>
+                <a:ea typeface="Calibri"/>
               </a:rPr>
               <a:t>• DataHub and Apache Atlas docs.</a:t>
             </a:r>
@@ -6771,12 +6974,14 @@
                   <a:srgbClr val="333333"/>
                 </a:solidFill>
                 <a:latin typeface="Arial"/>
+                <a:cs typeface="Arial"/>
+                <a:ea typeface="Calibri"/>
               </a:rPr>
               <a:t>• المعمارية المرجعية للذكاء التوليدي — McKinsey.</a:t>
             </a:r>
           </a:p>
           <a:p>
-            <a:pPr algn="l" rtl="0">
+            <a:pPr algn="r" rtl="0">
               <a:spcBef>
                 <a:spcPts val="200"/>
               </a:spcBef>
@@ -6790,6 +6995,8 @@
                   <a:srgbClr val="666666"/>
                 </a:solidFill>
                 <a:latin typeface="Calibri"/>
+                <a:cs typeface="Arial"/>
+                <a:ea typeface="Calibri"/>
               </a:rPr>
               <a:t>• GenAI reference architecture — McKinsey.</a:t>
             </a:r>
@@ -6825,6 +7032,8 @@
                   <a:srgbClr val="666666"/>
                 </a:solidFill>
                 <a:latin typeface="Arial"/>
+                <a:cs typeface="Arial"/>
+                <a:ea typeface="Calibri"/>
               </a:rPr>
               <a:t>Module 02 — Data &amp; AI Engineering Track  |  الوحدة الثانية</a:t>
             </a:r>
@@ -6860,6 +7069,8 @@
                   <a:srgbClr val="666666"/>
                 </a:solidFill>
                 <a:latin typeface="Calibri"/>
+                <a:cs typeface="Arial"/>
+                <a:ea typeface="Calibri"/>
               </a:rPr>
               <a:t>V11  •  8/11</a:t>
             </a:r>
@@ -6895,6 +7106,8 @@
                   <a:srgbClr val="666666"/>
                 </a:solidFill>
                 <a:latin typeface="Arial"/>
+                <a:cs typeface="Arial"/>
+                <a:ea typeface="Calibri"/>
               </a:rPr>
               <a:t>Module 02 — Data &amp; AI Engineering Track  |  الوحدة الثانية</a:t>
             </a:r>
@@ -6930,6 +7143,8 @@
                   <a:srgbClr val="666666"/>
                 </a:solidFill>
                 <a:latin typeface="Calibri"/>
+                <a:cs typeface="Arial"/>
+                <a:ea typeface="Calibri"/>
               </a:rPr>
               <a:t>11_  •  9/9</a:t>
             </a:r>
@@ -6965,6 +7180,8 @@
                   <a:srgbClr val="666666"/>
                 </a:solidFill>
                 <a:latin typeface="Arial"/>
+                <a:cs typeface="Arial"/>
+                <a:ea typeface="Calibri"/>
               </a:rPr>
               <a:t>Module 02 — Data &amp; AI Engineering Track  |  الوحدة الثانية</a:t>
             </a:r>
@@ -7000,6 +7217,8 @@
                   <a:srgbClr val="666666"/>
                 </a:solidFill>
                 <a:latin typeface="Calibri"/>
+                <a:cs typeface="Arial"/>
+                <a:ea typeface="Calibri"/>
               </a:rPr>
               <a:t>11_  •  9/9</a:t>
             </a:r>

--- a/output/Module02_V11_Updated.pptx
+++ b/output/Module02_V11_Updated.pptx
@@ -3126,15 +3126,13 @@
           </a:bodyPr>
           <a:lstStyle/>
           <a:p>
-            <a:pPr algn="r" rtl="0"/>
+            <a:pPr algn="l" rtl="0"/>
             <a:r>
               <a:rPr sz="2800" b="1">
                 <a:solidFill>
                   <a:srgbClr val="1F4E79"/>
                 </a:solidFill>
                 <a:latin typeface="Calibri"/>
-                <a:cs typeface="Arial"/>
-                <a:ea typeface="Calibri"/>
               </a:rPr>
               <a:t>Module 02  |  V11</a:t>
             </a:r>
@@ -3170,8 +3168,6 @@
                   <a:srgbClr val="1F3B5C"/>
                 </a:solidFill>
                 <a:latin typeface="Arial"/>
-                <a:cs typeface="Arial"/>
-                <a:ea typeface="Calibri"/>
               </a:rPr>
               <a:t>حوكمة البيانات وسلسلة العهدة والفهرسة</a:t>
             </a:r>
@@ -3200,15 +3196,13 @@
           </a:bodyPr>
           <a:lstStyle/>
           <a:p>
-            <a:pPr algn="r" rtl="0"/>
+            <a:pPr algn="l" rtl="0"/>
             <a:r>
               <a:rPr sz="3000" b="0">
                 <a:solidFill>
                   <a:srgbClr val="333333"/>
                 </a:solidFill>
                 <a:latin typeface="Calibri"/>
-                <a:cs typeface="Arial"/>
-                <a:ea typeface="Calibri"/>
               </a:rPr>
               <a:t>Data Governance, Lineage &amp; Cataloging</a:t>
             </a:r>
@@ -3217,14 +3211,14 @@
       </p:sp>
       <p:sp>
         <p:nvSpPr>
-          <p:cNvPr id="5" name="TextBox 4"/>
+          <p:cNvPr id="6" name="TextBox 5"/>
           <p:cNvSpPr txBox="1"/>
           <p:nvPr/>
         </p:nvSpPr>
         <p:spPr>
           <a:xfrm>
-            <a:off x="822960" y="4937760"/>
-            <a:ext cx="10515600" cy="548640"/>
+            <a:off x="822960" y="5486400"/>
+            <a:ext cx="10515600" cy="457200"/>
           </a:xfrm>
           <a:prstGeom prst="rect">
             <a:avLst/>
@@ -3237,31 +3231,29 @@
           </a:bodyPr>
           <a:lstStyle/>
           <a:p>
-            <a:pPr algn="r" rtl="1"/>
-            <a:r>
-              <a:rPr sz="1800" b="0">
+            <a:pPr algn="l" rtl="0"/>
+            <a:r>
+              <a:rPr sz="1400" b="0">
                 <a:solidFill>
                   <a:srgbClr val="666666"/>
                 </a:solidFill>
-                <a:latin typeface="Arial"/>
-                <a:cs typeface="Arial"/>
-                <a:ea typeface="Calibri"/>
-              </a:rPr>
-              <a:t>Module 02 — Data &amp; AI Engineering Track  |  الوحدة الثانية</a:t>
-            </a:r>
-          </a:p>
-        </p:txBody>
-      </p:sp>
-      <p:sp>
-        <p:nvSpPr>
-          <p:cNvPr id="6" name="TextBox 5"/>
+                <a:latin typeface="Calibri"/>
+              </a:rPr>
+              <a:t>Light theme  |  Bilingual AR/EN  |  Ready to present</a:t>
+            </a:r>
+          </a:p>
+        </p:txBody>
+      </p:sp>
+      <p:sp>
+        <p:nvSpPr>
+          <p:cNvPr id="7" name="TextBox 6"/>
           <p:cNvSpPr txBox="1"/>
           <p:nvPr/>
         </p:nvSpPr>
         <p:spPr>
           <a:xfrm>
-            <a:off x="822960" y="5486400"/>
-            <a:ext cx="10515600" cy="457200"/>
+            <a:off x="640080" y="6400800"/>
+            <a:ext cx="8686800" cy="320040"/>
           </a:xfrm>
           <a:prstGeom prst="rect">
             <a:avLst/>
@@ -3274,31 +3266,29 @@
           </a:bodyPr>
           <a:lstStyle/>
           <a:p>
-            <a:pPr algn="r" rtl="0"/>
-            <a:r>
-              <a:rPr sz="1400" b="0">
+            <a:pPr algn="r" rtl="1"/>
+            <a:r>
+              <a:rPr sz="1000" b="0">
                 <a:solidFill>
                   <a:srgbClr val="666666"/>
                 </a:solidFill>
-                <a:latin typeface="Calibri"/>
-                <a:cs typeface="Arial"/>
-                <a:ea typeface="Calibri"/>
-              </a:rPr>
-              <a:t>Light theme  |  Bilingual AR/EN  |  Ready to present</a:t>
-            </a:r>
-          </a:p>
-        </p:txBody>
-      </p:sp>
-      <p:sp>
-        <p:nvSpPr>
-          <p:cNvPr id="7" name="TextBox 6"/>
+                <a:latin typeface="Arial"/>
+              </a:rPr>
+              <a:t>Module 02 — Data &amp; AI Engineering Track  |  الوحدة الثانية</a:t>
+            </a:r>
+          </a:p>
+        </p:txBody>
+      </p:sp>
+      <p:sp>
+        <p:nvSpPr>
+          <p:cNvPr id="8" name="TextBox 7"/>
           <p:cNvSpPr txBox="1"/>
           <p:nvPr/>
         </p:nvSpPr>
         <p:spPr>
           <a:xfrm>
-            <a:off x="640080" y="6400800"/>
-            <a:ext cx="8686800" cy="320040"/>
+            <a:off x="9601200" y="6400800"/>
+            <a:ext cx="1920240" cy="320040"/>
           </a:xfrm>
           <a:prstGeom prst="rect">
             <a:avLst/>
@@ -3311,202 +3301,15 @@
           </a:bodyPr>
           <a:lstStyle/>
           <a:p>
-            <a:pPr algn="r" rtl="1"/>
+            <a:pPr algn="l" rtl="0"/>
             <a:r>
               <a:rPr sz="1000" b="0">
                 <a:solidFill>
                   <a:srgbClr val="666666"/>
                 </a:solidFill>
-                <a:latin typeface="Arial"/>
-                <a:cs typeface="Arial"/>
-                <a:ea typeface="Calibri"/>
-              </a:rPr>
-              <a:t>Module 02 — Data &amp; AI Engineering Track  |  الوحدة الثانية</a:t>
-            </a:r>
-          </a:p>
-        </p:txBody>
-      </p:sp>
-      <p:sp>
-        <p:nvSpPr>
-          <p:cNvPr id="8" name="TextBox 7"/>
-          <p:cNvSpPr txBox="1"/>
-          <p:nvPr/>
-        </p:nvSpPr>
-        <p:spPr>
-          <a:xfrm>
-            <a:off x="9601200" y="6400800"/>
-            <a:ext cx="1920240" cy="320040"/>
-          </a:xfrm>
-          <a:prstGeom prst="rect">
-            <a:avLst/>
-          </a:prstGeom>
-          <a:noFill/>
-        </p:spPr>
-        <p:txBody>
-          <a:bodyPr wrap="square">
-            <a:spAutoFit/>
-          </a:bodyPr>
-          <a:lstStyle/>
-          <a:p>
-            <a:pPr algn="l" rtl="0"/>
-            <a:r>
-              <a:rPr sz="1000" b="0">
-                <a:solidFill>
-                  <a:srgbClr val="666666"/>
-                </a:solidFill>
                 <a:latin typeface="Calibri"/>
-                <a:cs typeface="Arial"/>
-                <a:ea typeface="Calibri"/>
-              </a:rPr>
-              <a:t>V11  •  1/11</a:t>
-            </a:r>
-          </a:p>
-        </p:txBody>
-      </p:sp>
-      <p:sp>
-        <p:nvSpPr>
-          <p:cNvPr id="9" name="TextBox 8"/>
-          <p:cNvSpPr txBox="1"/>
-          <p:nvPr/>
-        </p:nvSpPr>
-        <p:spPr>
-          <a:xfrm>
-            <a:off x="640080" y="6400800"/>
-            <a:ext cx="8686800" cy="320040"/>
-          </a:xfrm>
-          <a:prstGeom prst="rect">
-            <a:avLst/>
-          </a:prstGeom>
-          <a:noFill/>
-        </p:spPr>
-        <p:txBody>
-          <a:bodyPr wrap="square">
-            <a:spAutoFit/>
-          </a:bodyPr>
-          <a:lstStyle/>
-          <a:p>
-            <a:pPr algn="r" rtl="1"/>
-            <a:r>
-              <a:rPr sz="1000" b="0">
-                <a:solidFill>
-                  <a:srgbClr val="666666"/>
-                </a:solidFill>
-                <a:latin typeface="Arial"/>
-                <a:cs typeface="Arial"/>
-                <a:ea typeface="Calibri"/>
-              </a:rPr>
-              <a:t>Module 02 — Data &amp; AI Engineering Track  |  الوحدة الثانية</a:t>
-            </a:r>
-          </a:p>
-        </p:txBody>
-      </p:sp>
-      <p:sp>
-        <p:nvSpPr>
-          <p:cNvPr id="10" name="TextBox 9"/>
-          <p:cNvSpPr txBox="1"/>
-          <p:nvPr/>
-        </p:nvSpPr>
-        <p:spPr>
-          <a:xfrm>
-            <a:off x="9601200" y="6400800"/>
-            <a:ext cx="1920240" cy="320040"/>
-          </a:xfrm>
-          <a:prstGeom prst="rect">
-            <a:avLst/>
-          </a:prstGeom>
-          <a:noFill/>
-        </p:spPr>
-        <p:txBody>
-          <a:bodyPr wrap="square">
-            <a:spAutoFit/>
-          </a:bodyPr>
-          <a:lstStyle/>
-          <a:p>
-            <a:pPr algn="l" rtl="0"/>
-            <a:r>
-              <a:rPr sz="1000" b="0">
-                <a:solidFill>
-                  <a:srgbClr val="666666"/>
-                </a:solidFill>
-                <a:latin typeface="Calibri"/>
-                <a:cs typeface="Arial"/>
-                <a:ea typeface="Calibri"/>
-              </a:rPr>
-              <a:t>11_  •  1/9</a:t>
-            </a:r>
-          </a:p>
-        </p:txBody>
-      </p:sp>
-      <p:sp>
-        <p:nvSpPr>
-          <p:cNvPr id="11" name="TextBox 10"/>
-          <p:cNvSpPr txBox="1"/>
-          <p:nvPr/>
-        </p:nvSpPr>
-        <p:spPr>
-          <a:xfrm>
-            <a:off x="640080" y="6400800"/>
-            <a:ext cx="8686800" cy="320040"/>
-          </a:xfrm>
-          <a:prstGeom prst="rect">
-            <a:avLst/>
-          </a:prstGeom>
-          <a:noFill/>
-        </p:spPr>
-        <p:txBody>
-          <a:bodyPr wrap="square">
-            <a:spAutoFit/>
-          </a:bodyPr>
-          <a:lstStyle/>
-          <a:p>
-            <a:pPr algn="r" rtl="1"/>
-            <a:r>
-              <a:rPr sz="1000" b="0">
-                <a:solidFill>
-                  <a:srgbClr val="666666"/>
-                </a:solidFill>
-                <a:latin typeface="Arial"/>
-                <a:cs typeface="Arial"/>
-                <a:ea typeface="Calibri"/>
-              </a:rPr>
-              <a:t>Module 02 — Data &amp; AI Engineering Track  |  الوحدة الثانية</a:t>
-            </a:r>
-          </a:p>
-        </p:txBody>
-      </p:sp>
-      <p:sp>
-        <p:nvSpPr>
-          <p:cNvPr id="12" name="TextBox 11"/>
-          <p:cNvSpPr txBox="1"/>
-          <p:nvPr/>
-        </p:nvSpPr>
-        <p:spPr>
-          <a:xfrm>
-            <a:off x="9601200" y="6400800"/>
-            <a:ext cx="1920240" cy="320040"/>
-          </a:xfrm>
-          <a:prstGeom prst="rect">
-            <a:avLst/>
-          </a:prstGeom>
-          <a:noFill/>
-        </p:spPr>
-        <p:txBody>
-          <a:bodyPr wrap="square">
-            <a:spAutoFit/>
-          </a:bodyPr>
-          <a:lstStyle/>
-          <a:p>
-            <a:pPr algn="l" rtl="0"/>
-            <a:r>
-              <a:rPr sz="1000" b="0">
-                <a:solidFill>
-                  <a:srgbClr val="666666"/>
-                </a:solidFill>
-                <a:latin typeface="Calibri"/>
-                <a:cs typeface="Arial"/>
-                <a:ea typeface="Calibri"/>
-              </a:rPr>
-              <a:t>11_  •  1/9</a:t>
+              </a:rPr>
+              <a:t>V11  •  1/9</a:t>
             </a:r>
           </a:p>
         </p:txBody>
@@ -3612,8 +3415,6 @@
                   <a:srgbClr val="1F3B5C"/>
                 </a:solidFill>
                 <a:latin typeface="Arial"/>
-                <a:cs typeface="Arial"/>
-                <a:ea typeface="Calibri"/>
               </a:rPr>
               <a:t>أجندة العرض / Agenda</a:t>
             </a:r>
@@ -3656,14 +3457,12 @@
                   <a:srgbClr val="333333"/>
                 </a:solidFill>
                 <a:latin typeface="Arial"/>
-                <a:cs typeface="Arial"/>
-                <a:ea typeface="Calibri"/>
               </a:rPr>
               <a:t>• V11 — حوكمة البيانات وسلسلة العهدة والفهرسة</a:t>
             </a:r>
           </a:p>
           <a:p>
-            <a:pPr algn="r" rtl="0">
+            <a:pPr algn="l" rtl="0">
               <a:spcBef>
                 <a:spcPts val="200"/>
               </a:spcBef>
@@ -3677,8 +3476,6 @@
                   <a:srgbClr val="666666"/>
                 </a:solidFill>
                 <a:latin typeface="Calibri"/>
-                <a:cs typeface="Arial"/>
-                <a:ea typeface="Calibri"/>
               </a:rPr>
               <a:t>• V11 — Data Governance, Lineage &amp; Cataloging</a:t>
             </a:r>
@@ -3698,8 +3495,6 @@
                   <a:srgbClr val="333333"/>
                 </a:solidFill>
                 <a:latin typeface="Arial"/>
-                <a:cs typeface="Arial"/>
-                <a:ea typeface="Calibri"/>
               </a:rPr>
               <a:t>• الحوكمة والفهرسة / Governance &amp; Cataloging</a:t>
             </a:r>
@@ -3719,8 +3514,6 @@
                   <a:srgbClr val="333333"/>
                 </a:solidFill>
                 <a:latin typeface="Arial"/>
-                <a:cs typeface="Arial"/>
-                <a:ea typeface="Calibri"/>
               </a:rPr>
               <a:t>• المعمارية المرجعية للذكاء التوليدي (1/2) / GenAI Reference Architecture (1/2)</a:t>
             </a:r>
@@ -3740,8 +3533,6 @@
                   <a:srgbClr val="333333"/>
                 </a:solidFill>
                 <a:latin typeface="Arial"/>
-                <a:cs typeface="Arial"/>
-                <a:ea typeface="Calibri"/>
               </a:rPr>
               <a:t>• المعمارية المرجعية للذكاء التوليدي (2/2) / GenAI Reference Architecture (2/2)</a:t>
             </a:r>
@@ -3777,8 +3568,6 @@
                   <a:srgbClr val="666666"/>
                 </a:solidFill>
                 <a:latin typeface="Arial"/>
-                <a:cs typeface="Arial"/>
-                <a:ea typeface="Calibri"/>
               </a:rPr>
               <a:t>Module 02 — Data &amp; AI Engineering Track  |  الوحدة الثانية</a:t>
             </a:r>
@@ -3814,158 +3603,8 @@
                   <a:srgbClr val="666666"/>
                 </a:solidFill>
                 <a:latin typeface="Calibri"/>
-                <a:cs typeface="Arial"/>
-                <a:ea typeface="Calibri"/>
-              </a:rPr>
-              <a:t>V11  •  2/11</a:t>
-            </a:r>
-          </a:p>
-        </p:txBody>
-      </p:sp>
-      <p:sp>
-        <p:nvSpPr>
-          <p:cNvPr id="7" name="TextBox 6"/>
-          <p:cNvSpPr txBox="1"/>
-          <p:nvPr/>
-        </p:nvSpPr>
-        <p:spPr>
-          <a:xfrm>
-            <a:off x="640080" y="6400800"/>
-            <a:ext cx="8686800" cy="320040"/>
-          </a:xfrm>
-          <a:prstGeom prst="rect">
-            <a:avLst/>
-          </a:prstGeom>
-          <a:noFill/>
-        </p:spPr>
-        <p:txBody>
-          <a:bodyPr wrap="square">
-            <a:spAutoFit/>
-          </a:bodyPr>
-          <a:lstStyle/>
-          <a:p>
-            <a:pPr algn="r" rtl="1"/>
-            <a:r>
-              <a:rPr sz="1000" b="0">
-                <a:solidFill>
-                  <a:srgbClr val="666666"/>
-                </a:solidFill>
-                <a:latin typeface="Arial"/>
-                <a:cs typeface="Arial"/>
-                <a:ea typeface="Calibri"/>
-              </a:rPr>
-              <a:t>Module 02 — Data &amp; AI Engineering Track  |  الوحدة الثانية</a:t>
-            </a:r>
-          </a:p>
-        </p:txBody>
-      </p:sp>
-      <p:sp>
-        <p:nvSpPr>
-          <p:cNvPr id="8" name="TextBox 7"/>
-          <p:cNvSpPr txBox="1"/>
-          <p:nvPr/>
-        </p:nvSpPr>
-        <p:spPr>
-          <a:xfrm>
-            <a:off x="9601200" y="6400800"/>
-            <a:ext cx="1920240" cy="320040"/>
-          </a:xfrm>
-          <a:prstGeom prst="rect">
-            <a:avLst/>
-          </a:prstGeom>
-          <a:noFill/>
-        </p:spPr>
-        <p:txBody>
-          <a:bodyPr wrap="square">
-            <a:spAutoFit/>
-          </a:bodyPr>
-          <a:lstStyle/>
-          <a:p>
-            <a:pPr algn="l" rtl="0"/>
-            <a:r>
-              <a:rPr sz="1000" b="0">
-                <a:solidFill>
-                  <a:srgbClr val="666666"/>
-                </a:solidFill>
-                <a:latin typeface="Calibri"/>
-                <a:cs typeface="Arial"/>
-                <a:ea typeface="Calibri"/>
-              </a:rPr>
-              <a:t>11_  •  2/9</a:t>
-            </a:r>
-          </a:p>
-        </p:txBody>
-      </p:sp>
-      <p:sp>
-        <p:nvSpPr>
-          <p:cNvPr id="9" name="TextBox 8"/>
-          <p:cNvSpPr txBox="1"/>
-          <p:nvPr/>
-        </p:nvSpPr>
-        <p:spPr>
-          <a:xfrm>
-            <a:off x="640080" y="6400800"/>
-            <a:ext cx="8686800" cy="320040"/>
-          </a:xfrm>
-          <a:prstGeom prst="rect">
-            <a:avLst/>
-          </a:prstGeom>
-          <a:noFill/>
-        </p:spPr>
-        <p:txBody>
-          <a:bodyPr wrap="square">
-            <a:spAutoFit/>
-          </a:bodyPr>
-          <a:lstStyle/>
-          <a:p>
-            <a:pPr algn="r" rtl="1"/>
-            <a:r>
-              <a:rPr sz="1000" b="0">
-                <a:solidFill>
-                  <a:srgbClr val="666666"/>
-                </a:solidFill>
-                <a:latin typeface="Arial"/>
-                <a:cs typeface="Arial"/>
-                <a:ea typeface="Calibri"/>
-              </a:rPr>
-              <a:t>Module 02 — Data &amp; AI Engineering Track  |  الوحدة الثانية</a:t>
-            </a:r>
-          </a:p>
-        </p:txBody>
-      </p:sp>
-      <p:sp>
-        <p:nvSpPr>
-          <p:cNvPr id="10" name="TextBox 9"/>
-          <p:cNvSpPr txBox="1"/>
-          <p:nvPr/>
-        </p:nvSpPr>
-        <p:spPr>
-          <a:xfrm>
-            <a:off x="9601200" y="6400800"/>
-            <a:ext cx="1920240" cy="320040"/>
-          </a:xfrm>
-          <a:prstGeom prst="rect">
-            <a:avLst/>
-          </a:prstGeom>
-          <a:noFill/>
-        </p:spPr>
-        <p:txBody>
-          <a:bodyPr wrap="square">
-            <a:spAutoFit/>
-          </a:bodyPr>
-          <a:lstStyle/>
-          <a:p>
-            <a:pPr algn="l" rtl="0"/>
-            <a:r>
-              <a:rPr sz="1000" b="0">
-                <a:solidFill>
-                  <a:srgbClr val="666666"/>
-                </a:solidFill>
-                <a:latin typeface="Calibri"/>
-                <a:cs typeface="Arial"/>
-                <a:ea typeface="Calibri"/>
-              </a:rPr>
-              <a:t>11_  •  2/9</a:t>
+              </a:rPr>
+              <a:t>V11  •  2/9</a:t>
             </a:r>
           </a:p>
         </p:txBody>
@@ -4071,8 +3710,6 @@
                   <a:srgbClr val="1F3B5C"/>
                 </a:solidFill>
                 <a:latin typeface="Arial"/>
-                <a:cs typeface="Arial"/>
-                <a:ea typeface="Calibri"/>
               </a:rPr>
               <a:t>الحوكمة والفهرسة / Governance &amp; Cataloging</a:t>
             </a:r>
@@ -4115,14 +3752,12 @@
                   <a:srgbClr val="333333"/>
                 </a:solidFill>
                 <a:latin typeface="Arial"/>
-                <a:cs typeface="Arial"/>
-                <a:ea typeface="Calibri"/>
               </a:rPr>
               <a:t>• سلسلة العهدة (Lineage) تتبع أصل البيانات وتحولاتها؛ الفهرسة تجعلها قابلة للاكتشاف.</a:t>
             </a:r>
           </a:p>
           <a:p>
-            <a:pPr algn="r" rtl="0">
+            <a:pPr algn="l" rtl="0">
               <a:spcBef>
                 <a:spcPts val="200"/>
               </a:spcBef>
@@ -4136,8 +3771,6 @@
                   <a:srgbClr val="666666"/>
                 </a:solidFill>
                 <a:latin typeface="Calibri"/>
-                <a:cs typeface="Arial"/>
-                <a:ea typeface="Calibri"/>
               </a:rPr>
               <a:t>• Lineage traces data origin and transformations; cataloging makes it discoverable.</a:t>
             </a:r>
@@ -4157,14 +3790,12 @@
                   <a:srgbClr val="333333"/>
                 </a:solidFill>
                 <a:latin typeface="Arial"/>
-                <a:cs typeface="Arial"/>
-                <a:ea typeface="Calibri"/>
               </a:rPr>
               <a:t>• أدوات: Apache Atlas، Collibra، DataHub.</a:t>
             </a:r>
           </a:p>
           <a:p>
-            <a:pPr algn="r" rtl="0">
+            <a:pPr algn="l" rtl="0">
               <a:spcBef>
                 <a:spcPts val="200"/>
               </a:spcBef>
@@ -4178,8 +3809,6 @@
                   <a:srgbClr val="666666"/>
                 </a:solidFill>
                 <a:latin typeface="Calibri"/>
-                <a:cs typeface="Arial"/>
-                <a:ea typeface="Calibri"/>
               </a:rPr>
               <a:t>• Tools: Apache Atlas, Collibra, DataHub.</a:t>
             </a:r>
@@ -4215,8 +3844,6 @@
                   <a:srgbClr val="666666"/>
                 </a:solidFill>
                 <a:latin typeface="Arial"/>
-                <a:cs typeface="Arial"/>
-                <a:ea typeface="Calibri"/>
               </a:rPr>
               <a:t>Module 02 — Data &amp; AI Engineering Track  |  الوحدة الثانية</a:t>
             </a:r>
@@ -4252,158 +3879,8 @@
                   <a:srgbClr val="666666"/>
                 </a:solidFill>
                 <a:latin typeface="Calibri"/>
-                <a:cs typeface="Arial"/>
-                <a:ea typeface="Calibri"/>
-              </a:rPr>
-              <a:t>V11  •  3/11</a:t>
-            </a:r>
-          </a:p>
-        </p:txBody>
-      </p:sp>
-      <p:sp>
-        <p:nvSpPr>
-          <p:cNvPr id="7" name="TextBox 6"/>
-          <p:cNvSpPr txBox="1"/>
-          <p:nvPr/>
-        </p:nvSpPr>
-        <p:spPr>
-          <a:xfrm>
-            <a:off x="640080" y="6400800"/>
-            <a:ext cx="8686800" cy="320040"/>
-          </a:xfrm>
-          <a:prstGeom prst="rect">
-            <a:avLst/>
-          </a:prstGeom>
-          <a:noFill/>
-        </p:spPr>
-        <p:txBody>
-          <a:bodyPr wrap="square">
-            <a:spAutoFit/>
-          </a:bodyPr>
-          <a:lstStyle/>
-          <a:p>
-            <a:pPr algn="r" rtl="1"/>
-            <a:r>
-              <a:rPr sz="1000" b="0">
-                <a:solidFill>
-                  <a:srgbClr val="666666"/>
-                </a:solidFill>
-                <a:latin typeface="Arial"/>
-                <a:cs typeface="Arial"/>
-                <a:ea typeface="Calibri"/>
-              </a:rPr>
-              <a:t>Module 02 — Data &amp; AI Engineering Track  |  الوحدة الثانية</a:t>
-            </a:r>
-          </a:p>
-        </p:txBody>
-      </p:sp>
-      <p:sp>
-        <p:nvSpPr>
-          <p:cNvPr id="8" name="TextBox 7"/>
-          <p:cNvSpPr txBox="1"/>
-          <p:nvPr/>
-        </p:nvSpPr>
-        <p:spPr>
-          <a:xfrm>
-            <a:off x="9601200" y="6400800"/>
-            <a:ext cx="1920240" cy="320040"/>
-          </a:xfrm>
-          <a:prstGeom prst="rect">
-            <a:avLst/>
-          </a:prstGeom>
-          <a:noFill/>
-        </p:spPr>
-        <p:txBody>
-          <a:bodyPr wrap="square">
-            <a:spAutoFit/>
-          </a:bodyPr>
-          <a:lstStyle/>
-          <a:p>
-            <a:pPr algn="l" rtl="0"/>
-            <a:r>
-              <a:rPr sz="1000" b="0">
-                <a:solidFill>
-                  <a:srgbClr val="666666"/>
-                </a:solidFill>
-                <a:latin typeface="Calibri"/>
-                <a:cs typeface="Arial"/>
-                <a:ea typeface="Calibri"/>
-              </a:rPr>
-              <a:t>11_  •  3/9</a:t>
-            </a:r>
-          </a:p>
-        </p:txBody>
-      </p:sp>
-      <p:sp>
-        <p:nvSpPr>
-          <p:cNvPr id="9" name="TextBox 8"/>
-          <p:cNvSpPr txBox="1"/>
-          <p:nvPr/>
-        </p:nvSpPr>
-        <p:spPr>
-          <a:xfrm>
-            <a:off x="640080" y="6400800"/>
-            <a:ext cx="8686800" cy="320040"/>
-          </a:xfrm>
-          <a:prstGeom prst="rect">
-            <a:avLst/>
-          </a:prstGeom>
-          <a:noFill/>
-        </p:spPr>
-        <p:txBody>
-          <a:bodyPr wrap="square">
-            <a:spAutoFit/>
-          </a:bodyPr>
-          <a:lstStyle/>
-          <a:p>
-            <a:pPr algn="r" rtl="1"/>
-            <a:r>
-              <a:rPr sz="1000" b="0">
-                <a:solidFill>
-                  <a:srgbClr val="666666"/>
-                </a:solidFill>
-                <a:latin typeface="Arial"/>
-                <a:cs typeface="Arial"/>
-                <a:ea typeface="Calibri"/>
-              </a:rPr>
-              <a:t>Module 02 — Data &amp; AI Engineering Track  |  الوحدة الثانية</a:t>
-            </a:r>
-          </a:p>
-        </p:txBody>
-      </p:sp>
-      <p:sp>
-        <p:nvSpPr>
-          <p:cNvPr id="10" name="TextBox 9"/>
-          <p:cNvSpPr txBox="1"/>
-          <p:nvPr/>
-        </p:nvSpPr>
-        <p:spPr>
-          <a:xfrm>
-            <a:off x="9601200" y="6400800"/>
-            <a:ext cx="1920240" cy="320040"/>
-          </a:xfrm>
-          <a:prstGeom prst="rect">
-            <a:avLst/>
-          </a:prstGeom>
-          <a:noFill/>
-        </p:spPr>
-        <p:txBody>
-          <a:bodyPr wrap="square">
-            <a:spAutoFit/>
-          </a:bodyPr>
-          <a:lstStyle/>
-          <a:p>
-            <a:pPr algn="l" rtl="0"/>
-            <a:r>
-              <a:rPr sz="1000" b="0">
-                <a:solidFill>
-                  <a:srgbClr val="666666"/>
-                </a:solidFill>
-                <a:latin typeface="Calibri"/>
-                <a:cs typeface="Arial"/>
-                <a:ea typeface="Calibri"/>
-              </a:rPr>
-              <a:t>11_  •  3/9</a:t>
+              </a:rPr>
+              <a:t>V11  •  3/9</a:t>
             </a:r>
           </a:p>
         </p:txBody>
@@ -4509,8 +3986,6 @@
                   <a:srgbClr val="1F3B5C"/>
                 </a:solidFill>
                 <a:latin typeface="Arial"/>
-                <a:cs typeface="Arial"/>
-                <a:ea typeface="Calibri"/>
               </a:rPr>
               <a:t>المعمارية المرجعية للذكاء التوليدي (1/2) / GenAI Reference Architecture (1/2)</a:t>
             </a:r>
@@ -4553,14 +4028,12 @@
                   <a:srgbClr val="333333"/>
                 </a:solidFill>
                 <a:latin typeface="Arial"/>
-                <a:cs typeface="Arial"/>
-                <a:ea typeface="Calibri"/>
               </a:rPr>
               <a:t>• أ. بوابة منصة GenAI: نافذة موحدة بكتالوج حلول ومحفظة POC → MVP → PROD موثقة.</a:t>
             </a:r>
           </a:p>
           <a:p>
-            <a:pPr algn="r" rtl="0">
+            <a:pPr algn="l" rtl="0">
               <a:spcBef>
                 <a:spcPts val="200"/>
               </a:spcBef>
@@ -4574,8 +4047,6 @@
                   <a:srgbClr val="666666"/>
                 </a:solidFill>
                 <a:latin typeface="Calibri"/>
-                <a:cs typeface="Arial"/>
-                <a:ea typeface="Calibri"/>
               </a:rPr>
               <a:t>• A. Portal: unified pane of glass with a solution catalog and documented POC → MVP → PROD portfolio.</a:t>
             </a:r>
@@ -4595,8 +4066,6 @@
                   <a:srgbClr val="333333"/>
                 </a:solidFill>
                 <a:latin typeface="Arial"/>
-                <a:cs typeface="Arial"/>
-                <a:ea typeface="Calibri"/>
               </a:rPr>
               <a:t>• ب. الأتمتة والامتثال: خطوط CI/CD ببوابات تحكم آلية وموافقات مرحلية وفق DevSecOps.</a:t>
             </a:r>
@@ -4616,8 +4085,6 @@
                   <a:srgbClr val="666666"/>
                 </a:solidFill>
                 <a:latin typeface="Calibri"/>
-                <a:cs typeface="Arial"/>
-                <a:ea typeface="Calibri"/>
               </a:rPr>
               <a:t>• B. Automation &amp; compliance: CI/CD with automated control gates and stage-gate approvals (DevSecOps).</a:t>
             </a:r>
@@ -4653,8 +4120,6 @@
                   <a:srgbClr val="666666"/>
                 </a:solidFill>
                 <a:latin typeface="Arial"/>
-                <a:cs typeface="Arial"/>
-                <a:ea typeface="Calibri"/>
               </a:rPr>
               <a:t>Module 02 — Data &amp; AI Engineering Track  |  الوحدة الثانية</a:t>
             </a:r>
@@ -4690,158 +4155,8 @@
                   <a:srgbClr val="666666"/>
                 </a:solidFill>
                 <a:latin typeface="Calibri"/>
-                <a:cs typeface="Arial"/>
-                <a:ea typeface="Calibri"/>
-              </a:rPr>
-              <a:t>V11  •  4/11</a:t>
-            </a:r>
-          </a:p>
-        </p:txBody>
-      </p:sp>
-      <p:sp>
-        <p:nvSpPr>
-          <p:cNvPr id="7" name="TextBox 6"/>
-          <p:cNvSpPr txBox="1"/>
-          <p:nvPr/>
-        </p:nvSpPr>
-        <p:spPr>
-          <a:xfrm>
-            <a:off x="640080" y="6400800"/>
-            <a:ext cx="8686800" cy="320040"/>
-          </a:xfrm>
-          <a:prstGeom prst="rect">
-            <a:avLst/>
-          </a:prstGeom>
-          <a:noFill/>
-        </p:spPr>
-        <p:txBody>
-          <a:bodyPr wrap="square">
-            <a:spAutoFit/>
-          </a:bodyPr>
-          <a:lstStyle/>
-          <a:p>
-            <a:pPr algn="r" rtl="1"/>
-            <a:r>
-              <a:rPr sz="1000" b="0">
-                <a:solidFill>
-                  <a:srgbClr val="666666"/>
-                </a:solidFill>
-                <a:latin typeface="Arial"/>
-                <a:cs typeface="Arial"/>
-                <a:ea typeface="Calibri"/>
-              </a:rPr>
-              <a:t>Module 02 — Data &amp; AI Engineering Track  |  الوحدة الثانية</a:t>
-            </a:r>
-          </a:p>
-        </p:txBody>
-      </p:sp>
-      <p:sp>
-        <p:nvSpPr>
-          <p:cNvPr id="8" name="TextBox 7"/>
-          <p:cNvSpPr txBox="1"/>
-          <p:nvPr/>
-        </p:nvSpPr>
-        <p:spPr>
-          <a:xfrm>
-            <a:off x="9601200" y="6400800"/>
-            <a:ext cx="1920240" cy="320040"/>
-          </a:xfrm>
-          <a:prstGeom prst="rect">
-            <a:avLst/>
-          </a:prstGeom>
-          <a:noFill/>
-        </p:spPr>
-        <p:txBody>
-          <a:bodyPr wrap="square">
-            <a:spAutoFit/>
-          </a:bodyPr>
-          <a:lstStyle/>
-          <a:p>
-            <a:pPr algn="l" rtl="0"/>
-            <a:r>
-              <a:rPr sz="1000" b="0">
-                <a:solidFill>
-                  <a:srgbClr val="666666"/>
-                </a:solidFill>
-                <a:latin typeface="Calibri"/>
-                <a:cs typeface="Arial"/>
-                <a:ea typeface="Calibri"/>
-              </a:rPr>
-              <a:t>11_  •  4/9</a:t>
-            </a:r>
-          </a:p>
-        </p:txBody>
-      </p:sp>
-      <p:sp>
-        <p:nvSpPr>
-          <p:cNvPr id="9" name="TextBox 8"/>
-          <p:cNvSpPr txBox="1"/>
-          <p:nvPr/>
-        </p:nvSpPr>
-        <p:spPr>
-          <a:xfrm>
-            <a:off x="640080" y="6400800"/>
-            <a:ext cx="8686800" cy="320040"/>
-          </a:xfrm>
-          <a:prstGeom prst="rect">
-            <a:avLst/>
-          </a:prstGeom>
-          <a:noFill/>
-        </p:spPr>
-        <p:txBody>
-          <a:bodyPr wrap="square">
-            <a:spAutoFit/>
-          </a:bodyPr>
-          <a:lstStyle/>
-          <a:p>
-            <a:pPr algn="r" rtl="1"/>
-            <a:r>
-              <a:rPr sz="1000" b="0">
-                <a:solidFill>
-                  <a:srgbClr val="666666"/>
-                </a:solidFill>
-                <a:latin typeface="Arial"/>
-                <a:cs typeface="Arial"/>
-                <a:ea typeface="Calibri"/>
-              </a:rPr>
-              <a:t>Module 02 — Data &amp; AI Engineering Track  |  الوحدة الثانية</a:t>
-            </a:r>
-          </a:p>
-        </p:txBody>
-      </p:sp>
-      <p:sp>
-        <p:nvSpPr>
-          <p:cNvPr id="10" name="TextBox 9"/>
-          <p:cNvSpPr txBox="1"/>
-          <p:nvPr/>
-        </p:nvSpPr>
-        <p:spPr>
-          <a:xfrm>
-            <a:off x="9601200" y="6400800"/>
-            <a:ext cx="1920240" cy="320040"/>
-          </a:xfrm>
-          <a:prstGeom prst="rect">
-            <a:avLst/>
-          </a:prstGeom>
-          <a:noFill/>
-        </p:spPr>
-        <p:txBody>
-          <a:bodyPr wrap="square">
-            <a:spAutoFit/>
-          </a:bodyPr>
-          <a:lstStyle/>
-          <a:p>
-            <a:pPr algn="l" rtl="0"/>
-            <a:r>
-              <a:rPr sz="1000" b="0">
-                <a:solidFill>
-                  <a:srgbClr val="666666"/>
-                </a:solidFill>
-                <a:latin typeface="Calibri"/>
-                <a:cs typeface="Arial"/>
-                <a:ea typeface="Calibri"/>
-              </a:rPr>
-              <a:t>11_  •  4/9</a:t>
+              </a:rPr>
+              <a:t>V11  •  4/9</a:t>
             </a:r>
           </a:p>
         </p:txBody>
@@ -4947,8 +4262,6 @@
                   <a:srgbClr val="1F3B5C"/>
                 </a:solidFill>
                 <a:latin typeface="Arial"/>
-                <a:cs typeface="Arial"/>
-                <a:ea typeface="Calibri"/>
               </a:rPr>
               <a:t>المعمارية المرجعية للذكاء التوليدي (2/2) / GenAI Reference Architecture (2/2)</a:t>
             </a:r>
@@ -4991,14 +4304,12 @@
                   <a:srgbClr val="333333"/>
                 </a:solidFill>
                 <a:latin typeface="Arial"/>
-                <a:cs typeface="Arial"/>
-                <a:ea typeface="Calibri"/>
               </a:rPr>
               <a:t>• ج. الخدمات المشتركة: بوابة AI موحدة، مكتبة موجِّهات، خدمة التغذية الراجعة، قاعدة تدقيق LLM، حواجز حماية Guardrails.</a:t>
             </a:r>
           </a:p>
           <a:p>
-            <a:pPr algn="r" rtl="0">
+            <a:pPr algn="l" rtl="0">
               <a:spcBef>
                 <a:spcPts val="200"/>
               </a:spcBef>
@@ -5012,8 +4323,6 @@
                   <a:srgbClr val="666666"/>
                 </a:solidFill>
                 <a:latin typeface="Calibri"/>
-                <a:cs typeface="Arial"/>
-                <a:ea typeface="Calibri"/>
               </a:rPr>
               <a:t>• C. Shared services: unified AI gateway, prompt library, feedback service, LLM audit database, guardrails.</a:t>
             </a:r>
@@ -5033,14 +4342,12 @@
                   <a:srgbClr val="333333"/>
                 </a:solidFill>
                 <a:latin typeface="Arial"/>
-                <a:cs typeface="Arial"/>
-                <a:ea typeface="Calibri"/>
               </a:rPr>
               <a:t>• د. الحوكمة والمراقبة: أمن البيانات، الذكاء المسؤول (تدقيق التحيّز والهلوسة)، وإدارة التكاليف FinOps.</a:t>
             </a:r>
           </a:p>
           <a:p>
-            <a:pPr algn="r" rtl="0">
+            <a:pPr algn="l" rtl="0">
               <a:spcBef>
                 <a:spcPts val="200"/>
               </a:spcBef>
@@ -5054,8 +4361,6 @@
                   <a:srgbClr val="666666"/>
                 </a:solidFill>
                 <a:latin typeface="Calibri"/>
-                <a:cs typeface="Arial"/>
-                <a:ea typeface="Calibri"/>
               </a:rPr>
               <a:t>• D. Governance &amp; monitoring: data security, responsible AI (bias/hallucination audits), FinOps.</a:t>
             </a:r>
@@ -5091,8 +4396,6 @@
                   <a:srgbClr val="666666"/>
                 </a:solidFill>
                 <a:latin typeface="Arial"/>
-                <a:cs typeface="Arial"/>
-                <a:ea typeface="Calibri"/>
               </a:rPr>
               <a:t>Module 02 — Data &amp; AI Engineering Track  |  الوحدة الثانية</a:t>
             </a:r>
@@ -5128,158 +4431,8 @@
                   <a:srgbClr val="666666"/>
                 </a:solidFill>
                 <a:latin typeface="Calibri"/>
-                <a:cs typeface="Arial"/>
-                <a:ea typeface="Calibri"/>
-              </a:rPr>
-              <a:t>V11  •  5/11</a:t>
-            </a:r>
-          </a:p>
-        </p:txBody>
-      </p:sp>
-      <p:sp>
-        <p:nvSpPr>
-          <p:cNvPr id="7" name="TextBox 6"/>
-          <p:cNvSpPr txBox="1"/>
-          <p:nvPr/>
-        </p:nvSpPr>
-        <p:spPr>
-          <a:xfrm>
-            <a:off x="640080" y="6400800"/>
-            <a:ext cx="8686800" cy="320040"/>
-          </a:xfrm>
-          <a:prstGeom prst="rect">
-            <a:avLst/>
-          </a:prstGeom>
-          <a:noFill/>
-        </p:spPr>
-        <p:txBody>
-          <a:bodyPr wrap="square">
-            <a:spAutoFit/>
-          </a:bodyPr>
-          <a:lstStyle/>
-          <a:p>
-            <a:pPr algn="r" rtl="1"/>
-            <a:r>
-              <a:rPr sz="1000" b="0">
-                <a:solidFill>
-                  <a:srgbClr val="666666"/>
-                </a:solidFill>
-                <a:latin typeface="Arial"/>
-                <a:cs typeface="Arial"/>
-                <a:ea typeface="Calibri"/>
-              </a:rPr>
-              <a:t>Module 02 — Data &amp; AI Engineering Track  |  الوحدة الثانية</a:t>
-            </a:r>
-          </a:p>
-        </p:txBody>
-      </p:sp>
-      <p:sp>
-        <p:nvSpPr>
-          <p:cNvPr id="8" name="TextBox 7"/>
-          <p:cNvSpPr txBox="1"/>
-          <p:nvPr/>
-        </p:nvSpPr>
-        <p:spPr>
-          <a:xfrm>
-            <a:off x="9601200" y="6400800"/>
-            <a:ext cx="1920240" cy="320040"/>
-          </a:xfrm>
-          <a:prstGeom prst="rect">
-            <a:avLst/>
-          </a:prstGeom>
-          <a:noFill/>
-        </p:spPr>
-        <p:txBody>
-          <a:bodyPr wrap="square">
-            <a:spAutoFit/>
-          </a:bodyPr>
-          <a:lstStyle/>
-          <a:p>
-            <a:pPr algn="l" rtl="0"/>
-            <a:r>
-              <a:rPr sz="1000" b="0">
-                <a:solidFill>
-                  <a:srgbClr val="666666"/>
-                </a:solidFill>
-                <a:latin typeface="Calibri"/>
-                <a:cs typeface="Arial"/>
-                <a:ea typeface="Calibri"/>
-              </a:rPr>
-              <a:t>11_  •  5/9</a:t>
-            </a:r>
-          </a:p>
-        </p:txBody>
-      </p:sp>
-      <p:sp>
-        <p:nvSpPr>
-          <p:cNvPr id="9" name="TextBox 8"/>
-          <p:cNvSpPr txBox="1"/>
-          <p:nvPr/>
-        </p:nvSpPr>
-        <p:spPr>
-          <a:xfrm>
-            <a:off x="640080" y="6400800"/>
-            <a:ext cx="8686800" cy="320040"/>
-          </a:xfrm>
-          <a:prstGeom prst="rect">
-            <a:avLst/>
-          </a:prstGeom>
-          <a:noFill/>
-        </p:spPr>
-        <p:txBody>
-          <a:bodyPr wrap="square">
-            <a:spAutoFit/>
-          </a:bodyPr>
-          <a:lstStyle/>
-          <a:p>
-            <a:pPr algn="r" rtl="1"/>
-            <a:r>
-              <a:rPr sz="1000" b="0">
-                <a:solidFill>
-                  <a:srgbClr val="666666"/>
-                </a:solidFill>
-                <a:latin typeface="Arial"/>
-                <a:cs typeface="Arial"/>
-                <a:ea typeface="Calibri"/>
-              </a:rPr>
-              <a:t>Module 02 — Data &amp; AI Engineering Track  |  الوحدة الثانية</a:t>
-            </a:r>
-          </a:p>
-        </p:txBody>
-      </p:sp>
-      <p:sp>
-        <p:nvSpPr>
-          <p:cNvPr id="10" name="TextBox 9"/>
-          <p:cNvSpPr txBox="1"/>
-          <p:nvPr/>
-        </p:nvSpPr>
-        <p:spPr>
-          <a:xfrm>
-            <a:off x="9601200" y="6400800"/>
-            <a:ext cx="1920240" cy="320040"/>
-          </a:xfrm>
-          <a:prstGeom prst="rect">
-            <a:avLst/>
-          </a:prstGeom>
-          <a:noFill/>
-        </p:spPr>
-        <p:txBody>
-          <a:bodyPr wrap="square">
-            <a:spAutoFit/>
-          </a:bodyPr>
-          <a:lstStyle/>
-          <a:p>
-            <a:pPr algn="l" rtl="0"/>
-            <a:r>
-              <a:rPr sz="1000" b="0">
-                <a:solidFill>
-                  <a:srgbClr val="666666"/>
-                </a:solidFill>
-                <a:latin typeface="Calibri"/>
-                <a:cs typeface="Arial"/>
-                <a:ea typeface="Calibri"/>
-              </a:rPr>
-              <a:t>11_  •  5/9</a:t>
+              </a:rPr>
+              <a:t>V11  •  5/9</a:t>
             </a:r>
           </a:p>
         </p:txBody>
@@ -5312,59 +4465,22 @@
       <p:grpSpPr/>
       <p:sp>
         <p:nvSpPr>
-          <p:cNvPr id="2" name="TextBox 1"/>
-          <p:cNvSpPr txBox="1"/>
+          <p:cNvPr id="2" name="Rectangle 1"/>
+          <p:cNvSpPr/>
           <p:nvPr/>
         </p:nvSpPr>
         <p:spPr>
           <a:xfrm>
-            <a:off x="640080" y="137160"/>
-            <a:ext cx="10972800" cy="640080"/>
+            <a:off x="0" y="0"/>
+            <a:ext cx="12191695" cy="1005840"/>
           </a:xfrm>
           <a:prstGeom prst="rect">
             <a:avLst/>
           </a:prstGeom>
-          <a:noFill/>
-        </p:spPr>
-        <p:txBody>
-          <a:bodyPr wrap="none">
-            <a:spAutoFit/>
-          </a:bodyPr>
-          <a:lstStyle/>
-          <a:p>
-            <a:pPr algn="r" rtl="1"/>
-            <a:r>
-              <a:rPr sz="3000" b="1">
-                <a:solidFill>
-                  <a:srgbClr val="1F3B5C"/>
-                </a:solidFill>
-                <a:latin typeface="Arial"/>
-                <a:cs typeface="Arial"/>
-                <a:ea typeface="Calibri"/>
-              </a:rPr>
-              <a:t>المعمارية المرجعية للذكاء التوليدي / GenAI Reference Architecture</a:t>
-            </a:r>
-          </a:p>
-        </p:txBody>
-      </p:sp>
-      <p:sp>
-        <p:nvSpPr>
-          <p:cNvPr id="3" name="Rounded Rectangle 2"/>
-          <p:cNvSpPr/>
-          <p:nvPr/>
-        </p:nvSpPr>
-        <p:spPr>
-          <a:xfrm>
-            <a:off x="1097280" y="1280160"/>
-            <a:ext cx="9966960" cy="1051560"/>
-          </a:xfrm>
-          <a:prstGeom prst="roundRect">
-            <a:avLst/>
-          </a:prstGeom>
           <a:solidFill>
-            <a:srgbClr val="DCE6F1"/>
+            <a:srgbClr val="FFFFFF"/>
           </a:solidFill>
-          <a:ln w="12700">
+          <a:ln w="25400">
             <a:solidFill>
               <a:srgbClr val="1F4E79"/>
             </a:solidFill>
@@ -5386,261 +4502,23 @@
           </a:fontRef>
         </p:style>
         <p:txBody>
-          <a:bodyPr rtlCol="0" anchor="ctr" wrap="square"/>
-          <a:lstStyle/>
-          <a:p>
-            <a:pPr algn="ctr" rtl="1"/>
-            <a:r>
-              <a:rPr sz="1800" b="1">
-                <a:solidFill>
-                  <a:srgbClr val="333333"/>
-                </a:solidFill>
-                <a:latin typeface="Arial"/>
-                <a:cs typeface="Arial"/>
-                <a:ea typeface="Calibri"/>
-              </a:rPr>
-              <a:t>أ. بوابة منصة GenAI</a:t>
-            </a:r>
-          </a:p>
-          <a:p>
-            <a:pPr algn="ctr" rtl="0"/>
-            <a:r>
-              <a:rPr sz="1300">
-                <a:solidFill>
-                  <a:srgbClr val="666666"/>
-                </a:solidFill>
-                <a:latin typeface="Calibri"/>
-                <a:cs typeface="Arial"/>
-                <a:ea typeface="Calibri"/>
-              </a:rPr>
-              <a:t>A. Platform Portal — POC → MVP → PROD</a:t>
-            </a:r>
-          </a:p>
-        </p:txBody>
-      </p:sp>
-      <p:sp>
-        <p:nvSpPr>
-          <p:cNvPr id="4" name="Rounded Rectangle 3"/>
-          <p:cNvSpPr/>
-          <p:nvPr/>
-        </p:nvSpPr>
-        <p:spPr>
-          <a:xfrm>
-            <a:off x="1097280" y="2487168"/>
-            <a:ext cx="9966960" cy="1051560"/>
-          </a:xfrm>
-          <a:prstGeom prst="roundRect">
-            <a:avLst/>
-          </a:prstGeom>
-          <a:solidFill>
-            <a:srgbClr val="E2EFDA"/>
-          </a:solidFill>
-          <a:ln w="12700">
-            <a:solidFill>
-              <a:srgbClr val="1F4E79"/>
-            </a:solidFill>
-          </a:ln>
-          <a:effectLst/>
-        </p:spPr>
-        <p:style>
-          <a:lnRef idx="1">
-            <a:schemeClr val="accent1"/>
-          </a:lnRef>
-          <a:fillRef idx="3">
-            <a:schemeClr val="accent1"/>
-          </a:fillRef>
-          <a:effectRef idx="2">
-            <a:schemeClr val="accent1"/>
-          </a:effectRef>
-          <a:fontRef idx="minor">
-            <a:schemeClr val="lt1"/>
-          </a:fontRef>
-        </p:style>
-        <p:txBody>
-          <a:bodyPr rtlCol="0" anchor="ctr" wrap="square"/>
-          <a:lstStyle/>
-          <a:p>
-            <a:pPr algn="ctr" rtl="1"/>
-            <a:r>
-              <a:rPr sz="1800" b="1">
-                <a:solidFill>
-                  <a:srgbClr val="333333"/>
-                </a:solidFill>
-                <a:latin typeface="Arial"/>
-                <a:cs typeface="Arial"/>
-                <a:ea typeface="Calibri"/>
-              </a:rPr>
-              <a:t>ب. الأتمتة والامتثال</a:t>
-            </a:r>
-          </a:p>
-          <a:p>
-            <a:pPr algn="ctr" rtl="0"/>
-            <a:r>
-              <a:rPr sz="1300">
-                <a:solidFill>
-                  <a:srgbClr val="666666"/>
-                </a:solidFill>
-                <a:latin typeface="Calibri"/>
-                <a:cs typeface="Arial"/>
-                <a:ea typeface="Calibri"/>
-              </a:rPr>
-              <a:t>B. Automation &amp; Compliance — CI/CD gates</a:t>
-            </a:r>
-          </a:p>
-        </p:txBody>
-      </p:sp>
-      <p:sp>
-        <p:nvSpPr>
-          <p:cNvPr id="5" name="Rounded Rectangle 4"/>
-          <p:cNvSpPr/>
-          <p:nvPr/>
-        </p:nvSpPr>
-        <p:spPr>
-          <a:xfrm>
-            <a:off x="1097280" y="3694176"/>
-            <a:ext cx="9966960" cy="1051560"/>
-          </a:xfrm>
-          <a:prstGeom prst="roundRect">
-            <a:avLst/>
-          </a:prstGeom>
-          <a:solidFill>
-            <a:srgbClr val="FDE9D9"/>
-          </a:solidFill>
-          <a:ln w="12700">
-            <a:solidFill>
-              <a:srgbClr val="1F4E79"/>
-            </a:solidFill>
-          </a:ln>
-          <a:effectLst/>
-        </p:spPr>
-        <p:style>
-          <a:lnRef idx="1">
-            <a:schemeClr val="accent1"/>
-          </a:lnRef>
-          <a:fillRef idx="3">
-            <a:schemeClr val="accent1"/>
-          </a:fillRef>
-          <a:effectRef idx="2">
-            <a:schemeClr val="accent1"/>
-          </a:effectRef>
-          <a:fontRef idx="minor">
-            <a:schemeClr val="lt1"/>
-          </a:fontRef>
-        </p:style>
-        <p:txBody>
-          <a:bodyPr rtlCol="0" anchor="ctr" wrap="square"/>
-          <a:lstStyle/>
-          <a:p>
-            <a:pPr algn="ctr" rtl="1"/>
-            <a:r>
-              <a:rPr sz="1800" b="1">
-                <a:solidFill>
-                  <a:srgbClr val="333333"/>
-                </a:solidFill>
-                <a:latin typeface="Arial"/>
-                <a:cs typeface="Arial"/>
-                <a:ea typeface="Calibri"/>
-              </a:rPr>
-              <a:t>ج. الخدمات المشتركة</a:t>
-            </a:r>
-          </a:p>
-          <a:p>
-            <a:pPr algn="ctr" rtl="0"/>
-            <a:r>
-              <a:rPr sz="1300">
-                <a:solidFill>
-                  <a:srgbClr val="666666"/>
-                </a:solidFill>
-                <a:latin typeface="Calibri"/>
-                <a:cs typeface="Arial"/>
-                <a:ea typeface="Calibri"/>
-              </a:rPr>
-              <a:t>C. Shared Services — Gateway, Prompts, Audit, Guardrails</a:t>
-            </a:r>
-          </a:p>
-        </p:txBody>
-      </p:sp>
-      <p:sp>
-        <p:nvSpPr>
-          <p:cNvPr id="6" name="Rounded Rectangle 5"/>
-          <p:cNvSpPr/>
-          <p:nvPr/>
-        </p:nvSpPr>
-        <p:spPr>
-          <a:xfrm>
-            <a:off x="1097280" y="4901184"/>
-            <a:ext cx="9966960" cy="1051560"/>
-          </a:xfrm>
-          <a:prstGeom prst="roundRect">
-            <a:avLst/>
-          </a:prstGeom>
-          <a:solidFill>
-            <a:srgbClr val="EDEDED"/>
-          </a:solidFill>
-          <a:ln w="12700">
-            <a:solidFill>
-              <a:srgbClr val="1F4E79"/>
-            </a:solidFill>
-          </a:ln>
-          <a:effectLst/>
-        </p:spPr>
-        <p:style>
-          <a:lnRef idx="1">
-            <a:schemeClr val="accent1"/>
-          </a:lnRef>
-          <a:fillRef idx="3">
-            <a:schemeClr val="accent1"/>
-          </a:fillRef>
-          <a:effectRef idx="2">
-            <a:schemeClr val="accent1"/>
-          </a:effectRef>
-          <a:fontRef idx="minor">
-            <a:schemeClr val="lt1"/>
-          </a:fontRef>
-        </p:style>
-        <p:txBody>
-          <a:bodyPr rtlCol="0" anchor="ctr" wrap="square"/>
-          <a:lstStyle/>
-          <a:p>
-            <a:pPr algn="ctr" rtl="1"/>
-            <a:r>
-              <a:rPr sz="1800" b="1">
-                <a:solidFill>
-                  <a:srgbClr val="333333"/>
-                </a:solidFill>
-                <a:latin typeface="Arial"/>
-                <a:cs typeface="Arial"/>
-                <a:ea typeface="Calibri"/>
-              </a:rPr>
-              <a:t>د. الحوكمة والمراقبة</a:t>
-            </a:r>
-          </a:p>
-          <a:p>
-            <a:pPr algn="ctr" rtl="0"/>
-            <a:r>
-              <a:rPr sz="1300">
-                <a:solidFill>
-                  <a:srgbClr val="666666"/>
-                </a:solidFill>
-                <a:latin typeface="Calibri"/>
-                <a:cs typeface="Arial"/>
-                <a:ea typeface="Calibri"/>
-              </a:rPr>
-              <a:t>D. Governance &amp; Monitoring — Responsible AI, FinOps</a:t>
-            </a:r>
-          </a:p>
-        </p:txBody>
-      </p:sp>
-      <p:sp>
-        <p:nvSpPr>
-          <p:cNvPr id="7" name="TextBox 6"/>
+          <a:bodyPr rtlCol="0" anchor="ctr"/>
+          <a:lstStyle/>
+          <a:p>
+            <a:pPr algn="ctr"/>
+          </a:p>
+        </p:txBody>
+      </p:sp>
+      <p:sp>
+        <p:nvSpPr>
+          <p:cNvPr id="3" name="TextBox 2"/>
           <p:cNvSpPr txBox="1"/>
           <p:nvPr/>
         </p:nvSpPr>
         <p:spPr>
           <a:xfrm>
-            <a:off x="640080" y="6126480"/>
-            <a:ext cx="10972800" cy="548640"/>
+            <a:off x="640080" y="182880"/>
+            <a:ext cx="10972800" cy="640080"/>
           </a:xfrm>
           <a:prstGeom prst="rect">
             <a:avLst/>
@@ -5655,40 +4533,27 @@
           <a:p>
             <a:pPr algn="r" rtl="1"/>
             <a:r>
-              <a:rPr sz="1400">
-                <a:solidFill>
-                  <a:srgbClr val="666666"/>
+              <a:rPr sz="3200" b="1">
+                <a:solidFill>
+                  <a:srgbClr val="1F3B5C"/>
                 </a:solidFill>
                 <a:latin typeface="Arial"/>
-                <a:cs typeface="Arial"/>
-                <a:ea typeface="Calibri"/>
-              </a:rPr>
-              <a:t>النمط المرجعي المؤسسي (McKinsey) — نافذة موحدة فوق خدمات مشتركة محكومة.</a:t>
-            </a:r>
-          </a:p>
-          <a:p>
-            <a:pPr algn="r" rtl="0"/>
-            <a:r>
-              <a:rPr>
-                <a:latin typeface="Calibri"/>
-                <a:cs typeface="Arial"/>
-                <a:ea typeface="Calibri"/>
-              </a:rPr>
-              <a:t>Enterprise reference pattern (McKinsey) — a unified pane over governed shared services.</a:t>
-            </a:r>
-          </a:p>
-        </p:txBody>
-      </p:sp>
-      <p:sp>
-        <p:nvSpPr>
-          <p:cNvPr id="8" name="TextBox 7"/>
+              </a:rPr>
+              <a:t>اختبار قصير / Quick Quiz</a:t>
+            </a:r>
+          </a:p>
+        </p:txBody>
+      </p:sp>
+      <p:sp>
+        <p:nvSpPr>
+          <p:cNvPr id="4" name="TextBox 3"/>
           <p:cNvSpPr txBox="1"/>
           <p:nvPr/>
         </p:nvSpPr>
         <p:spPr>
           <a:xfrm>
-            <a:off x="640080" y="6400800"/>
-            <a:ext cx="8686800" cy="320040"/>
+            <a:off x="640080" y="1280160"/>
+            <a:ext cx="10972800" cy="5212080"/>
           </a:xfrm>
           <a:prstGeom prst="rect">
             <a:avLst/>
@@ -5701,31 +4566,131 @@
           </a:bodyPr>
           <a:lstStyle/>
           <a:p>
-            <a:pPr algn="r" rtl="1"/>
-            <a:r>
-              <a:rPr sz="1000" b="0">
+            <a:pPr algn="r" rtl="1">
+              <a:spcBef>
+                <a:spcPts val="200"/>
+              </a:spcBef>
+              <a:spcAft>
+                <a:spcPts val="1000"/>
+              </a:spcAft>
+            </a:pPr>
+            <a:r>
+              <a:rPr sz="2000">
+                <a:solidFill>
+                  <a:srgbClr val="333333"/>
+                </a:solidFill>
+                <a:latin typeface="Arial"/>
+              </a:rPr>
+              <a:t>• 1. ما وظيفة بوابة AI الموحدة (AI Gateway)؟</a:t>
+            </a:r>
+          </a:p>
+          <a:p>
+            <a:pPr algn="l" rtl="0">
+              <a:spcBef>
+                <a:spcPts val="200"/>
+              </a:spcBef>
+              <a:spcAft>
+                <a:spcPts val="1000"/>
+              </a:spcAft>
+            </a:pPr>
+            <a:r>
+              <a:rPr sz="1700">
                 <a:solidFill>
                   <a:srgbClr val="666666"/>
                 </a:solidFill>
+                <a:latin typeface="Calibri"/>
+              </a:rPr>
+              <a:t>• What does a unified AI gateway do?</a:t>
+            </a:r>
+          </a:p>
+          <a:p>
+            <a:pPr algn="r" rtl="1">
+              <a:spcBef>
+                <a:spcPts val="200"/>
+              </a:spcBef>
+              <a:spcAft>
+                <a:spcPts val="1000"/>
+              </a:spcAft>
+            </a:pPr>
+            <a:r>
+              <a:rPr sz="2000">
+                <a:solidFill>
+                  <a:srgbClr val="333333"/>
+                </a:solidFill>
                 <a:latin typeface="Arial"/>
-                <a:cs typeface="Arial"/>
-                <a:ea typeface="Calibri"/>
-              </a:rPr>
-              <a:t>Module 02 — Data &amp; AI Engineering Track  |  الوحدة الثانية</a:t>
-            </a:r>
-          </a:p>
-        </p:txBody>
-      </p:sp>
-      <p:sp>
-        <p:nvSpPr>
-          <p:cNvPr id="9" name="TextBox 8"/>
+              </a:rPr>
+              <a:t>• 2. لماذا نحتاج قاعدة تدقيق لنماذج LLM؟</a:t>
+            </a:r>
+          </a:p>
+          <a:p>
+            <a:pPr algn="l" rtl="0">
+              <a:spcBef>
+                <a:spcPts val="200"/>
+              </a:spcBef>
+              <a:spcAft>
+                <a:spcPts val="1000"/>
+              </a:spcAft>
+            </a:pPr>
+            <a:r>
+              <a:rPr sz="1700">
+                <a:solidFill>
+                  <a:srgbClr val="666666"/>
+                </a:solidFill>
+                <a:latin typeface="Calibri"/>
+              </a:rPr>
+              <a:t>• Why keep an LLM audit database?</a:t>
+            </a:r>
+          </a:p>
+          <a:p>
+            <a:pPr algn="r" rtl="1">
+              <a:spcBef>
+                <a:spcPts val="200"/>
+              </a:spcBef>
+              <a:spcAft>
+                <a:spcPts val="1000"/>
+              </a:spcAft>
+            </a:pPr>
+            <a:r>
+              <a:rPr sz="2000">
+                <a:solidFill>
+                  <a:srgbClr val="333333"/>
+                </a:solidFill>
+                <a:latin typeface="Arial"/>
+              </a:rPr>
+              <a:t>• 3. ما دور CI/CD في حوكمة GenAI؟</a:t>
+            </a:r>
+          </a:p>
+          <a:p>
+            <a:pPr algn="l" rtl="0">
+              <a:spcBef>
+                <a:spcPts val="200"/>
+              </a:spcBef>
+              <a:spcAft>
+                <a:spcPts val="1000"/>
+              </a:spcAft>
+            </a:pPr>
+            <a:r>
+              <a:rPr sz="1700">
+                <a:solidFill>
+                  <a:srgbClr val="666666"/>
+                </a:solidFill>
+                <a:latin typeface="Calibri"/>
+              </a:rPr>
+              <a:t>• What is CI/CD's role in GenAI governance?</a:t>
+            </a:r>
+          </a:p>
+        </p:txBody>
+      </p:sp>
+      <p:sp>
+        <p:nvSpPr>
+          <p:cNvPr id="5" name="TextBox 4"/>
           <p:cNvSpPr txBox="1"/>
           <p:nvPr/>
         </p:nvSpPr>
         <p:spPr>
           <a:xfrm>
-            <a:off x="9601200" y="6400800"/>
-            <a:ext cx="1920240" cy="320040"/>
+            <a:off x="640080" y="6400800"/>
+            <a:ext cx="8686800" cy="320040"/>
           </a:xfrm>
           <a:prstGeom prst="rect">
             <a:avLst/>
@@ -5738,31 +4703,29 @@
           </a:bodyPr>
           <a:lstStyle/>
           <a:p>
-            <a:pPr algn="l" rtl="0"/>
+            <a:pPr algn="r" rtl="1"/>
             <a:r>
               <a:rPr sz="1000" b="0">
                 <a:solidFill>
                   <a:srgbClr val="666666"/>
                 </a:solidFill>
-                <a:latin typeface="Calibri"/>
-                <a:cs typeface="Arial"/>
-                <a:ea typeface="Calibri"/>
-              </a:rPr>
-              <a:t>11_  •  6/9</a:t>
-            </a:r>
-          </a:p>
-        </p:txBody>
-      </p:sp>
-      <p:sp>
-        <p:nvSpPr>
-          <p:cNvPr id="10" name="TextBox 9"/>
+                <a:latin typeface="Arial"/>
+              </a:rPr>
+              <a:t>Module 02 — Data &amp; AI Engineering Track  |  الوحدة الثانية</a:t>
+            </a:r>
+          </a:p>
+        </p:txBody>
+      </p:sp>
+      <p:sp>
+        <p:nvSpPr>
+          <p:cNvPr id="6" name="TextBox 5"/>
           <p:cNvSpPr txBox="1"/>
           <p:nvPr/>
         </p:nvSpPr>
         <p:spPr>
           <a:xfrm>
-            <a:off x="640080" y="6400800"/>
-            <a:ext cx="8686800" cy="320040"/>
+            <a:off x="9601200" y="6400800"/>
+            <a:ext cx="1920240" cy="320040"/>
           </a:xfrm>
           <a:prstGeom prst="rect">
             <a:avLst/>
@@ -5775,54 +4738,15 @@
           </a:bodyPr>
           <a:lstStyle/>
           <a:p>
-            <a:pPr algn="r" rtl="1"/>
+            <a:pPr algn="l" rtl="0"/>
             <a:r>
               <a:rPr sz="1000" b="0">
                 <a:solidFill>
                   <a:srgbClr val="666666"/>
                 </a:solidFill>
-                <a:latin typeface="Arial"/>
-                <a:cs typeface="Arial"/>
-                <a:ea typeface="Calibri"/>
-              </a:rPr>
-              <a:t>Module 02 — Data &amp; AI Engineering Track  |  الوحدة الثانية</a:t>
-            </a:r>
-          </a:p>
-        </p:txBody>
-      </p:sp>
-      <p:sp>
-        <p:nvSpPr>
-          <p:cNvPr id="11" name="TextBox 10"/>
-          <p:cNvSpPr txBox="1"/>
-          <p:nvPr/>
-        </p:nvSpPr>
-        <p:spPr>
-          <a:xfrm>
-            <a:off x="9601200" y="6400800"/>
-            <a:ext cx="1920240" cy="320040"/>
-          </a:xfrm>
-          <a:prstGeom prst="rect">
-            <a:avLst/>
-          </a:prstGeom>
-          <a:noFill/>
-        </p:spPr>
-        <p:txBody>
-          <a:bodyPr wrap="square">
-            <a:spAutoFit/>
-          </a:bodyPr>
-          <a:lstStyle/>
-          <a:p>
-            <a:pPr algn="l" rtl="0"/>
-            <a:r>
-              <a:rPr sz="1000" b="0">
-                <a:solidFill>
-                  <a:srgbClr val="666666"/>
-                </a:solidFill>
                 <a:latin typeface="Calibri"/>
-                <a:cs typeface="Arial"/>
-                <a:ea typeface="Calibri"/>
-              </a:rPr>
-              <a:t>11_  •  6/9</a:t>
+              </a:rPr>
+              <a:t>V11  •  7/9</a:t>
             </a:r>
           </a:p>
         </p:txBody>
@@ -5928,10 +4852,8 @@
                   <a:srgbClr val="1F3B5C"/>
                 </a:solidFill>
                 <a:latin typeface="Arial"/>
-                <a:cs typeface="Arial"/>
-                <a:ea typeface="Calibri"/>
-              </a:rPr>
-              <a:t>اختبار قصير / Quick Quiz</a:t>
+              </a:rPr>
+              <a:t>إجابات الاختبار / Quiz Answers</a:t>
             </a:r>
           </a:p>
         </p:txBody>
@@ -5967,19 +4889,17 @@
               </a:spcAft>
             </a:pPr>
             <a:r>
-              <a:rPr sz="2000">
+              <a:rPr sz="1800">
                 <a:solidFill>
                   <a:srgbClr val="333333"/>
                 </a:solidFill>
                 <a:latin typeface="Arial"/>
-                <a:cs typeface="Arial"/>
-                <a:ea typeface="Calibri"/>
-              </a:rPr>
-              <a:t>• 1. ما وظيفة بوابة AI الموحدة (AI Gateway)؟</a:t>
-            </a:r>
-          </a:p>
-          <a:p>
-            <a:pPr algn="r" rtl="0">
+              </a:rPr>
+              <a:t>• 1. نقطة دخول موحدة تفرض المصادقة والحدود والتسجيل على كل الاستدعاءات.</a:t>
+            </a:r>
+          </a:p>
+          <a:p>
+            <a:pPr algn="l" rtl="0">
               <a:spcBef>
                 <a:spcPts val="200"/>
               </a:spcBef>
@@ -5988,15 +4908,13 @@
               </a:spcAft>
             </a:pPr>
             <a:r>
-              <a:rPr sz="1700">
+              <a:rPr sz="1500">
                 <a:solidFill>
                   <a:srgbClr val="666666"/>
                 </a:solidFill>
                 <a:latin typeface="Calibri"/>
-                <a:cs typeface="Arial"/>
-                <a:ea typeface="Calibri"/>
-              </a:rPr>
-              <a:t>• What does a unified AI gateway do?</a:t>
+              </a:rPr>
+              <a:t>• A single entry point enforcing auth, limits, and logging for all calls.</a:t>
             </a:r>
           </a:p>
           <a:p>
@@ -6009,19 +4927,17 @@
               </a:spcAft>
             </a:pPr>
             <a:r>
-              <a:rPr sz="2000">
+              <a:rPr sz="1800">
                 <a:solidFill>
                   <a:srgbClr val="333333"/>
                 </a:solidFill>
                 <a:latin typeface="Arial"/>
-                <a:cs typeface="Arial"/>
-                <a:ea typeface="Calibri"/>
-              </a:rPr>
-              <a:t>• 2. لماذا نحتاج قاعدة تدقيق لنماذج LLM؟</a:t>
-            </a:r>
-          </a:p>
-          <a:p>
-            <a:pPr algn="r" rtl="0">
+              </a:rPr>
+              <a:t>• 2. لتتبع الموجِّهات والإجابات والامتثال والتحقيق في الحوادث.</a:t>
+            </a:r>
+          </a:p>
+          <a:p>
+            <a:pPr algn="l" rtl="0">
               <a:spcBef>
                 <a:spcPts val="200"/>
               </a:spcBef>
@@ -6030,15 +4946,13 @@
               </a:spcAft>
             </a:pPr>
             <a:r>
-              <a:rPr sz="1700">
+              <a:rPr sz="1500">
                 <a:solidFill>
                   <a:srgbClr val="666666"/>
                 </a:solidFill>
                 <a:latin typeface="Calibri"/>
-                <a:cs typeface="Arial"/>
-                <a:ea typeface="Calibri"/>
-              </a:rPr>
-              <a:t>• Why keep an LLM audit database?</a:t>
+              </a:rPr>
+              <a:t>• To trace prompts/answers for compliance and investigation.</a:t>
             </a:r>
           </a:p>
           <a:p>
@@ -6051,19 +4965,17 @@
               </a:spcAft>
             </a:pPr>
             <a:r>
-              <a:rPr sz="2000">
+              <a:rPr sz="1800">
                 <a:solidFill>
                   <a:srgbClr val="333333"/>
                 </a:solidFill>
                 <a:latin typeface="Arial"/>
-                <a:cs typeface="Arial"/>
-                <a:ea typeface="Calibri"/>
-              </a:rPr>
-              <a:t>• 3. ما دور CI/CD في حوكمة GenAI؟</a:t>
-            </a:r>
-          </a:p>
-          <a:p>
-            <a:pPr algn="r" rtl="0">
+              </a:rPr>
+              <a:t>• 3. بوابات تحكم وموافقات مرحلية آلية قبل الإنتاج.</a:t>
+            </a:r>
+          </a:p>
+          <a:p>
+            <a:pPr algn="l" rtl="0">
               <a:spcBef>
                 <a:spcPts val="200"/>
               </a:spcBef>
@@ -6072,15 +4984,13 @@
               </a:spcAft>
             </a:pPr>
             <a:r>
-              <a:rPr sz="1700">
+              <a:rPr sz="1500">
                 <a:solidFill>
                   <a:srgbClr val="666666"/>
                 </a:solidFill>
                 <a:latin typeface="Calibri"/>
-                <a:cs typeface="Arial"/>
-                <a:ea typeface="Calibri"/>
-              </a:rPr>
-              <a:t>• What is CI/CD's role in GenAI governance?</a:t>
+              </a:rPr>
+              <a:t>• Automated control gates and approvals before production.</a:t>
             </a:r>
           </a:p>
         </p:txBody>
@@ -6114,8 +5024,6 @@
                   <a:srgbClr val="666666"/>
                 </a:solidFill>
                 <a:latin typeface="Arial"/>
-                <a:cs typeface="Arial"/>
-                <a:ea typeface="Calibri"/>
               </a:rPr>
               <a:t>Module 02 — Data &amp; AI Engineering Track  |  الوحدة الثانية</a:t>
             </a:r>
@@ -6151,158 +5059,8 @@
                   <a:srgbClr val="666666"/>
                 </a:solidFill>
                 <a:latin typeface="Calibri"/>
-                <a:cs typeface="Arial"/>
-                <a:ea typeface="Calibri"/>
-              </a:rPr>
-              <a:t>V11  •  6/11</a:t>
-            </a:r>
-          </a:p>
-        </p:txBody>
-      </p:sp>
-      <p:sp>
-        <p:nvSpPr>
-          <p:cNvPr id="7" name="TextBox 6"/>
-          <p:cNvSpPr txBox="1"/>
-          <p:nvPr/>
-        </p:nvSpPr>
-        <p:spPr>
-          <a:xfrm>
-            <a:off x="640080" y="6400800"/>
-            <a:ext cx="8686800" cy="320040"/>
-          </a:xfrm>
-          <a:prstGeom prst="rect">
-            <a:avLst/>
-          </a:prstGeom>
-          <a:noFill/>
-        </p:spPr>
-        <p:txBody>
-          <a:bodyPr wrap="square">
-            <a:spAutoFit/>
-          </a:bodyPr>
-          <a:lstStyle/>
-          <a:p>
-            <a:pPr algn="r" rtl="1"/>
-            <a:r>
-              <a:rPr sz="1000" b="0">
-                <a:solidFill>
-                  <a:srgbClr val="666666"/>
-                </a:solidFill>
-                <a:latin typeface="Arial"/>
-                <a:cs typeface="Arial"/>
-                <a:ea typeface="Calibri"/>
-              </a:rPr>
-              <a:t>Module 02 — Data &amp; AI Engineering Track  |  الوحدة الثانية</a:t>
-            </a:r>
-          </a:p>
-        </p:txBody>
-      </p:sp>
-      <p:sp>
-        <p:nvSpPr>
-          <p:cNvPr id="8" name="TextBox 7"/>
-          <p:cNvSpPr txBox="1"/>
-          <p:nvPr/>
-        </p:nvSpPr>
-        <p:spPr>
-          <a:xfrm>
-            <a:off x="9601200" y="6400800"/>
-            <a:ext cx="1920240" cy="320040"/>
-          </a:xfrm>
-          <a:prstGeom prst="rect">
-            <a:avLst/>
-          </a:prstGeom>
-          <a:noFill/>
-        </p:spPr>
-        <p:txBody>
-          <a:bodyPr wrap="square">
-            <a:spAutoFit/>
-          </a:bodyPr>
-          <a:lstStyle/>
-          <a:p>
-            <a:pPr algn="l" rtl="0"/>
-            <a:r>
-              <a:rPr sz="1000" b="0">
-                <a:solidFill>
-                  <a:srgbClr val="666666"/>
-                </a:solidFill>
-                <a:latin typeface="Calibri"/>
-                <a:cs typeface="Arial"/>
-                <a:ea typeface="Calibri"/>
-              </a:rPr>
-              <a:t>11_  •  7/9</a:t>
-            </a:r>
-          </a:p>
-        </p:txBody>
-      </p:sp>
-      <p:sp>
-        <p:nvSpPr>
-          <p:cNvPr id="9" name="TextBox 8"/>
-          <p:cNvSpPr txBox="1"/>
-          <p:nvPr/>
-        </p:nvSpPr>
-        <p:spPr>
-          <a:xfrm>
-            <a:off x="640080" y="6400800"/>
-            <a:ext cx="8686800" cy="320040"/>
-          </a:xfrm>
-          <a:prstGeom prst="rect">
-            <a:avLst/>
-          </a:prstGeom>
-          <a:noFill/>
-        </p:spPr>
-        <p:txBody>
-          <a:bodyPr wrap="square">
-            <a:spAutoFit/>
-          </a:bodyPr>
-          <a:lstStyle/>
-          <a:p>
-            <a:pPr algn="r" rtl="1"/>
-            <a:r>
-              <a:rPr sz="1000" b="0">
-                <a:solidFill>
-                  <a:srgbClr val="666666"/>
-                </a:solidFill>
-                <a:latin typeface="Arial"/>
-                <a:cs typeface="Arial"/>
-                <a:ea typeface="Calibri"/>
-              </a:rPr>
-              <a:t>Module 02 — Data &amp; AI Engineering Track  |  الوحدة الثانية</a:t>
-            </a:r>
-          </a:p>
-        </p:txBody>
-      </p:sp>
-      <p:sp>
-        <p:nvSpPr>
-          <p:cNvPr id="10" name="TextBox 9"/>
-          <p:cNvSpPr txBox="1"/>
-          <p:nvPr/>
-        </p:nvSpPr>
-        <p:spPr>
-          <a:xfrm>
-            <a:off x="9601200" y="6400800"/>
-            <a:ext cx="1920240" cy="320040"/>
-          </a:xfrm>
-          <a:prstGeom prst="rect">
-            <a:avLst/>
-          </a:prstGeom>
-          <a:noFill/>
-        </p:spPr>
-        <p:txBody>
-          <a:bodyPr wrap="square">
-            <a:spAutoFit/>
-          </a:bodyPr>
-          <a:lstStyle/>
-          <a:p>
-            <a:pPr algn="l" rtl="0"/>
-            <a:r>
-              <a:rPr sz="1000" b="0">
-                <a:solidFill>
-                  <a:srgbClr val="666666"/>
-                </a:solidFill>
-                <a:latin typeface="Calibri"/>
-                <a:cs typeface="Arial"/>
-                <a:ea typeface="Calibri"/>
-              </a:rPr>
-              <a:t>11_  •  7/9</a:t>
+              </a:rPr>
+              <a:t>V11  •  8/9</a:t>
             </a:r>
           </a:p>
         </p:txBody>
@@ -6408,10 +5166,8 @@
                   <a:srgbClr val="1F3B5C"/>
                 </a:solidFill>
                 <a:latin typeface="Arial"/>
-                <a:cs typeface="Arial"/>
-                <a:ea typeface="Calibri"/>
-              </a:rPr>
-              <a:t>إجابات الاختبار / Quiz Answers</a:t>
+              </a:rPr>
+              <a:t>للاستزادة / Further Reading</a:t>
             </a:r>
           </a:p>
         </p:txBody>
@@ -6447,19 +5203,17 @@
               </a:spcAft>
             </a:pPr>
             <a:r>
-              <a:rPr sz="1800">
+              <a:rPr sz="2000">
                 <a:solidFill>
                   <a:srgbClr val="333333"/>
                 </a:solidFill>
                 <a:latin typeface="Arial"/>
-                <a:cs typeface="Arial"/>
-                <a:ea typeface="Calibri"/>
-              </a:rPr>
-              <a:t>• 1. نقطة دخول موحدة تفرض المصادقة والحدود والتسجيل على كل الاستدعاءات.</a:t>
-            </a:r>
-          </a:p>
-          <a:p>
-            <a:pPr algn="r" rtl="0">
+              </a:rPr>
+              <a:t>• توثيق DataHub وApache Atlas.</a:t>
+            </a:r>
+          </a:p>
+          <a:p>
+            <a:pPr algn="l" rtl="0">
               <a:spcBef>
                 <a:spcPts val="200"/>
               </a:spcBef>
@@ -6468,15 +5222,13 @@
               </a:spcAft>
             </a:pPr>
             <a:r>
-              <a:rPr sz="1500">
+              <a:rPr sz="1700">
                 <a:solidFill>
                   <a:srgbClr val="666666"/>
                 </a:solidFill>
                 <a:latin typeface="Calibri"/>
-                <a:cs typeface="Arial"/>
-                <a:ea typeface="Calibri"/>
-              </a:rPr>
-              <a:t>• A single entry point enforcing auth, limits, and logging for all calls.</a:t>
+              </a:rPr>
+              <a:t>• DataHub and Apache Atlas docs.</a:t>
             </a:r>
           </a:p>
           <a:p>
@@ -6489,19 +5241,17 @@
               </a:spcAft>
             </a:pPr>
             <a:r>
-              <a:rPr sz="1800">
+              <a:rPr sz="2000">
                 <a:solidFill>
                   <a:srgbClr val="333333"/>
                 </a:solidFill>
                 <a:latin typeface="Arial"/>
-                <a:cs typeface="Arial"/>
-                <a:ea typeface="Calibri"/>
-              </a:rPr>
-              <a:t>• 2. لتتبع الموجِّهات والإجابات والامتثال والتحقيق في الحوادث.</a:t>
-            </a:r>
-          </a:p>
-          <a:p>
-            <a:pPr algn="r" rtl="0">
+              </a:rPr>
+              <a:t>• المعمارية المرجعية للذكاء التوليدي — McKinsey.</a:t>
+            </a:r>
+          </a:p>
+          <a:p>
+            <a:pPr algn="l" rtl="0">
               <a:spcBef>
                 <a:spcPts val="200"/>
               </a:spcBef>
@@ -6510,57 +5260,13 @@
               </a:spcAft>
             </a:pPr>
             <a:r>
-              <a:rPr sz="1500">
+              <a:rPr sz="1700">
                 <a:solidFill>
                   <a:srgbClr val="666666"/>
                 </a:solidFill>
                 <a:latin typeface="Calibri"/>
-                <a:cs typeface="Arial"/>
-                <a:ea typeface="Calibri"/>
-              </a:rPr>
-              <a:t>• To trace prompts/answers for compliance and investigation.</a:t>
-            </a:r>
-          </a:p>
-          <a:p>
-            <a:pPr algn="r" rtl="1">
-              <a:spcBef>
-                <a:spcPts val="200"/>
-              </a:spcBef>
-              <a:spcAft>
-                <a:spcPts val="1000"/>
-              </a:spcAft>
-            </a:pPr>
-            <a:r>
-              <a:rPr sz="1800">
-                <a:solidFill>
-                  <a:srgbClr val="333333"/>
-                </a:solidFill>
-                <a:latin typeface="Arial"/>
-                <a:cs typeface="Arial"/>
-                <a:ea typeface="Calibri"/>
-              </a:rPr>
-              <a:t>• 3. بوابات تحكم وموافقات مرحلية آلية قبل الإنتاج.</a:t>
-            </a:r>
-          </a:p>
-          <a:p>
-            <a:pPr algn="r" rtl="0">
-              <a:spcBef>
-                <a:spcPts val="200"/>
-              </a:spcBef>
-              <a:spcAft>
-                <a:spcPts val="1000"/>
-              </a:spcAft>
-            </a:pPr>
-            <a:r>
-              <a:rPr sz="1500">
-                <a:solidFill>
-                  <a:srgbClr val="666666"/>
-                </a:solidFill>
-                <a:latin typeface="Calibri"/>
-                <a:cs typeface="Arial"/>
-                <a:ea typeface="Calibri"/>
-              </a:rPr>
-              <a:t>• Automated control gates and approvals before production.</a:t>
+              </a:rPr>
+              <a:t>• GenAI reference architecture — McKinsey.</a:t>
             </a:r>
           </a:p>
         </p:txBody>
@@ -6594,8 +5300,6 @@
                   <a:srgbClr val="666666"/>
                 </a:solidFill>
                 <a:latin typeface="Arial"/>
-                <a:cs typeface="Arial"/>
-                <a:ea typeface="Calibri"/>
               </a:rPr>
               <a:t>Module 02 — Data &amp; AI Engineering Track  |  الوحدة الثانية</a:t>
             </a:r>
@@ -6631,158 +5335,8 @@
                   <a:srgbClr val="666666"/>
                 </a:solidFill>
                 <a:latin typeface="Calibri"/>
-                <a:cs typeface="Arial"/>
-                <a:ea typeface="Calibri"/>
-              </a:rPr>
-              <a:t>V11  •  7/11</a:t>
-            </a:r>
-          </a:p>
-        </p:txBody>
-      </p:sp>
-      <p:sp>
-        <p:nvSpPr>
-          <p:cNvPr id="7" name="TextBox 6"/>
-          <p:cNvSpPr txBox="1"/>
-          <p:nvPr/>
-        </p:nvSpPr>
-        <p:spPr>
-          <a:xfrm>
-            <a:off x="640080" y="6400800"/>
-            <a:ext cx="8686800" cy="320040"/>
-          </a:xfrm>
-          <a:prstGeom prst="rect">
-            <a:avLst/>
-          </a:prstGeom>
-          <a:noFill/>
-        </p:spPr>
-        <p:txBody>
-          <a:bodyPr wrap="square">
-            <a:spAutoFit/>
-          </a:bodyPr>
-          <a:lstStyle/>
-          <a:p>
-            <a:pPr algn="r" rtl="1"/>
-            <a:r>
-              <a:rPr sz="1000" b="0">
-                <a:solidFill>
-                  <a:srgbClr val="666666"/>
-                </a:solidFill>
-                <a:latin typeface="Arial"/>
-                <a:cs typeface="Arial"/>
-                <a:ea typeface="Calibri"/>
-              </a:rPr>
-              <a:t>Module 02 — Data &amp; AI Engineering Track  |  الوحدة الثانية</a:t>
-            </a:r>
-          </a:p>
-        </p:txBody>
-      </p:sp>
-      <p:sp>
-        <p:nvSpPr>
-          <p:cNvPr id="8" name="TextBox 7"/>
-          <p:cNvSpPr txBox="1"/>
-          <p:nvPr/>
-        </p:nvSpPr>
-        <p:spPr>
-          <a:xfrm>
-            <a:off x="9601200" y="6400800"/>
-            <a:ext cx="1920240" cy="320040"/>
-          </a:xfrm>
-          <a:prstGeom prst="rect">
-            <a:avLst/>
-          </a:prstGeom>
-          <a:noFill/>
-        </p:spPr>
-        <p:txBody>
-          <a:bodyPr wrap="square">
-            <a:spAutoFit/>
-          </a:bodyPr>
-          <a:lstStyle/>
-          <a:p>
-            <a:pPr algn="l" rtl="0"/>
-            <a:r>
-              <a:rPr sz="1000" b="0">
-                <a:solidFill>
-                  <a:srgbClr val="666666"/>
-                </a:solidFill>
-                <a:latin typeface="Calibri"/>
-                <a:cs typeface="Arial"/>
-                <a:ea typeface="Calibri"/>
-              </a:rPr>
-              <a:t>11_  •  8/9</a:t>
-            </a:r>
-          </a:p>
-        </p:txBody>
-      </p:sp>
-      <p:sp>
-        <p:nvSpPr>
-          <p:cNvPr id="9" name="TextBox 8"/>
-          <p:cNvSpPr txBox="1"/>
-          <p:nvPr/>
-        </p:nvSpPr>
-        <p:spPr>
-          <a:xfrm>
-            <a:off x="640080" y="6400800"/>
-            <a:ext cx="8686800" cy="320040"/>
-          </a:xfrm>
-          <a:prstGeom prst="rect">
-            <a:avLst/>
-          </a:prstGeom>
-          <a:noFill/>
-        </p:spPr>
-        <p:txBody>
-          <a:bodyPr wrap="square">
-            <a:spAutoFit/>
-          </a:bodyPr>
-          <a:lstStyle/>
-          <a:p>
-            <a:pPr algn="r" rtl="1"/>
-            <a:r>
-              <a:rPr sz="1000" b="0">
-                <a:solidFill>
-                  <a:srgbClr val="666666"/>
-                </a:solidFill>
-                <a:latin typeface="Arial"/>
-                <a:cs typeface="Arial"/>
-                <a:ea typeface="Calibri"/>
-              </a:rPr>
-              <a:t>Module 02 — Data &amp; AI Engineering Track  |  الوحدة الثانية</a:t>
-            </a:r>
-          </a:p>
-        </p:txBody>
-      </p:sp>
-      <p:sp>
-        <p:nvSpPr>
-          <p:cNvPr id="10" name="TextBox 9"/>
-          <p:cNvSpPr txBox="1"/>
-          <p:nvPr/>
-        </p:nvSpPr>
-        <p:spPr>
-          <a:xfrm>
-            <a:off x="9601200" y="6400800"/>
-            <a:ext cx="1920240" cy="320040"/>
-          </a:xfrm>
-          <a:prstGeom prst="rect">
-            <a:avLst/>
-          </a:prstGeom>
-          <a:noFill/>
-        </p:spPr>
-        <p:txBody>
-          <a:bodyPr wrap="square">
-            <a:spAutoFit/>
-          </a:bodyPr>
-          <a:lstStyle/>
-          <a:p>
-            <a:pPr algn="l" rtl="0"/>
-            <a:r>
-              <a:rPr sz="1000" b="0">
-                <a:solidFill>
-                  <a:srgbClr val="666666"/>
-                </a:solidFill>
-                <a:latin typeface="Calibri"/>
-                <a:cs typeface="Arial"/>
-                <a:ea typeface="Calibri"/>
-              </a:rPr>
-              <a:t>11_  •  8/9</a:t>
+              </a:rPr>
+              <a:t>V11  •  9/9</a:t>
             </a:r>
           </a:p>
         </p:txBody>
@@ -6815,22 +5369,57 @@
       <p:grpSpPr/>
       <p:sp>
         <p:nvSpPr>
-          <p:cNvPr id="2" name="Rectangle 1"/>
-          <p:cNvSpPr/>
+          <p:cNvPr id="2" name="TextBox 1"/>
+          <p:cNvSpPr txBox="1"/>
           <p:nvPr/>
         </p:nvSpPr>
         <p:spPr>
           <a:xfrm>
-            <a:off x="0" y="0"/>
-            <a:ext cx="12191695" cy="1005840"/>
+            <a:off x="640080" y="137160"/>
+            <a:ext cx="10972800" cy="640080"/>
           </a:xfrm>
           <a:prstGeom prst="rect">
             <a:avLst/>
           </a:prstGeom>
+          <a:noFill/>
+        </p:spPr>
+        <p:txBody>
+          <a:bodyPr wrap="none">
+            <a:spAutoFit/>
+          </a:bodyPr>
+          <a:lstStyle/>
+          <a:p>
+            <a:pPr algn="r" rtl="1"/>
+            <a:r>
+              <a:rPr sz="3000" b="1">
+                <a:solidFill>
+                  <a:srgbClr val="1F3B5C"/>
+                </a:solidFill>
+                <a:latin typeface="Arial"/>
+              </a:rPr>
+              <a:t>المعمارية المرجعية للذكاء التوليدي / GenAI Reference Architecture</a:t>
+            </a:r>
+          </a:p>
+        </p:txBody>
+      </p:sp>
+      <p:sp>
+        <p:nvSpPr>
+          <p:cNvPr id="3" name="Rounded Rectangle 2"/>
+          <p:cNvSpPr/>
+          <p:nvPr/>
+        </p:nvSpPr>
+        <p:spPr>
+          <a:xfrm>
+            <a:off x="1097280" y="1280160"/>
+            <a:ext cx="9966960" cy="1051560"/>
+          </a:xfrm>
+          <a:prstGeom prst="roundRect">
+            <a:avLst/>
+          </a:prstGeom>
           <a:solidFill>
-            <a:srgbClr val="FFFFFF"/>
+            <a:srgbClr val="DCE6F1"/>
           </a:solidFill>
-          <a:ln w="25400">
+          <a:ln w="12700">
             <a:solidFill>
               <a:srgbClr val="1F4E79"/>
             </a:solidFill>
@@ -6852,23 +5441,245 @@
           </a:fontRef>
         </p:style>
         <p:txBody>
-          <a:bodyPr rtlCol="0" anchor="ctr"/>
-          <a:lstStyle/>
-          <a:p>
-            <a:pPr algn="ctr"/>
-          </a:p>
-        </p:txBody>
-      </p:sp>
-      <p:sp>
-        <p:nvSpPr>
-          <p:cNvPr id="3" name="TextBox 2"/>
+          <a:bodyPr rtlCol="0" anchor="ctr" wrap="square"/>
+          <a:lstStyle/>
+          <a:p>
+            <a:pPr algn="ctr" rtl="1"/>
+            <a:r>
+              <a:rPr sz="1800" b="1">
+                <a:solidFill>
+                  <a:srgbClr val="333333"/>
+                </a:solidFill>
+                <a:latin typeface="Arial"/>
+              </a:rPr>
+              <a:t>أ. بوابة منصة GenAI</a:t>
+            </a:r>
+          </a:p>
+          <a:p>
+            <a:pPr algn="ctr" rtl="0"/>
+            <a:r>
+              <a:rPr sz="1300">
+                <a:solidFill>
+                  <a:srgbClr val="666666"/>
+                </a:solidFill>
+                <a:latin typeface="Calibri"/>
+              </a:rPr>
+              <a:t>A. Platform Portal — POC → MVP → PROD</a:t>
+            </a:r>
+          </a:p>
+        </p:txBody>
+      </p:sp>
+      <p:sp>
+        <p:nvSpPr>
+          <p:cNvPr id="4" name="Rounded Rectangle 3"/>
+          <p:cNvSpPr/>
+          <p:nvPr/>
+        </p:nvSpPr>
+        <p:spPr>
+          <a:xfrm>
+            <a:off x="1097280" y="2487168"/>
+            <a:ext cx="9966960" cy="1051560"/>
+          </a:xfrm>
+          <a:prstGeom prst="roundRect">
+            <a:avLst/>
+          </a:prstGeom>
+          <a:solidFill>
+            <a:srgbClr val="E2EFDA"/>
+          </a:solidFill>
+          <a:ln w="12700">
+            <a:solidFill>
+              <a:srgbClr val="1F4E79"/>
+            </a:solidFill>
+          </a:ln>
+          <a:effectLst/>
+        </p:spPr>
+        <p:style>
+          <a:lnRef idx="1">
+            <a:schemeClr val="accent1"/>
+          </a:lnRef>
+          <a:fillRef idx="3">
+            <a:schemeClr val="accent1"/>
+          </a:fillRef>
+          <a:effectRef idx="2">
+            <a:schemeClr val="accent1"/>
+          </a:effectRef>
+          <a:fontRef idx="minor">
+            <a:schemeClr val="lt1"/>
+          </a:fontRef>
+        </p:style>
+        <p:txBody>
+          <a:bodyPr rtlCol="0" anchor="ctr" wrap="square"/>
+          <a:lstStyle/>
+          <a:p>
+            <a:pPr algn="ctr" rtl="1"/>
+            <a:r>
+              <a:rPr sz="1800" b="1">
+                <a:solidFill>
+                  <a:srgbClr val="333333"/>
+                </a:solidFill>
+                <a:latin typeface="Arial"/>
+              </a:rPr>
+              <a:t>ب. الأتمتة والامتثال</a:t>
+            </a:r>
+          </a:p>
+          <a:p>
+            <a:pPr algn="ctr" rtl="0"/>
+            <a:r>
+              <a:rPr sz="1300">
+                <a:solidFill>
+                  <a:srgbClr val="666666"/>
+                </a:solidFill>
+                <a:latin typeface="Calibri"/>
+              </a:rPr>
+              <a:t>B. Automation &amp; Compliance — CI/CD gates</a:t>
+            </a:r>
+          </a:p>
+        </p:txBody>
+      </p:sp>
+      <p:sp>
+        <p:nvSpPr>
+          <p:cNvPr id="5" name="Rounded Rectangle 4"/>
+          <p:cNvSpPr/>
+          <p:nvPr/>
+        </p:nvSpPr>
+        <p:spPr>
+          <a:xfrm>
+            <a:off x="1097280" y="3694176"/>
+            <a:ext cx="9966960" cy="1051560"/>
+          </a:xfrm>
+          <a:prstGeom prst="roundRect">
+            <a:avLst/>
+          </a:prstGeom>
+          <a:solidFill>
+            <a:srgbClr val="FDE9D9"/>
+          </a:solidFill>
+          <a:ln w="12700">
+            <a:solidFill>
+              <a:srgbClr val="1F4E79"/>
+            </a:solidFill>
+          </a:ln>
+          <a:effectLst/>
+        </p:spPr>
+        <p:style>
+          <a:lnRef idx="1">
+            <a:schemeClr val="accent1"/>
+          </a:lnRef>
+          <a:fillRef idx="3">
+            <a:schemeClr val="accent1"/>
+          </a:fillRef>
+          <a:effectRef idx="2">
+            <a:schemeClr val="accent1"/>
+          </a:effectRef>
+          <a:fontRef idx="minor">
+            <a:schemeClr val="lt1"/>
+          </a:fontRef>
+        </p:style>
+        <p:txBody>
+          <a:bodyPr rtlCol="0" anchor="ctr" wrap="square"/>
+          <a:lstStyle/>
+          <a:p>
+            <a:pPr algn="ctr" rtl="1"/>
+            <a:r>
+              <a:rPr sz="1800" b="1">
+                <a:solidFill>
+                  <a:srgbClr val="333333"/>
+                </a:solidFill>
+                <a:latin typeface="Arial"/>
+              </a:rPr>
+              <a:t>ج. الخدمات المشتركة</a:t>
+            </a:r>
+          </a:p>
+          <a:p>
+            <a:pPr algn="ctr" rtl="0"/>
+            <a:r>
+              <a:rPr sz="1300">
+                <a:solidFill>
+                  <a:srgbClr val="666666"/>
+                </a:solidFill>
+                <a:latin typeface="Calibri"/>
+              </a:rPr>
+              <a:t>C. Shared Services — Gateway, Prompts, Audit, Guardrails</a:t>
+            </a:r>
+          </a:p>
+        </p:txBody>
+      </p:sp>
+      <p:sp>
+        <p:nvSpPr>
+          <p:cNvPr id="6" name="Rounded Rectangle 5"/>
+          <p:cNvSpPr/>
+          <p:nvPr/>
+        </p:nvSpPr>
+        <p:spPr>
+          <a:xfrm>
+            <a:off x="1097280" y="4901184"/>
+            <a:ext cx="9966960" cy="1051560"/>
+          </a:xfrm>
+          <a:prstGeom prst="roundRect">
+            <a:avLst/>
+          </a:prstGeom>
+          <a:solidFill>
+            <a:srgbClr val="EDEDED"/>
+          </a:solidFill>
+          <a:ln w="12700">
+            <a:solidFill>
+              <a:srgbClr val="1F4E79"/>
+            </a:solidFill>
+          </a:ln>
+          <a:effectLst/>
+        </p:spPr>
+        <p:style>
+          <a:lnRef idx="1">
+            <a:schemeClr val="accent1"/>
+          </a:lnRef>
+          <a:fillRef idx="3">
+            <a:schemeClr val="accent1"/>
+          </a:fillRef>
+          <a:effectRef idx="2">
+            <a:schemeClr val="accent1"/>
+          </a:effectRef>
+          <a:fontRef idx="minor">
+            <a:schemeClr val="lt1"/>
+          </a:fontRef>
+        </p:style>
+        <p:txBody>
+          <a:bodyPr rtlCol="0" anchor="ctr" wrap="square"/>
+          <a:lstStyle/>
+          <a:p>
+            <a:pPr algn="ctr" rtl="1"/>
+            <a:r>
+              <a:rPr sz="1800" b="1">
+                <a:solidFill>
+                  <a:srgbClr val="333333"/>
+                </a:solidFill>
+                <a:latin typeface="Arial"/>
+              </a:rPr>
+              <a:t>د. الحوكمة والمراقبة</a:t>
+            </a:r>
+          </a:p>
+          <a:p>
+            <a:pPr algn="ctr" rtl="0"/>
+            <a:r>
+              <a:rPr sz="1300">
+                <a:solidFill>
+                  <a:srgbClr val="666666"/>
+                </a:solidFill>
+                <a:latin typeface="Calibri"/>
+              </a:rPr>
+              <a:t>D. Governance &amp; Monitoring — Responsible AI, FinOps</a:t>
+            </a:r>
+          </a:p>
+        </p:txBody>
+      </p:sp>
+      <p:sp>
+        <p:nvSpPr>
+          <p:cNvPr id="7" name="TextBox 6"/>
           <p:cNvSpPr txBox="1"/>
           <p:nvPr/>
         </p:nvSpPr>
         <p:spPr>
           <a:xfrm>
-            <a:off x="640080" y="182880"/>
-            <a:ext cx="10972800" cy="640080"/>
+            <a:off x="640080" y="6126480"/>
+            <a:ext cx="10972800" cy="548640"/>
           </a:xfrm>
           <a:prstGeom prst="rect">
             <a:avLst/>
@@ -6883,29 +5694,33 @@
           <a:p>
             <a:pPr algn="r" rtl="1"/>
             <a:r>
-              <a:rPr sz="3200" b="1">
-                <a:solidFill>
-                  <a:srgbClr val="1F3B5C"/>
+              <a:rPr sz="1400">
+                <a:solidFill>
+                  <a:srgbClr val="666666"/>
                 </a:solidFill>
                 <a:latin typeface="Arial"/>
-                <a:cs typeface="Arial"/>
-                <a:ea typeface="Calibri"/>
-              </a:rPr>
-              <a:t>للاستزادة / Further Reading</a:t>
-            </a:r>
-          </a:p>
-        </p:txBody>
-      </p:sp>
-      <p:sp>
-        <p:nvSpPr>
-          <p:cNvPr id="4" name="TextBox 3"/>
+              </a:rPr>
+              <a:t>النمط المرجعي المؤسسي (McKinsey) — نافذة موحدة فوق خدمات مشتركة محكومة.</a:t>
+            </a:r>
+          </a:p>
+          <a:p>
+            <a:pPr algn="r" rtl="0"/>
+            <a:r>
+              <a:t>Enterprise reference pattern (McKinsey) — a unified pane over governed shared services.</a:t>
+            </a:r>
+          </a:p>
+        </p:txBody>
+      </p:sp>
+      <p:sp>
+        <p:nvSpPr>
+          <p:cNvPr id="8" name="TextBox 7"/>
           <p:cNvSpPr txBox="1"/>
           <p:nvPr/>
         </p:nvSpPr>
         <p:spPr>
           <a:xfrm>
-            <a:off x="640080" y="1280160"/>
-            <a:ext cx="10972800" cy="5212080"/>
+            <a:off x="640080" y="6400800"/>
+            <a:ext cx="8686800" cy="320040"/>
           </a:xfrm>
           <a:prstGeom prst="rect">
             <a:avLst/>
@@ -6918,101 +5733,29 @@
           </a:bodyPr>
           <a:lstStyle/>
           <a:p>
-            <a:pPr algn="r" rtl="1">
-              <a:spcBef>
-                <a:spcPts val="200"/>
-              </a:spcBef>
-              <a:spcAft>
-                <a:spcPts val="1000"/>
-              </a:spcAft>
-            </a:pPr>
-            <a:r>
-              <a:rPr sz="2000">
-                <a:solidFill>
-                  <a:srgbClr val="333333"/>
+            <a:pPr algn="r" rtl="1"/>
+            <a:r>
+              <a:rPr sz="1000" b="0">
+                <a:solidFill>
+                  <a:srgbClr val="666666"/>
                 </a:solidFill>
                 <a:latin typeface="Arial"/>
-                <a:cs typeface="Arial"/>
-                <a:ea typeface="Calibri"/>
-              </a:rPr>
-              <a:t>• توثيق DataHub وApache Atlas.</a:t>
-            </a:r>
-          </a:p>
-          <a:p>
-            <a:pPr algn="r" rtl="0">
-              <a:spcBef>
-                <a:spcPts val="200"/>
-              </a:spcBef>
-              <a:spcAft>
-                <a:spcPts val="1000"/>
-              </a:spcAft>
-            </a:pPr>
-            <a:r>
-              <a:rPr sz="1700">
-                <a:solidFill>
-                  <a:srgbClr val="666666"/>
-                </a:solidFill>
-                <a:latin typeface="Calibri"/>
-                <a:cs typeface="Arial"/>
-                <a:ea typeface="Calibri"/>
-              </a:rPr>
-              <a:t>• DataHub and Apache Atlas docs.</a:t>
-            </a:r>
-          </a:p>
-          <a:p>
-            <a:pPr algn="r" rtl="1">
-              <a:spcBef>
-                <a:spcPts val="200"/>
-              </a:spcBef>
-              <a:spcAft>
-                <a:spcPts val="1000"/>
-              </a:spcAft>
-            </a:pPr>
-            <a:r>
-              <a:rPr sz="2000">
-                <a:solidFill>
-                  <a:srgbClr val="333333"/>
-                </a:solidFill>
-                <a:latin typeface="Arial"/>
-                <a:cs typeface="Arial"/>
-                <a:ea typeface="Calibri"/>
-              </a:rPr>
-              <a:t>• المعمارية المرجعية للذكاء التوليدي — McKinsey.</a:t>
-            </a:r>
-          </a:p>
-          <a:p>
-            <a:pPr algn="r" rtl="0">
-              <a:spcBef>
-                <a:spcPts val="200"/>
-              </a:spcBef>
-              <a:spcAft>
-                <a:spcPts val="1000"/>
-              </a:spcAft>
-            </a:pPr>
-            <a:r>
-              <a:rPr sz="1700">
-                <a:solidFill>
-                  <a:srgbClr val="666666"/>
-                </a:solidFill>
-                <a:latin typeface="Calibri"/>
-                <a:cs typeface="Arial"/>
-                <a:ea typeface="Calibri"/>
-              </a:rPr>
-              <a:t>• GenAI reference architecture — McKinsey.</a:t>
-            </a:r>
-          </a:p>
-        </p:txBody>
-      </p:sp>
-      <p:sp>
-        <p:nvSpPr>
-          <p:cNvPr id="5" name="TextBox 4"/>
+              </a:rPr>
+              <a:t>Module 02 — Data &amp; AI Engineering Track  |  الوحدة الثانية</a:t>
+            </a:r>
+          </a:p>
+        </p:txBody>
+      </p:sp>
+      <p:sp>
+        <p:nvSpPr>
+          <p:cNvPr id="9" name="TextBox 8"/>
           <p:cNvSpPr txBox="1"/>
           <p:nvPr/>
         </p:nvSpPr>
         <p:spPr>
           <a:xfrm>
-            <a:off x="640080" y="6400800"/>
-            <a:ext cx="8686800" cy="320040"/>
+            <a:off x="9601200" y="6400800"/>
+            <a:ext cx="1920240" cy="320040"/>
           </a:xfrm>
           <a:prstGeom prst="rect">
             <a:avLst/>
@@ -7025,202 +5768,15 @@
           </a:bodyPr>
           <a:lstStyle/>
           <a:p>
-            <a:pPr algn="r" rtl="1"/>
+            <a:pPr algn="l" rtl="0"/>
             <a:r>
               <a:rPr sz="1000" b="0">
                 <a:solidFill>
                   <a:srgbClr val="666666"/>
                 </a:solidFill>
-                <a:latin typeface="Arial"/>
-                <a:cs typeface="Arial"/>
-                <a:ea typeface="Calibri"/>
-              </a:rPr>
-              <a:t>Module 02 — Data &amp; AI Engineering Track  |  الوحدة الثانية</a:t>
-            </a:r>
-          </a:p>
-        </p:txBody>
-      </p:sp>
-      <p:sp>
-        <p:nvSpPr>
-          <p:cNvPr id="6" name="TextBox 5"/>
-          <p:cNvSpPr txBox="1"/>
-          <p:nvPr/>
-        </p:nvSpPr>
-        <p:spPr>
-          <a:xfrm>
-            <a:off x="9601200" y="6400800"/>
-            <a:ext cx="1920240" cy="320040"/>
-          </a:xfrm>
-          <a:prstGeom prst="rect">
-            <a:avLst/>
-          </a:prstGeom>
-          <a:noFill/>
-        </p:spPr>
-        <p:txBody>
-          <a:bodyPr wrap="square">
-            <a:spAutoFit/>
-          </a:bodyPr>
-          <a:lstStyle/>
-          <a:p>
-            <a:pPr algn="l" rtl="0"/>
-            <a:r>
-              <a:rPr sz="1000" b="0">
-                <a:solidFill>
-                  <a:srgbClr val="666666"/>
-                </a:solidFill>
                 <a:latin typeface="Calibri"/>
-                <a:cs typeface="Arial"/>
-                <a:ea typeface="Calibri"/>
-              </a:rPr>
-              <a:t>V11  •  8/11</a:t>
-            </a:r>
-          </a:p>
-        </p:txBody>
-      </p:sp>
-      <p:sp>
-        <p:nvSpPr>
-          <p:cNvPr id="7" name="TextBox 6"/>
-          <p:cNvSpPr txBox="1"/>
-          <p:nvPr/>
-        </p:nvSpPr>
-        <p:spPr>
-          <a:xfrm>
-            <a:off x="640080" y="6400800"/>
-            <a:ext cx="8686800" cy="320040"/>
-          </a:xfrm>
-          <a:prstGeom prst="rect">
-            <a:avLst/>
-          </a:prstGeom>
-          <a:noFill/>
-        </p:spPr>
-        <p:txBody>
-          <a:bodyPr wrap="square">
-            <a:spAutoFit/>
-          </a:bodyPr>
-          <a:lstStyle/>
-          <a:p>
-            <a:pPr algn="r" rtl="1"/>
-            <a:r>
-              <a:rPr sz="1000" b="0">
-                <a:solidFill>
-                  <a:srgbClr val="666666"/>
-                </a:solidFill>
-                <a:latin typeface="Arial"/>
-                <a:cs typeface="Arial"/>
-                <a:ea typeface="Calibri"/>
-              </a:rPr>
-              <a:t>Module 02 — Data &amp; AI Engineering Track  |  الوحدة الثانية</a:t>
-            </a:r>
-          </a:p>
-        </p:txBody>
-      </p:sp>
-      <p:sp>
-        <p:nvSpPr>
-          <p:cNvPr id="8" name="TextBox 7"/>
-          <p:cNvSpPr txBox="1"/>
-          <p:nvPr/>
-        </p:nvSpPr>
-        <p:spPr>
-          <a:xfrm>
-            <a:off x="9601200" y="6400800"/>
-            <a:ext cx="1920240" cy="320040"/>
-          </a:xfrm>
-          <a:prstGeom prst="rect">
-            <a:avLst/>
-          </a:prstGeom>
-          <a:noFill/>
-        </p:spPr>
-        <p:txBody>
-          <a:bodyPr wrap="square">
-            <a:spAutoFit/>
-          </a:bodyPr>
-          <a:lstStyle/>
-          <a:p>
-            <a:pPr algn="l" rtl="0"/>
-            <a:r>
-              <a:rPr sz="1000" b="0">
-                <a:solidFill>
-                  <a:srgbClr val="666666"/>
-                </a:solidFill>
-                <a:latin typeface="Calibri"/>
-                <a:cs typeface="Arial"/>
-                <a:ea typeface="Calibri"/>
-              </a:rPr>
-              <a:t>11_  •  9/9</a:t>
-            </a:r>
-          </a:p>
-        </p:txBody>
-      </p:sp>
-      <p:sp>
-        <p:nvSpPr>
-          <p:cNvPr id="9" name="TextBox 8"/>
-          <p:cNvSpPr txBox="1"/>
-          <p:nvPr/>
-        </p:nvSpPr>
-        <p:spPr>
-          <a:xfrm>
-            <a:off x="640080" y="6400800"/>
-            <a:ext cx="8686800" cy="320040"/>
-          </a:xfrm>
-          <a:prstGeom prst="rect">
-            <a:avLst/>
-          </a:prstGeom>
-          <a:noFill/>
-        </p:spPr>
-        <p:txBody>
-          <a:bodyPr wrap="square">
-            <a:spAutoFit/>
-          </a:bodyPr>
-          <a:lstStyle/>
-          <a:p>
-            <a:pPr algn="r" rtl="1"/>
-            <a:r>
-              <a:rPr sz="1000" b="0">
-                <a:solidFill>
-                  <a:srgbClr val="666666"/>
-                </a:solidFill>
-                <a:latin typeface="Arial"/>
-                <a:cs typeface="Arial"/>
-                <a:ea typeface="Calibri"/>
-              </a:rPr>
-              <a:t>Module 02 — Data &amp; AI Engineering Track  |  الوحدة الثانية</a:t>
-            </a:r>
-          </a:p>
-        </p:txBody>
-      </p:sp>
-      <p:sp>
-        <p:nvSpPr>
-          <p:cNvPr id="10" name="TextBox 9"/>
-          <p:cNvSpPr txBox="1"/>
-          <p:nvPr/>
-        </p:nvSpPr>
-        <p:spPr>
-          <a:xfrm>
-            <a:off x="9601200" y="6400800"/>
-            <a:ext cx="1920240" cy="320040"/>
-          </a:xfrm>
-          <a:prstGeom prst="rect">
-            <a:avLst/>
-          </a:prstGeom>
-          <a:noFill/>
-        </p:spPr>
-        <p:txBody>
-          <a:bodyPr wrap="square">
-            <a:spAutoFit/>
-          </a:bodyPr>
-          <a:lstStyle/>
-          <a:p>
-            <a:pPr algn="l" rtl="0"/>
-            <a:r>
-              <a:rPr sz="1000" b="0">
-                <a:solidFill>
-                  <a:srgbClr val="666666"/>
-                </a:solidFill>
-                <a:latin typeface="Calibri"/>
-                <a:cs typeface="Arial"/>
-                <a:ea typeface="Calibri"/>
-              </a:rPr>
-              <a:t>11_  •  9/9</a:t>
+              </a:rPr>
+              <a:t>V11  •  6/9</a:t>
             </a:r>
           </a:p>
         </p:txBody>

--- a/output/Module02_V11_Updated.pptx
+++ b/output/Module02_V11_Updated.pptx
@@ -8,9 +8,10 @@
     <p:sldId id="256" r:id="rId7"/>
     <p:sldId id="257" r:id="rId8"/>
     <p:sldId id="258" r:id="rId9"/>
+    <p:sldId id="264" r:id="rId15"/>
     <p:sldId id="259" r:id="rId10"/>
     <p:sldId id="260" r:id="rId11"/>
-    <p:sldId id="264" r:id="rId15"/>
+    <p:sldId id="265" r:id="rId16"/>
     <p:sldId id="261" r:id="rId12"/>
     <p:sldId id="262" r:id="rId13"/>
     <p:sldId id="263" r:id="rId14"/>
@@ -3309,7 +3310,447 @@
                 </a:solidFill>
                 <a:latin typeface="Calibri"/>
               </a:rPr>
-              <a:t>V11  •  1/9</a:t>
+              <a:t>V11  •  1/10</a:t>
+            </a:r>
+          </a:p>
+        </p:txBody>
+      </p:sp>
+    </p:spTree>
+  </p:cSld>
+  <p:clrMapOvr>
+    <a:masterClrMapping/>
+  </p:clrMapOvr>
+</p:sld>
+</file>
+
+<file path=ppt/slides/slide10.xml><?xml version="1.0" encoding="utf-8"?>
+<p:sld xmlns:a="http://schemas.openxmlformats.org/drawingml/2006/main" xmlns:p="http://schemas.openxmlformats.org/presentationml/2006/main" xmlns:r="http://schemas.openxmlformats.org/officeDocument/2006/relationships">
+  <p:cSld>
+    <p:bg>
+      <p:bgPr>
+        <a:solidFill>
+          <a:srgbClr val="FFFFFF"/>
+        </a:solidFill>
+        <a:effectLst/>
+      </p:bgPr>
+    </p:bg>
+    <p:spTree>
+      <p:nvGrpSpPr>
+        <p:cNvPr id="1" name=""/>
+        <p:cNvGrpSpPr/>
+        <p:nvPr/>
+      </p:nvGrpSpPr>
+      <p:grpSpPr/>
+      <p:sp>
+        <p:nvSpPr>
+          <p:cNvPr id="2" name="TextBox 1"/>
+          <p:cNvSpPr txBox="1"/>
+          <p:nvPr/>
+        </p:nvSpPr>
+        <p:spPr>
+          <a:xfrm>
+            <a:off x="640080" y="137160"/>
+            <a:ext cx="10972800" cy="640080"/>
+          </a:xfrm>
+          <a:prstGeom prst="rect">
+            <a:avLst/>
+          </a:prstGeom>
+          <a:noFill/>
+        </p:spPr>
+        <p:txBody>
+          <a:bodyPr wrap="none">
+            <a:spAutoFit/>
+          </a:bodyPr>
+          <a:lstStyle/>
+          <a:p>
+            <a:pPr algn="r" rtl="1"/>
+            <a:r>
+              <a:rPr sz="3000" b="1">
+                <a:solidFill>
+                  <a:srgbClr val="1F3B5C"/>
+                </a:solidFill>
+                <a:latin typeface="Arial"/>
+              </a:rPr>
+              <a:t>المعمارية المرجعية للذكاء التوليدي / GenAI Reference Architecture</a:t>
+            </a:r>
+          </a:p>
+        </p:txBody>
+      </p:sp>
+      <p:sp>
+        <p:nvSpPr>
+          <p:cNvPr id="3" name="Rounded Rectangle 2"/>
+          <p:cNvSpPr/>
+          <p:nvPr/>
+        </p:nvSpPr>
+        <p:spPr>
+          <a:xfrm>
+            <a:off x="1097280" y="1280160"/>
+            <a:ext cx="9966960" cy="1051560"/>
+          </a:xfrm>
+          <a:prstGeom prst="roundRect">
+            <a:avLst/>
+          </a:prstGeom>
+          <a:solidFill>
+            <a:srgbClr val="DCE6F1"/>
+          </a:solidFill>
+          <a:ln w="12700">
+            <a:solidFill>
+              <a:srgbClr val="1F4E79"/>
+            </a:solidFill>
+          </a:ln>
+          <a:effectLst/>
+        </p:spPr>
+        <p:style>
+          <a:lnRef idx="1">
+            <a:schemeClr val="accent1"/>
+          </a:lnRef>
+          <a:fillRef idx="3">
+            <a:schemeClr val="accent1"/>
+          </a:fillRef>
+          <a:effectRef idx="2">
+            <a:schemeClr val="accent1"/>
+          </a:effectRef>
+          <a:fontRef idx="minor">
+            <a:schemeClr val="lt1"/>
+          </a:fontRef>
+        </p:style>
+        <p:txBody>
+          <a:bodyPr rtlCol="0" anchor="ctr" wrap="square"/>
+          <a:lstStyle/>
+          <a:p>
+            <a:pPr algn="ctr" rtl="1"/>
+            <a:r>
+              <a:rPr sz="1800" b="1">
+                <a:solidFill>
+                  <a:srgbClr val="333333"/>
+                </a:solidFill>
+                <a:latin typeface="Arial"/>
+              </a:rPr>
+              <a:t>أ. بوابة منصة GenAI</a:t>
+            </a:r>
+          </a:p>
+          <a:p>
+            <a:pPr algn="ctr" rtl="0"/>
+            <a:r>
+              <a:rPr sz="1300">
+                <a:solidFill>
+                  <a:srgbClr val="666666"/>
+                </a:solidFill>
+                <a:latin typeface="Calibri"/>
+              </a:rPr>
+              <a:t>A. Platform Portal — POC → MVP → PROD</a:t>
+            </a:r>
+          </a:p>
+        </p:txBody>
+      </p:sp>
+      <p:sp>
+        <p:nvSpPr>
+          <p:cNvPr id="4" name="Rounded Rectangle 3"/>
+          <p:cNvSpPr/>
+          <p:nvPr/>
+        </p:nvSpPr>
+        <p:spPr>
+          <a:xfrm>
+            <a:off x="1097280" y="2487168"/>
+            <a:ext cx="9966960" cy="1051560"/>
+          </a:xfrm>
+          <a:prstGeom prst="roundRect">
+            <a:avLst/>
+          </a:prstGeom>
+          <a:solidFill>
+            <a:srgbClr val="E2EFDA"/>
+          </a:solidFill>
+          <a:ln w="12700">
+            <a:solidFill>
+              <a:srgbClr val="1F4E79"/>
+            </a:solidFill>
+          </a:ln>
+          <a:effectLst/>
+        </p:spPr>
+        <p:style>
+          <a:lnRef idx="1">
+            <a:schemeClr val="accent1"/>
+          </a:lnRef>
+          <a:fillRef idx="3">
+            <a:schemeClr val="accent1"/>
+          </a:fillRef>
+          <a:effectRef idx="2">
+            <a:schemeClr val="accent1"/>
+          </a:effectRef>
+          <a:fontRef idx="minor">
+            <a:schemeClr val="lt1"/>
+          </a:fontRef>
+        </p:style>
+        <p:txBody>
+          <a:bodyPr rtlCol="0" anchor="ctr" wrap="square"/>
+          <a:lstStyle/>
+          <a:p>
+            <a:pPr algn="ctr" rtl="1"/>
+            <a:r>
+              <a:rPr sz="1800" b="1">
+                <a:solidFill>
+                  <a:srgbClr val="333333"/>
+                </a:solidFill>
+                <a:latin typeface="Arial"/>
+              </a:rPr>
+              <a:t>ب. الأتمتة والامتثال</a:t>
+            </a:r>
+          </a:p>
+          <a:p>
+            <a:pPr algn="ctr" rtl="0"/>
+            <a:r>
+              <a:rPr sz="1300">
+                <a:solidFill>
+                  <a:srgbClr val="666666"/>
+                </a:solidFill>
+                <a:latin typeface="Calibri"/>
+              </a:rPr>
+              <a:t>B. Automation &amp; Compliance — CI/CD gates</a:t>
+            </a:r>
+          </a:p>
+        </p:txBody>
+      </p:sp>
+      <p:sp>
+        <p:nvSpPr>
+          <p:cNvPr id="5" name="Rounded Rectangle 4"/>
+          <p:cNvSpPr/>
+          <p:nvPr/>
+        </p:nvSpPr>
+        <p:spPr>
+          <a:xfrm>
+            <a:off x="1097280" y="3694176"/>
+            <a:ext cx="9966960" cy="1051560"/>
+          </a:xfrm>
+          <a:prstGeom prst="roundRect">
+            <a:avLst/>
+          </a:prstGeom>
+          <a:solidFill>
+            <a:srgbClr val="FDE9D9"/>
+          </a:solidFill>
+          <a:ln w="12700">
+            <a:solidFill>
+              <a:srgbClr val="1F4E79"/>
+            </a:solidFill>
+          </a:ln>
+          <a:effectLst/>
+        </p:spPr>
+        <p:style>
+          <a:lnRef idx="1">
+            <a:schemeClr val="accent1"/>
+          </a:lnRef>
+          <a:fillRef idx="3">
+            <a:schemeClr val="accent1"/>
+          </a:fillRef>
+          <a:effectRef idx="2">
+            <a:schemeClr val="accent1"/>
+          </a:effectRef>
+          <a:fontRef idx="minor">
+            <a:schemeClr val="lt1"/>
+          </a:fontRef>
+        </p:style>
+        <p:txBody>
+          <a:bodyPr rtlCol="0" anchor="ctr" wrap="square"/>
+          <a:lstStyle/>
+          <a:p>
+            <a:pPr algn="ctr" rtl="1"/>
+            <a:r>
+              <a:rPr sz="1800" b="1">
+                <a:solidFill>
+                  <a:srgbClr val="333333"/>
+                </a:solidFill>
+                <a:latin typeface="Arial"/>
+              </a:rPr>
+              <a:t>ج. الخدمات المشتركة</a:t>
+            </a:r>
+          </a:p>
+          <a:p>
+            <a:pPr algn="ctr" rtl="0"/>
+            <a:r>
+              <a:rPr sz="1300">
+                <a:solidFill>
+                  <a:srgbClr val="666666"/>
+                </a:solidFill>
+                <a:latin typeface="Calibri"/>
+              </a:rPr>
+              <a:t>C. Shared Services — Gateway, Prompts, Audit, Guardrails</a:t>
+            </a:r>
+          </a:p>
+        </p:txBody>
+      </p:sp>
+      <p:sp>
+        <p:nvSpPr>
+          <p:cNvPr id="6" name="Rounded Rectangle 5"/>
+          <p:cNvSpPr/>
+          <p:nvPr/>
+        </p:nvSpPr>
+        <p:spPr>
+          <a:xfrm>
+            <a:off x="1097280" y="4901184"/>
+            <a:ext cx="9966960" cy="1051560"/>
+          </a:xfrm>
+          <a:prstGeom prst="roundRect">
+            <a:avLst/>
+          </a:prstGeom>
+          <a:solidFill>
+            <a:srgbClr val="EDEDED"/>
+          </a:solidFill>
+          <a:ln w="12700">
+            <a:solidFill>
+              <a:srgbClr val="1F4E79"/>
+            </a:solidFill>
+          </a:ln>
+          <a:effectLst/>
+        </p:spPr>
+        <p:style>
+          <a:lnRef idx="1">
+            <a:schemeClr val="accent1"/>
+          </a:lnRef>
+          <a:fillRef idx="3">
+            <a:schemeClr val="accent1"/>
+          </a:fillRef>
+          <a:effectRef idx="2">
+            <a:schemeClr val="accent1"/>
+          </a:effectRef>
+          <a:fontRef idx="minor">
+            <a:schemeClr val="lt1"/>
+          </a:fontRef>
+        </p:style>
+        <p:txBody>
+          <a:bodyPr rtlCol="0" anchor="ctr" wrap="square"/>
+          <a:lstStyle/>
+          <a:p>
+            <a:pPr algn="ctr" rtl="1"/>
+            <a:r>
+              <a:rPr sz="1800" b="1">
+                <a:solidFill>
+                  <a:srgbClr val="333333"/>
+                </a:solidFill>
+                <a:latin typeface="Arial"/>
+              </a:rPr>
+              <a:t>د. الحوكمة والمراقبة</a:t>
+            </a:r>
+          </a:p>
+          <a:p>
+            <a:pPr algn="ctr" rtl="0"/>
+            <a:r>
+              <a:rPr sz="1300">
+                <a:solidFill>
+                  <a:srgbClr val="666666"/>
+                </a:solidFill>
+                <a:latin typeface="Calibri"/>
+              </a:rPr>
+              <a:t>D. Governance &amp; Monitoring — Responsible AI, FinOps</a:t>
+            </a:r>
+          </a:p>
+        </p:txBody>
+      </p:sp>
+      <p:sp>
+        <p:nvSpPr>
+          <p:cNvPr id="7" name="TextBox 6"/>
+          <p:cNvSpPr txBox="1"/>
+          <p:nvPr/>
+        </p:nvSpPr>
+        <p:spPr>
+          <a:xfrm>
+            <a:off x="640080" y="6126480"/>
+            <a:ext cx="10972800" cy="548640"/>
+          </a:xfrm>
+          <a:prstGeom prst="rect">
+            <a:avLst/>
+          </a:prstGeom>
+          <a:noFill/>
+        </p:spPr>
+        <p:txBody>
+          <a:bodyPr wrap="square">
+            <a:spAutoFit/>
+          </a:bodyPr>
+          <a:lstStyle/>
+          <a:p>
+            <a:pPr algn="r" rtl="1"/>
+            <a:r>
+              <a:rPr sz="1400">
+                <a:solidFill>
+                  <a:srgbClr val="666666"/>
+                </a:solidFill>
+                <a:latin typeface="Arial"/>
+              </a:rPr>
+              <a:t>النمط المرجعي المؤسسي (McKinsey) — نافذة موحدة فوق خدمات مشتركة محكومة.</a:t>
+            </a:r>
+          </a:p>
+          <a:p>
+            <a:pPr algn="r" rtl="0"/>
+            <a:r>
+              <a:t>Enterprise reference pattern (McKinsey) — a unified pane over governed shared services.</a:t>
+            </a:r>
+          </a:p>
+        </p:txBody>
+      </p:sp>
+      <p:sp>
+        <p:nvSpPr>
+          <p:cNvPr id="8" name="TextBox 7"/>
+          <p:cNvSpPr txBox="1"/>
+          <p:nvPr/>
+        </p:nvSpPr>
+        <p:spPr>
+          <a:xfrm>
+            <a:off x="640080" y="6400800"/>
+            <a:ext cx="8686800" cy="320040"/>
+          </a:xfrm>
+          <a:prstGeom prst="rect">
+            <a:avLst/>
+          </a:prstGeom>
+          <a:noFill/>
+        </p:spPr>
+        <p:txBody>
+          <a:bodyPr wrap="square">
+            <a:spAutoFit/>
+          </a:bodyPr>
+          <a:lstStyle/>
+          <a:p>
+            <a:pPr algn="r" rtl="1"/>
+            <a:r>
+              <a:rPr sz="1000" b="0">
+                <a:solidFill>
+                  <a:srgbClr val="666666"/>
+                </a:solidFill>
+                <a:latin typeface="Arial"/>
+              </a:rPr>
+              <a:t>Module 02 — Data &amp; AI Engineering Track  |  الوحدة الثانية</a:t>
+            </a:r>
+          </a:p>
+        </p:txBody>
+      </p:sp>
+      <p:sp>
+        <p:nvSpPr>
+          <p:cNvPr id="9" name="TextBox 8"/>
+          <p:cNvSpPr txBox="1"/>
+          <p:nvPr/>
+        </p:nvSpPr>
+        <p:spPr>
+          <a:xfrm>
+            <a:off x="9601200" y="6400800"/>
+            <a:ext cx="1920240" cy="320040"/>
+          </a:xfrm>
+          <a:prstGeom prst="rect">
+            <a:avLst/>
+          </a:prstGeom>
+          <a:noFill/>
+        </p:spPr>
+        <p:txBody>
+          <a:bodyPr wrap="square">
+            <a:spAutoFit/>
+          </a:bodyPr>
+          <a:lstStyle/>
+          <a:p>
+            <a:pPr algn="l" rtl="0"/>
+            <a:r>
+              <a:rPr sz="1000" b="0">
+                <a:solidFill>
+                  <a:srgbClr val="666666"/>
+                </a:solidFill>
+                <a:latin typeface="Calibri"/>
+              </a:rPr>
+              <a:t>V11  •  7/10</a:t>
             </a:r>
           </a:p>
         </p:txBody>
@@ -3604,7 +4045,7 @@
                 </a:solidFill>
                 <a:latin typeface="Calibri"/>
               </a:rPr>
-              <a:t>V11  •  2/9</a:t>
+              <a:t>V11  •  2/10</a:t>
             </a:r>
           </a:p>
         </p:txBody>
@@ -3880,7 +4321,7 @@
                 </a:solidFill>
                 <a:latin typeface="Calibri"/>
               </a:rPr>
-              <a:t>V11  •  3/9</a:t>
+              <a:t>V11  •  3/10</a:t>
             </a:r>
           </a:p>
         </p:txBody>
@@ -4156,7 +4597,7 @@
                 </a:solidFill>
                 <a:latin typeface="Calibri"/>
               </a:rPr>
-              <a:t>V11  •  4/9</a:t>
+              <a:t>V11  •  5/10</a:t>
             </a:r>
           </a:p>
         </p:txBody>
@@ -4432,7 +4873,7 @@
                 </a:solidFill>
                 <a:latin typeface="Calibri"/>
               </a:rPr>
-              <a:t>V11  •  5/9</a:t>
+              <a:t>V11  •  6/10</a:t>
             </a:r>
           </a:p>
         </p:txBody>
@@ -4746,7 +5187,7 @@
                 </a:solidFill>
                 <a:latin typeface="Calibri"/>
               </a:rPr>
-              <a:t>V11  •  7/9</a:t>
+              <a:t>V11  •  8/10</a:t>
             </a:r>
           </a:p>
         </p:txBody>
@@ -5060,7 +5501,7 @@
                 </a:solidFill>
                 <a:latin typeface="Calibri"/>
               </a:rPr>
-              <a:t>V11  •  8/9</a:t>
+              <a:t>V11  •  9/10</a:t>
             </a:r>
           </a:p>
         </p:txBody>
@@ -5336,7 +5777,7 @@
                 </a:solidFill>
                 <a:latin typeface="Calibri"/>
               </a:rPr>
-              <a:t>V11  •  9/9</a:t>
+              <a:t>V11  •  10/10</a:t>
             </a:r>
           </a:p>
         </p:txBody>
@@ -5397,7 +5838,7 @@
                 </a:solidFill>
                 <a:latin typeface="Arial"/>
               </a:rPr>
-              <a:t>المعمارية المرجعية للذكاء التوليدي / GenAI Reference Architecture</a:t>
+              <a:t>خريطة سلسلة العهدة / Data Lineage Map</a:t>
             </a:r>
           </a:p>
         </p:txBody>
@@ -5410,14 +5851,14 @@
         </p:nvSpPr>
         <p:spPr>
           <a:xfrm>
-            <a:off x="1097280" y="1280160"/>
-            <a:ext cx="9966960" cy="1051560"/>
+            <a:off x="594360" y="1874519"/>
+            <a:ext cx="2560320" cy="868680"/>
           </a:xfrm>
           <a:prstGeom prst="roundRect">
             <a:avLst/>
           </a:prstGeom>
           <a:solidFill>
-            <a:srgbClr val="DCE6F1"/>
+            <a:srgbClr val="EDEDED"/>
           </a:solidFill>
           <a:ln w="12700">
             <a:solidFill>
@@ -5446,25 +5887,25 @@
           <a:p>
             <a:pPr algn="ctr" rtl="1"/>
             <a:r>
-              <a:rPr sz="1800" b="1">
+              <a:rPr sz="1600" b="1">
                 <a:solidFill>
                   <a:srgbClr val="333333"/>
                 </a:solidFill>
                 <a:latin typeface="Arial"/>
               </a:rPr>
-              <a:t>أ. بوابة منصة GenAI</a:t>
+              <a:t>مصدر</a:t>
             </a:r>
           </a:p>
           <a:p>
             <a:pPr algn="ctr" rtl="0"/>
             <a:r>
-              <a:rPr sz="1300">
+              <a:rPr sz="1200">
                 <a:solidFill>
                   <a:srgbClr val="666666"/>
                 </a:solidFill>
                 <a:latin typeface="Calibri"/>
               </a:rPr>
-              <a:t>A. Platform Portal — POC → MVP → PROD</a:t>
+              <a:t>Source</a:t>
             </a:r>
           </a:p>
         </p:txBody>
@@ -5477,14 +5918,14 @@
         </p:nvSpPr>
         <p:spPr>
           <a:xfrm>
-            <a:off x="1097280" y="2487168"/>
-            <a:ext cx="9966960" cy="1051560"/>
+            <a:off x="594360" y="2926080"/>
+            <a:ext cx="2560320" cy="640080"/>
           </a:xfrm>
           <a:prstGeom prst="roundRect">
             <a:avLst/>
           </a:prstGeom>
           <a:solidFill>
-            <a:srgbClr val="E2EFDA"/>
+            <a:srgbClr val="EDEDED"/>
           </a:solidFill>
           <a:ln w="12700">
             <a:solidFill>
@@ -5513,50 +5954,36 @@
           <a:p>
             <a:pPr algn="ctr" rtl="1"/>
             <a:r>
-              <a:rPr sz="1800" b="1">
+              <a:rPr sz="1200" b="1">
                 <a:solidFill>
                   <a:srgbClr val="333333"/>
                 </a:solidFill>
                 <a:latin typeface="Arial"/>
               </a:rPr>
-              <a:t>ب. الأتمتة والامتثال</a:t>
-            </a:r>
-          </a:p>
-          <a:p>
-            <a:pPr algn="ctr" rtl="0"/>
-            <a:r>
-              <a:rPr sz="1300">
-                <a:solidFill>
-                  <a:srgbClr val="666666"/>
-                </a:solidFill>
-                <a:latin typeface="Calibri"/>
-              </a:rPr>
-              <a:t>B. Automation &amp; Compliance — CI/CD gates</a:t>
-            </a:r>
-          </a:p>
-        </p:txBody>
-      </p:sp>
-      <p:sp>
-        <p:nvSpPr>
-          <p:cNvPr id="5" name="Rounded Rectangle 4"/>
+              <a:t>CRM / API</a:t>
+            </a:r>
+          </a:p>
+        </p:txBody>
+      </p:sp>
+      <p:sp>
+        <p:nvSpPr>
+          <p:cNvPr id="5" name="Right Arrow 4"/>
           <p:cNvSpPr/>
           <p:nvPr/>
         </p:nvSpPr>
         <p:spPr>
           <a:xfrm>
-            <a:off x="1097280" y="3694176"/>
-            <a:ext cx="9966960" cy="1051560"/>
-          </a:xfrm>
-          <a:prstGeom prst="roundRect">
+            <a:off x="3227832" y="2240280"/>
+            <a:ext cx="329184" cy="274320"/>
+          </a:xfrm>
+          <a:prstGeom prst="rightArrow">
             <a:avLst/>
           </a:prstGeom>
           <a:solidFill>
-            <a:srgbClr val="FDE9D9"/>
+            <a:srgbClr val="1F4E79"/>
           </a:solidFill>
-          <a:ln w="12700">
-            <a:solidFill>
-              <a:srgbClr val="1F4E79"/>
-            </a:solidFill>
+          <a:ln>
+            <a:noFill/>
           </a:ln>
           <a:effectLst/>
         </p:spPr>
@@ -5575,31 +6002,10 @@
           </a:fontRef>
         </p:style>
         <p:txBody>
-          <a:bodyPr rtlCol="0" anchor="ctr" wrap="square"/>
-          <a:lstStyle/>
-          <a:p>
-            <a:pPr algn="ctr" rtl="1"/>
-            <a:r>
-              <a:rPr sz="1800" b="1">
-                <a:solidFill>
-                  <a:srgbClr val="333333"/>
-                </a:solidFill>
-                <a:latin typeface="Arial"/>
-              </a:rPr>
-              <a:t>ج. الخدمات المشتركة</a:t>
-            </a:r>
-          </a:p>
-          <a:p>
-            <a:pPr algn="ctr" rtl="0"/>
-            <a:r>
-              <a:rPr sz="1300">
-                <a:solidFill>
-                  <a:srgbClr val="666666"/>
-                </a:solidFill>
-                <a:latin typeface="Calibri"/>
-              </a:rPr>
-              <a:t>C. Shared Services — Gateway, Prompts, Audit, Guardrails</a:t>
-            </a:r>
+          <a:bodyPr rtlCol="0" anchor="ctr"/>
+          <a:lstStyle/>
+          <a:p>
+            <a:pPr algn="ctr"/>
           </a:p>
         </p:txBody>
       </p:sp>
@@ -5611,14 +6017,14 @@
         </p:nvSpPr>
         <p:spPr>
           <a:xfrm>
-            <a:off x="1097280" y="4901184"/>
-            <a:ext cx="9966960" cy="1051560"/>
+            <a:off x="3474720" y="1874519"/>
+            <a:ext cx="2560320" cy="868680"/>
           </a:xfrm>
           <a:prstGeom prst="roundRect">
             <a:avLst/>
           </a:prstGeom>
           <a:solidFill>
-            <a:srgbClr val="EDEDED"/>
+            <a:srgbClr val="DCE6F1"/>
           </a:solidFill>
           <a:ln w="12700">
             <a:solidFill>
@@ -5647,32 +6053,486 @@
           <a:p>
             <a:pPr algn="ctr" rtl="1"/>
             <a:r>
-              <a:rPr sz="1800" b="1">
+              <a:rPr sz="1600" b="1">
                 <a:solidFill>
                   <a:srgbClr val="333333"/>
                 </a:solidFill>
                 <a:latin typeface="Arial"/>
               </a:rPr>
-              <a:t>د. الحوكمة والمراقبة</a:t>
+              <a:t>تحويل</a:t>
             </a:r>
           </a:p>
           <a:p>
             <a:pPr algn="ctr" rtl="0"/>
             <a:r>
-              <a:rPr sz="1300">
+              <a:rPr sz="1200">
                 <a:solidFill>
                   <a:srgbClr val="666666"/>
                 </a:solidFill>
                 <a:latin typeface="Calibri"/>
               </a:rPr>
-              <a:t>D. Governance &amp; Monitoring — Responsible AI, FinOps</a:t>
-            </a:r>
-          </a:p>
-        </p:txBody>
-      </p:sp>
-      <p:sp>
-        <p:nvSpPr>
-          <p:cNvPr id="7" name="TextBox 6"/>
+              <a:t>Transform</a:t>
+            </a:r>
+          </a:p>
+        </p:txBody>
+      </p:sp>
+      <p:sp>
+        <p:nvSpPr>
+          <p:cNvPr id="7" name="Rounded Rectangle 6"/>
+          <p:cNvSpPr/>
+          <p:nvPr/>
+        </p:nvSpPr>
+        <p:spPr>
+          <a:xfrm>
+            <a:off x="3474720" y="2926080"/>
+            <a:ext cx="2560320" cy="640080"/>
+          </a:xfrm>
+          <a:prstGeom prst="roundRect">
+            <a:avLst/>
+          </a:prstGeom>
+          <a:solidFill>
+            <a:srgbClr val="EDEDED"/>
+          </a:solidFill>
+          <a:ln w="12700">
+            <a:solidFill>
+              <a:srgbClr val="1F4E79"/>
+            </a:solidFill>
+          </a:ln>
+          <a:effectLst/>
+        </p:spPr>
+        <p:style>
+          <a:lnRef idx="1">
+            <a:schemeClr val="accent1"/>
+          </a:lnRef>
+          <a:fillRef idx="3">
+            <a:schemeClr val="accent1"/>
+          </a:fillRef>
+          <a:effectRef idx="2">
+            <a:schemeClr val="accent1"/>
+          </a:effectRef>
+          <a:fontRef idx="minor">
+            <a:schemeClr val="lt1"/>
+          </a:fontRef>
+        </p:style>
+        <p:txBody>
+          <a:bodyPr rtlCol="0" anchor="ctr" wrap="square"/>
+          <a:lstStyle/>
+          <a:p>
+            <a:pPr algn="ctr" rtl="1"/>
+            <a:r>
+              <a:rPr sz="1200" b="1">
+                <a:solidFill>
+                  <a:srgbClr val="333333"/>
+                </a:solidFill>
+                <a:latin typeface="Arial"/>
+              </a:rPr>
+              <a:t>تنظيف + توحيد</a:t>
+            </a:r>
+          </a:p>
+        </p:txBody>
+      </p:sp>
+      <p:sp>
+        <p:nvSpPr>
+          <p:cNvPr id="8" name="Right Arrow 7"/>
+          <p:cNvSpPr/>
+          <p:nvPr/>
+        </p:nvSpPr>
+        <p:spPr>
+          <a:xfrm>
+            <a:off x="6108192" y="2240280"/>
+            <a:ext cx="329184" cy="274320"/>
+          </a:xfrm>
+          <a:prstGeom prst="rightArrow">
+            <a:avLst/>
+          </a:prstGeom>
+          <a:solidFill>
+            <a:srgbClr val="1F4E79"/>
+          </a:solidFill>
+          <a:ln>
+            <a:noFill/>
+          </a:ln>
+          <a:effectLst/>
+        </p:spPr>
+        <p:style>
+          <a:lnRef idx="1">
+            <a:schemeClr val="accent1"/>
+          </a:lnRef>
+          <a:fillRef idx="3">
+            <a:schemeClr val="accent1"/>
+          </a:fillRef>
+          <a:effectRef idx="2">
+            <a:schemeClr val="accent1"/>
+          </a:effectRef>
+          <a:fontRef idx="minor">
+            <a:schemeClr val="lt1"/>
+          </a:fontRef>
+        </p:style>
+        <p:txBody>
+          <a:bodyPr rtlCol="0" anchor="ctr"/>
+          <a:lstStyle/>
+          <a:p>
+            <a:pPr algn="ctr"/>
+          </a:p>
+        </p:txBody>
+      </p:sp>
+      <p:sp>
+        <p:nvSpPr>
+          <p:cNvPr id="9" name="Rounded Rectangle 8"/>
+          <p:cNvSpPr/>
+          <p:nvPr/>
+        </p:nvSpPr>
+        <p:spPr>
+          <a:xfrm>
+            <a:off x="6355080" y="1874519"/>
+            <a:ext cx="2560320" cy="868680"/>
+          </a:xfrm>
+          <a:prstGeom prst="roundRect">
+            <a:avLst/>
+          </a:prstGeom>
+          <a:solidFill>
+            <a:srgbClr val="E2EFDA"/>
+          </a:solidFill>
+          <a:ln w="12700">
+            <a:solidFill>
+              <a:srgbClr val="1F4E79"/>
+            </a:solidFill>
+          </a:ln>
+          <a:effectLst/>
+        </p:spPr>
+        <p:style>
+          <a:lnRef idx="1">
+            <a:schemeClr val="accent1"/>
+          </a:lnRef>
+          <a:fillRef idx="3">
+            <a:schemeClr val="accent1"/>
+          </a:fillRef>
+          <a:effectRef idx="2">
+            <a:schemeClr val="accent1"/>
+          </a:effectRef>
+          <a:fontRef idx="minor">
+            <a:schemeClr val="lt1"/>
+          </a:fontRef>
+        </p:style>
+        <p:txBody>
+          <a:bodyPr rtlCol="0" anchor="ctr" wrap="square"/>
+          <a:lstStyle/>
+          <a:p>
+            <a:pPr algn="ctr" rtl="1"/>
+            <a:r>
+              <a:rPr sz="1600" b="1">
+                <a:solidFill>
+                  <a:srgbClr val="333333"/>
+                </a:solidFill>
+                <a:latin typeface="Arial"/>
+              </a:rPr>
+              <a:t>منتج بيانات</a:t>
+            </a:r>
+          </a:p>
+          <a:p>
+            <a:pPr algn="ctr" rtl="0"/>
+            <a:r>
+              <a:rPr sz="1200">
+                <a:solidFill>
+                  <a:srgbClr val="666666"/>
+                </a:solidFill>
+                <a:latin typeface="Calibri"/>
+              </a:rPr>
+              <a:t>Data product</a:t>
+            </a:r>
+          </a:p>
+        </p:txBody>
+      </p:sp>
+      <p:sp>
+        <p:nvSpPr>
+          <p:cNvPr id="10" name="Rounded Rectangle 9"/>
+          <p:cNvSpPr/>
+          <p:nvPr/>
+        </p:nvSpPr>
+        <p:spPr>
+          <a:xfrm>
+            <a:off x="6355080" y="2926080"/>
+            <a:ext cx="2560320" cy="640080"/>
+          </a:xfrm>
+          <a:prstGeom prst="roundRect">
+            <a:avLst/>
+          </a:prstGeom>
+          <a:solidFill>
+            <a:srgbClr val="EDEDED"/>
+          </a:solidFill>
+          <a:ln w="12700">
+            <a:solidFill>
+              <a:srgbClr val="1F4E79"/>
+            </a:solidFill>
+          </a:ln>
+          <a:effectLst/>
+        </p:spPr>
+        <p:style>
+          <a:lnRef idx="1">
+            <a:schemeClr val="accent1"/>
+          </a:lnRef>
+          <a:fillRef idx="3">
+            <a:schemeClr val="accent1"/>
+          </a:fillRef>
+          <a:effectRef idx="2">
+            <a:schemeClr val="accent1"/>
+          </a:effectRef>
+          <a:fontRef idx="minor">
+            <a:schemeClr val="lt1"/>
+          </a:fontRef>
+        </p:style>
+        <p:txBody>
+          <a:bodyPr rtlCol="0" anchor="ctr" wrap="square"/>
+          <a:lstStyle/>
+          <a:p>
+            <a:pPr algn="ctr" rtl="1"/>
+            <a:r>
+              <a:rPr sz="1200" b="1">
+                <a:solidFill>
+                  <a:srgbClr val="333333"/>
+                </a:solidFill>
+                <a:latin typeface="Arial"/>
+              </a:rPr>
+              <a:t>مخطط + مالك</a:t>
+            </a:r>
+          </a:p>
+        </p:txBody>
+      </p:sp>
+      <p:sp>
+        <p:nvSpPr>
+          <p:cNvPr id="11" name="Right Arrow 10"/>
+          <p:cNvSpPr/>
+          <p:nvPr/>
+        </p:nvSpPr>
+        <p:spPr>
+          <a:xfrm>
+            <a:off x="8988552" y="2240280"/>
+            <a:ext cx="329184" cy="274320"/>
+          </a:xfrm>
+          <a:prstGeom prst="rightArrow">
+            <a:avLst/>
+          </a:prstGeom>
+          <a:solidFill>
+            <a:srgbClr val="1F4E79"/>
+          </a:solidFill>
+          <a:ln>
+            <a:noFill/>
+          </a:ln>
+          <a:effectLst/>
+        </p:spPr>
+        <p:style>
+          <a:lnRef idx="1">
+            <a:schemeClr val="accent1"/>
+          </a:lnRef>
+          <a:fillRef idx="3">
+            <a:schemeClr val="accent1"/>
+          </a:fillRef>
+          <a:effectRef idx="2">
+            <a:schemeClr val="accent1"/>
+          </a:effectRef>
+          <a:fontRef idx="minor">
+            <a:schemeClr val="lt1"/>
+          </a:fontRef>
+        </p:style>
+        <p:txBody>
+          <a:bodyPr rtlCol="0" anchor="ctr"/>
+          <a:lstStyle/>
+          <a:p>
+            <a:pPr algn="ctr"/>
+          </a:p>
+        </p:txBody>
+      </p:sp>
+      <p:sp>
+        <p:nvSpPr>
+          <p:cNvPr id="12" name="Rounded Rectangle 11"/>
+          <p:cNvSpPr/>
+          <p:nvPr/>
+        </p:nvSpPr>
+        <p:spPr>
+          <a:xfrm>
+            <a:off x="9235440" y="1874519"/>
+            <a:ext cx="2560320" cy="868680"/>
+          </a:xfrm>
+          <a:prstGeom prst="roundRect">
+            <a:avLst/>
+          </a:prstGeom>
+          <a:solidFill>
+            <a:srgbClr val="FDE9D9"/>
+          </a:solidFill>
+          <a:ln w="12700">
+            <a:solidFill>
+              <a:srgbClr val="1F4E79"/>
+            </a:solidFill>
+          </a:ln>
+          <a:effectLst/>
+        </p:spPr>
+        <p:style>
+          <a:lnRef idx="1">
+            <a:schemeClr val="accent1"/>
+          </a:lnRef>
+          <a:fillRef idx="3">
+            <a:schemeClr val="accent1"/>
+          </a:fillRef>
+          <a:effectRef idx="2">
+            <a:schemeClr val="accent1"/>
+          </a:effectRef>
+          <a:fontRef idx="minor">
+            <a:schemeClr val="lt1"/>
+          </a:fontRef>
+        </p:style>
+        <p:txBody>
+          <a:bodyPr rtlCol="0" anchor="ctr" wrap="square"/>
+          <a:lstStyle/>
+          <a:p>
+            <a:pPr algn="ctr" rtl="1"/>
+            <a:r>
+              <a:rPr sz="1600" b="1">
+                <a:solidFill>
+                  <a:srgbClr val="333333"/>
+                </a:solidFill>
+                <a:latin typeface="Arial"/>
+              </a:rPr>
+              <a:t>استهلاك</a:t>
+            </a:r>
+          </a:p>
+          <a:p>
+            <a:pPr algn="ctr" rtl="0"/>
+            <a:r>
+              <a:rPr sz="1200">
+                <a:solidFill>
+                  <a:srgbClr val="666666"/>
+                </a:solidFill>
+                <a:latin typeface="Calibri"/>
+              </a:rPr>
+              <a:t>Consume</a:t>
+            </a:r>
+          </a:p>
+        </p:txBody>
+      </p:sp>
+      <p:sp>
+        <p:nvSpPr>
+          <p:cNvPr id="13" name="Rounded Rectangle 12"/>
+          <p:cNvSpPr/>
+          <p:nvPr/>
+        </p:nvSpPr>
+        <p:spPr>
+          <a:xfrm>
+            <a:off x="9235440" y="2926080"/>
+            <a:ext cx="2560320" cy="640080"/>
+          </a:xfrm>
+          <a:prstGeom prst="roundRect">
+            <a:avLst/>
+          </a:prstGeom>
+          <a:solidFill>
+            <a:srgbClr val="EDEDED"/>
+          </a:solidFill>
+          <a:ln w="12700">
+            <a:solidFill>
+              <a:srgbClr val="1F4E79"/>
+            </a:solidFill>
+          </a:ln>
+          <a:effectLst/>
+        </p:spPr>
+        <p:style>
+          <a:lnRef idx="1">
+            <a:schemeClr val="accent1"/>
+          </a:lnRef>
+          <a:fillRef idx="3">
+            <a:schemeClr val="accent1"/>
+          </a:fillRef>
+          <a:effectRef idx="2">
+            <a:schemeClr val="accent1"/>
+          </a:effectRef>
+          <a:fontRef idx="minor">
+            <a:schemeClr val="lt1"/>
+          </a:fontRef>
+        </p:style>
+        <p:txBody>
+          <a:bodyPr rtlCol="0" anchor="ctr" wrap="square"/>
+          <a:lstStyle/>
+          <a:p>
+            <a:pPr algn="ctr" rtl="1"/>
+            <a:r>
+              <a:rPr sz="1200" b="1">
+                <a:solidFill>
+                  <a:srgbClr val="333333"/>
+                </a:solidFill>
+                <a:latin typeface="Arial"/>
+              </a:rPr>
+              <a:t>لوحة / نموذج</a:t>
+            </a:r>
+          </a:p>
+        </p:txBody>
+      </p:sp>
+      <p:sp>
+        <p:nvSpPr>
+          <p:cNvPr id="14" name="Rounded Rectangle 13"/>
+          <p:cNvSpPr/>
+          <p:nvPr/>
+        </p:nvSpPr>
+        <p:spPr>
+          <a:xfrm>
+            <a:off x="2286000" y="4709160"/>
+            <a:ext cx="7635240" cy="731520"/>
+          </a:xfrm>
+          <a:prstGeom prst="roundRect">
+            <a:avLst/>
+          </a:prstGeom>
+          <a:solidFill>
+            <a:srgbClr val="DCE6F1"/>
+          </a:solidFill>
+          <a:ln w="12700">
+            <a:solidFill>
+              <a:srgbClr val="1F4E79"/>
+            </a:solidFill>
+          </a:ln>
+          <a:effectLst/>
+        </p:spPr>
+        <p:style>
+          <a:lnRef idx="1">
+            <a:schemeClr val="accent1"/>
+          </a:lnRef>
+          <a:fillRef idx="3">
+            <a:schemeClr val="accent1"/>
+          </a:fillRef>
+          <a:effectRef idx="2">
+            <a:schemeClr val="accent1"/>
+          </a:effectRef>
+          <a:fontRef idx="minor">
+            <a:schemeClr val="lt1"/>
+          </a:fontRef>
+        </p:style>
+        <p:txBody>
+          <a:bodyPr rtlCol="0" anchor="ctr" wrap="square"/>
+          <a:lstStyle/>
+          <a:p>
+            <a:pPr algn="ctr" rtl="1"/>
+            <a:r>
+              <a:rPr sz="1400" b="1">
+                <a:solidFill>
+                  <a:srgbClr val="333333"/>
+                </a:solidFill>
+                <a:latin typeface="Arial"/>
+              </a:rPr>
+              <a:t>لكل خطوة: مالك + وقت + سياسة + أثر التغيير</a:t>
+            </a:r>
+          </a:p>
+          <a:p>
+            <a:pPr algn="ctr" rtl="0"/>
+            <a:r>
+              <a:rPr sz="1200">
+                <a:solidFill>
+                  <a:srgbClr val="666666"/>
+                </a:solidFill>
+                <a:latin typeface="Calibri"/>
+              </a:rPr>
+              <a:t>For every step: owner + time + policy + change impact</a:t>
+            </a:r>
+          </a:p>
+        </p:txBody>
+      </p:sp>
+      <p:sp>
+        <p:nvSpPr>
+          <p:cNvPr id="15" name="TextBox 14"/>
           <p:cNvSpPr txBox="1"/>
           <p:nvPr/>
         </p:nvSpPr>
@@ -5700,20 +6560,20 @@
                 </a:solidFill>
                 <a:latin typeface="Arial"/>
               </a:rPr>
-              <a:t>النمط المرجعي المؤسسي (McKinsey) — نافذة موحدة فوق خدمات مشتركة محكومة.</a:t>
+              <a:t>اسأل «من أين جاءت هذه النتيجة؟» ثم اتبع السلسلة إلى المصدر.</a:t>
             </a:r>
           </a:p>
           <a:p>
             <a:pPr algn="r" rtl="0"/>
             <a:r>
-              <a:t>Enterprise reference pattern (McKinsey) — a unified pane over governed shared services.</a:t>
-            </a:r>
-          </a:p>
-        </p:txBody>
-      </p:sp>
-      <p:sp>
-        <p:nvSpPr>
-          <p:cNvPr id="8" name="TextBox 7"/>
+              <a:t>Ask “where did this result come from?” then follow the chain to its source.</a:t>
+            </a:r>
+          </a:p>
+        </p:txBody>
+      </p:sp>
+      <p:sp>
+        <p:nvSpPr>
+          <p:cNvPr id="16" name="TextBox 15"/>
           <p:cNvSpPr txBox="1"/>
           <p:nvPr/>
         </p:nvSpPr>
@@ -5748,7 +6608,7 @@
       </p:sp>
       <p:sp>
         <p:nvSpPr>
-          <p:cNvPr id="9" name="TextBox 8"/>
+          <p:cNvPr id="17" name="TextBox 16"/>
           <p:cNvSpPr txBox="1"/>
           <p:nvPr/>
         </p:nvSpPr>
@@ -5776,7 +6636,7 @@
                 </a:solidFill>
                 <a:latin typeface="Calibri"/>
               </a:rPr>
-              <a:t>V11  •  6/9</a:t>
+              <a:t>V11  •  4/10</a:t>
             </a:r>
           </a:p>
         </p:txBody>
